--- a/Week_05/Lecture 09 - Introduction to Agentic AI.pptx
+++ b/Week_05/Lecture 09 - Introduction to Agentic AI.pptx
@@ -5,68 +5,69 @@
     <p:sldMasterId id="2147483659" r:id="rId1"/>
   </p:sldMasterIdLst>
   <p:notesMasterIdLst>
-    <p:notesMasterId r:id="rId22"/>
+    <p:notesMasterId r:id="rId23"/>
   </p:notesMasterIdLst>
   <p:sldIdLst>
-    <p:sldId id="256" r:id="rId2"/>
-    <p:sldId id="257" r:id="rId3"/>
-    <p:sldId id="258" r:id="rId4"/>
-    <p:sldId id="259" r:id="rId5"/>
-    <p:sldId id="260" r:id="rId6"/>
-    <p:sldId id="261" r:id="rId7"/>
-    <p:sldId id="262" r:id="rId8"/>
-    <p:sldId id="263" r:id="rId9"/>
-    <p:sldId id="264" r:id="rId10"/>
-    <p:sldId id="265" r:id="rId11"/>
-    <p:sldId id="266" r:id="rId12"/>
-    <p:sldId id="267" r:id="rId13"/>
-    <p:sldId id="268" r:id="rId14"/>
-    <p:sldId id="269" r:id="rId15"/>
-    <p:sldId id="270" r:id="rId16"/>
-    <p:sldId id="271" r:id="rId17"/>
-    <p:sldId id="272" r:id="rId18"/>
-    <p:sldId id="273" r:id="rId19"/>
-    <p:sldId id="274" r:id="rId20"/>
-    <p:sldId id="275" r:id="rId21"/>
+    <p:sldId id="276" r:id="rId2"/>
+    <p:sldId id="256" r:id="rId3"/>
+    <p:sldId id="257" r:id="rId4"/>
+    <p:sldId id="258" r:id="rId5"/>
+    <p:sldId id="259" r:id="rId6"/>
+    <p:sldId id="260" r:id="rId7"/>
+    <p:sldId id="261" r:id="rId8"/>
+    <p:sldId id="262" r:id="rId9"/>
+    <p:sldId id="263" r:id="rId10"/>
+    <p:sldId id="264" r:id="rId11"/>
+    <p:sldId id="265" r:id="rId12"/>
+    <p:sldId id="266" r:id="rId13"/>
+    <p:sldId id="267" r:id="rId14"/>
+    <p:sldId id="268" r:id="rId15"/>
+    <p:sldId id="269" r:id="rId16"/>
+    <p:sldId id="270" r:id="rId17"/>
+    <p:sldId id="271" r:id="rId18"/>
+    <p:sldId id="272" r:id="rId19"/>
+    <p:sldId id="273" r:id="rId20"/>
+    <p:sldId id="274" r:id="rId21"/>
+    <p:sldId id="275" r:id="rId22"/>
   </p:sldIdLst>
   <p:sldSz cx="12192000" cy="6858000"/>
   <p:notesSz cx="6858000" cy="9144000"/>
   <p:embeddedFontLst>
     <p:embeddedFont>
       <p:font typeface="DM Sans" pitchFamily="2" charset="0"/>
-      <p:regular r:id="rId23"/>
-      <p:bold r:id="rId24"/>
-      <p:italic r:id="rId25"/>
-      <p:boldItalic r:id="rId26"/>
+      <p:regular r:id="rId24"/>
+      <p:bold r:id="rId25"/>
+      <p:italic r:id="rId26"/>
+      <p:boldItalic r:id="rId27"/>
     </p:embeddedFont>
     <p:embeddedFont>
       <p:font typeface="DM Sans Black" panose="020B0604020202020204" charset="0"/>
-      <p:bold r:id="rId27"/>
-      <p:boldItalic r:id="rId28"/>
+      <p:bold r:id="rId28"/>
+      <p:boldItalic r:id="rId29"/>
     </p:embeddedFont>
     <p:embeddedFont>
       <p:font typeface="DM Sans ExtraBold" panose="020B0604020202020204" charset="0"/>
-      <p:bold r:id="rId29"/>
-      <p:boldItalic r:id="rId30"/>
+      <p:bold r:id="rId30"/>
+      <p:boldItalic r:id="rId31"/>
     </p:embeddedFont>
     <p:embeddedFont>
       <p:font typeface="Inter" panose="020B0604020202020204" charset="0"/>
-      <p:bold r:id="rId31"/>
-      <p:boldItalic r:id="rId32"/>
+      <p:bold r:id="rId32"/>
+      <p:boldItalic r:id="rId33"/>
     </p:embeddedFont>
     <p:embeddedFont>
       <p:font typeface="Inter Medium" panose="020B0604020202020204" charset="0"/>
-      <p:regular r:id="rId33"/>
-      <p:bold r:id="rId34"/>
-      <p:italic r:id="rId35"/>
-      <p:boldItalic r:id="rId36"/>
+      <p:regular r:id="rId34"/>
+      <p:bold r:id="rId35"/>
+      <p:italic r:id="rId36"/>
+      <p:boldItalic r:id="rId37"/>
     </p:embeddedFont>
     <p:embeddedFont>
       <p:font typeface="Inter SemiBold" panose="020B0604020202020204" charset="0"/>
-      <p:regular r:id="rId37"/>
-      <p:bold r:id="rId38"/>
-      <p:italic r:id="rId39"/>
-      <p:boldItalic r:id="rId40"/>
+      <p:regular r:id="rId38"/>
+      <p:bold r:id="rId39"/>
+      <p:italic r:id="rId40"/>
+      <p:boldItalic r:id="rId41"/>
     </p:embeddedFont>
   </p:embeddedFontLst>
   <p:defaultTextStyle>
@@ -763,6 +764,1173 @@
   <p:cSld>
     <p:spTree>
       <p:nvGrpSpPr>
+        <p:cNvPr id="1" name="Shape 249">
+          <a:extLst>
+            <a:ext uri="{FF2B5EF4-FFF2-40B4-BE49-F238E27FC236}">
+              <a16:creationId xmlns:a16="http://schemas.microsoft.com/office/drawing/2014/main" id="{B6345908-C3FC-ABC1-6B97-D353CCBB8D2E}"/>
+            </a:ext>
+          </a:extLst>
+        </p:cNvPr>
+        <p:cNvGrpSpPr/>
+        <p:nvPr/>
+      </p:nvGrpSpPr>
+      <p:grpSpPr>
+        <a:xfrm>
+          <a:off x="0" y="0"/>
+          <a:ext cx="0" cy="0"/>
+          <a:chOff x="0" y="0"/>
+          <a:chExt cx="0" cy="0"/>
+        </a:xfrm>
+      </p:grpSpPr>
+      <p:sp>
+        <p:nvSpPr>
+          <p:cNvPr id="250" name="Google Shape;250;p7:notes">
+            <a:extLst>
+              <a:ext uri="{FF2B5EF4-FFF2-40B4-BE49-F238E27FC236}">
+                <a16:creationId xmlns:a16="http://schemas.microsoft.com/office/drawing/2014/main" id="{7725C15A-FE88-A761-8E31-4BF6939FD258}"/>
+              </a:ext>
+            </a:extLst>
+          </p:cNvPr>
+          <p:cNvSpPr txBox="1">
+            <a:spLocks noGrp="1"/>
+          </p:cNvSpPr>
+          <p:nvPr>
+            <p:ph type="body" idx="1"/>
+          </p:nvPr>
+        </p:nvSpPr>
+        <p:spPr>
+          <a:xfrm>
+            <a:off x="685800" y="4343400"/>
+            <a:ext cx="5486400" cy="4114800"/>
+          </a:xfrm>
+          <a:prstGeom prst="rect">
+            <a:avLst/>
+          </a:prstGeom>
+        </p:spPr>
+        <p:txBody>
+          <a:bodyPr spcFirstLastPara="1" wrap="square" lIns="91425" tIns="91425" rIns="91425" bIns="91425" anchor="t" anchorCtr="0">
+            <a:noAutofit/>
+          </a:bodyPr>
+          <a:lstStyle/>
+          <a:p>
+            <a:pPr marL="0" lvl="0" indent="0" algn="l" rtl="0">
+              <a:spcBef>
+                <a:spcPts val="0"/>
+              </a:spcBef>
+              <a:spcAft>
+                <a:spcPts val="0"/>
+              </a:spcAft>
+              <a:buNone/>
+            </a:pPr>
+            <a:endParaRPr/>
+          </a:p>
+        </p:txBody>
+      </p:sp>
+      <p:sp>
+        <p:nvSpPr>
+          <p:cNvPr id="251" name="Google Shape;251;p7:notes">
+            <a:extLst>
+              <a:ext uri="{FF2B5EF4-FFF2-40B4-BE49-F238E27FC236}">
+                <a16:creationId xmlns:a16="http://schemas.microsoft.com/office/drawing/2014/main" id="{0FE69B65-ECA7-EEDA-42EA-370CA9200F92}"/>
+              </a:ext>
+            </a:extLst>
+          </p:cNvPr>
+          <p:cNvSpPr>
+            <a:spLocks noGrp="1" noRot="1" noChangeAspect="1"/>
+          </p:cNvSpPr>
+          <p:nvPr>
+            <p:ph type="sldImg" idx="2"/>
+          </p:nvPr>
+        </p:nvSpPr>
+        <p:spPr>
+          <a:xfrm>
+            <a:off x="381000" y="685800"/>
+            <a:ext cx="6096000" cy="3429000"/>
+          </a:xfrm>
+          <a:custGeom>
+            <a:avLst/>
+            <a:gdLst/>
+            <a:ahLst/>
+            <a:cxnLst/>
+            <a:rect l="l" t="t" r="r" b="b"/>
+            <a:pathLst>
+              <a:path w="120000" h="120000" extrusionOk="0">
+                <a:moveTo>
+                  <a:pt x="0" y="0"/>
+                </a:moveTo>
+                <a:lnTo>
+                  <a:pt x="120000" y="0"/>
+                </a:lnTo>
+                <a:lnTo>
+                  <a:pt x="120000" y="120000"/>
+                </a:lnTo>
+                <a:lnTo>
+                  <a:pt x="0" y="120000"/>
+                </a:lnTo>
+                <a:close/>
+              </a:path>
+            </a:pathLst>
+          </a:custGeom>
+        </p:spPr>
+      </p:sp>
+    </p:spTree>
+    <p:extLst>
+      <p:ext uri="{BB962C8B-B14F-4D97-AF65-F5344CB8AC3E}">
+        <p14:creationId xmlns:p14="http://schemas.microsoft.com/office/powerpoint/2010/main" val="1479663009"/>
+      </p:ext>
+    </p:extLst>
+  </p:cSld>
+  <p:clrMapOvr>
+    <a:masterClrMapping/>
+  </p:clrMapOvr>
+</p:notes>
+</file>
+
+<file path=ppt/notesSlides/notesSlide10.xml><?xml version="1.0" encoding="utf-8"?>
+<p:notes xmlns:a="http://schemas.openxmlformats.org/drawingml/2006/main" xmlns:r="http://schemas.openxmlformats.org/officeDocument/2006/relationships" xmlns:p="http://schemas.openxmlformats.org/presentationml/2006/main" showMasterSp="0" showMasterPhAnim="0">
+  <p:cSld>
+    <p:spTree>
+      <p:nvGrpSpPr>
+        <p:cNvPr id="1" name="Shape 278"/>
+        <p:cNvGrpSpPr/>
+        <p:nvPr/>
+      </p:nvGrpSpPr>
+      <p:grpSpPr>
+        <a:xfrm>
+          <a:off x="0" y="0"/>
+          <a:ext cx="0" cy="0"/>
+          <a:chOff x="0" y="0"/>
+          <a:chExt cx="0" cy="0"/>
+        </a:xfrm>
+      </p:grpSpPr>
+      <p:sp>
+        <p:nvSpPr>
+          <p:cNvPr id="279" name="Google Shape;279;p9:notes"/>
+          <p:cNvSpPr txBox="1">
+            <a:spLocks noGrp="1"/>
+          </p:cNvSpPr>
+          <p:nvPr>
+            <p:ph type="body" idx="1"/>
+          </p:nvPr>
+        </p:nvSpPr>
+        <p:spPr>
+          <a:xfrm>
+            <a:off x="685800" y="4343400"/>
+            <a:ext cx="5486400" cy="4114800"/>
+          </a:xfrm>
+          <a:prstGeom prst="rect">
+            <a:avLst/>
+          </a:prstGeom>
+        </p:spPr>
+        <p:txBody>
+          <a:bodyPr spcFirstLastPara="1" wrap="square" lIns="91425" tIns="91425" rIns="91425" bIns="91425" anchor="t" anchorCtr="0">
+            <a:noAutofit/>
+          </a:bodyPr>
+          <a:lstStyle/>
+          <a:p>
+            <a:pPr marL="0" lvl="0" indent="0" algn="l" rtl="0">
+              <a:spcBef>
+                <a:spcPts val="0"/>
+              </a:spcBef>
+              <a:spcAft>
+                <a:spcPts val="0"/>
+              </a:spcAft>
+              <a:buNone/>
+            </a:pPr>
+            <a:endParaRPr/>
+          </a:p>
+        </p:txBody>
+      </p:sp>
+      <p:sp>
+        <p:nvSpPr>
+          <p:cNvPr id="280" name="Google Shape;280;p9:notes"/>
+          <p:cNvSpPr>
+            <a:spLocks noGrp="1" noRot="1" noChangeAspect="1"/>
+          </p:cNvSpPr>
+          <p:nvPr>
+            <p:ph type="sldImg" idx="2"/>
+          </p:nvPr>
+        </p:nvSpPr>
+        <p:spPr>
+          <a:xfrm>
+            <a:off x="1143225" y="685800"/>
+            <a:ext cx="4572300" cy="3429000"/>
+          </a:xfrm>
+          <a:custGeom>
+            <a:avLst/>
+            <a:gdLst/>
+            <a:ahLst/>
+            <a:cxnLst/>
+            <a:rect l="l" t="t" r="r" b="b"/>
+            <a:pathLst>
+              <a:path w="120000" h="120000" extrusionOk="0">
+                <a:moveTo>
+                  <a:pt x="0" y="0"/>
+                </a:moveTo>
+                <a:lnTo>
+                  <a:pt x="120000" y="0"/>
+                </a:lnTo>
+                <a:lnTo>
+                  <a:pt x="120000" y="120000"/>
+                </a:lnTo>
+                <a:lnTo>
+                  <a:pt x="0" y="120000"/>
+                </a:lnTo>
+                <a:close/>
+              </a:path>
+            </a:pathLst>
+          </a:custGeom>
+        </p:spPr>
+      </p:sp>
+    </p:spTree>
+  </p:cSld>
+  <p:clrMapOvr>
+    <a:masterClrMapping/>
+  </p:clrMapOvr>
+</p:notes>
+</file>
+
+<file path=ppt/notesSlides/notesSlide11.xml><?xml version="1.0" encoding="utf-8"?>
+<p:notes xmlns:a="http://schemas.openxmlformats.org/drawingml/2006/main" xmlns:r="http://schemas.openxmlformats.org/officeDocument/2006/relationships" xmlns:p="http://schemas.openxmlformats.org/presentationml/2006/main" showMasterSp="0" showMasterPhAnim="0">
+  <p:cSld>
+    <p:spTree>
+      <p:nvGrpSpPr>
+        <p:cNvPr id="1" name="Shape 305"/>
+        <p:cNvGrpSpPr/>
+        <p:nvPr/>
+      </p:nvGrpSpPr>
+      <p:grpSpPr>
+        <a:xfrm>
+          <a:off x="0" y="0"/>
+          <a:ext cx="0" cy="0"/>
+          <a:chOff x="0" y="0"/>
+          <a:chExt cx="0" cy="0"/>
+        </a:xfrm>
+      </p:grpSpPr>
+      <p:sp>
+        <p:nvSpPr>
+          <p:cNvPr id="306" name="Google Shape;306;p10:notes"/>
+          <p:cNvSpPr txBox="1">
+            <a:spLocks noGrp="1"/>
+          </p:cNvSpPr>
+          <p:nvPr>
+            <p:ph type="body" idx="1"/>
+          </p:nvPr>
+        </p:nvSpPr>
+        <p:spPr>
+          <a:xfrm>
+            <a:off x="685800" y="4343400"/>
+            <a:ext cx="5486400" cy="4114800"/>
+          </a:xfrm>
+          <a:prstGeom prst="rect">
+            <a:avLst/>
+          </a:prstGeom>
+        </p:spPr>
+        <p:txBody>
+          <a:bodyPr spcFirstLastPara="1" wrap="square" lIns="91425" tIns="91425" rIns="91425" bIns="91425" anchor="t" anchorCtr="0">
+            <a:noAutofit/>
+          </a:bodyPr>
+          <a:lstStyle/>
+          <a:p>
+            <a:pPr marL="0" lvl="0" indent="0" algn="l" rtl="0">
+              <a:spcBef>
+                <a:spcPts val="0"/>
+              </a:spcBef>
+              <a:spcAft>
+                <a:spcPts val="0"/>
+              </a:spcAft>
+              <a:buNone/>
+            </a:pPr>
+            <a:endParaRPr/>
+          </a:p>
+        </p:txBody>
+      </p:sp>
+      <p:sp>
+        <p:nvSpPr>
+          <p:cNvPr id="307" name="Google Shape;307;p10:notes"/>
+          <p:cNvSpPr>
+            <a:spLocks noGrp="1" noRot="1" noChangeAspect="1"/>
+          </p:cNvSpPr>
+          <p:nvPr>
+            <p:ph type="sldImg" idx="2"/>
+          </p:nvPr>
+        </p:nvSpPr>
+        <p:spPr>
+          <a:xfrm>
+            <a:off x="381000" y="685800"/>
+            <a:ext cx="6096000" cy="3429000"/>
+          </a:xfrm>
+          <a:custGeom>
+            <a:avLst/>
+            <a:gdLst/>
+            <a:ahLst/>
+            <a:cxnLst/>
+            <a:rect l="l" t="t" r="r" b="b"/>
+            <a:pathLst>
+              <a:path w="120000" h="120000" extrusionOk="0">
+                <a:moveTo>
+                  <a:pt x="0" y="0"/>
+                </a:moveTo>
+                <a:lnTo>
+                  <a:pt x="120000" y="0"/>
+                </a:lnTo>
+                <a:lnTo>
+                  <a:pt x="120000" y="120000"/>
+                </a:lnTo>
+                <a:lnTo>
+                  <a:pt x="0" y="120000"/>
+                </a:lnTo>
+                <a:close/>
+              </a:path>
+            </a:pathLst>
+          </a:custGeom>
+        </p:spPr>
+      </p:sp>
+    </p:spTree>
+  </p:cSld>
+  <p:clrMapOvr>
+    <a:masterClrMapping/>
+  </p:clrMapOvr>
+</p:notes>
+</file>
+
+<file path=ppt/notesSlides/notesSlide12.xml><?xml version="1.0" encoding="utf-8"?>
+<p:notes xmlns:a="http://schemas.openxmlformats.org/drawingml/2006/main" xmlns:r="http://schemas.openxmlformats.org/officeDocument/2006/relationships" xmlns:p="http://schemas.openxmlformats.org/presentationml/2006/main" showMasterSp="0" showMasterPhAnim="0">
+  <p:cSld>
+    <p:spTree>
+      <p:nvGrpSpPr>
+        <p:cNvPr id="1" name="Shape 333"/>
+        <p:cNvGrpSpPr/>
+        <p:nvPr/>
+      </p:nvGrpSpPr>
+      <p:grpSpPr>
+        <a:xfrm>
+          <a:off x="0" y="0"/>
+          <a:ext cx="0" cy="0"/>
+          <a:chOff x="0" y="0"/>
+          <a:chExt cx="0" cy="0"/>
+        </a:xfrm>
+      </p:grpSpPr>
+      <p:sp>
+        <p:nvSpPr>
+          <p:cNvPr id="334" name="Google Shape;334;p11:notes"/>
+          <p:cNvSpPr txBox="1">
+            <a:spLocks noGrp="1"/>
+          </p:cNvSpPr>
+          <p:nvPr>
+            <p:ph type="body" idx="1"/>
+          </p:nvPr>
+        </p:nvSpPr>
+        <p:spPr>
+          <a:xfrm>
+            <a:off x="685800" y="4343400"/>
+            <a:ext cx="5486400" cy="4114800"/>
+          </a:xfrm>
+          <a:prstGeom prst="rect">
+            <a:avLst/>
+          </a:prstGeom>
+        </p:spPr>
+        <p:txBody>
+          <a:bodyPr spcFirstLastPara="1" wrap="square" lIns="91425" tIns="91425" rIns="91425" bIns="91425" anchor="t" anchorCtr="0">
+            <a:noAutofit/>
+          </a:bodyPr>
+          <a:lstStyle/>
+          <a:p>
+            <a:pPr marL="0" lvl="0" indent="0" algn="l" rtl="0">
+              <a:spcBef>
+                <a:spcPts val="0"/>
+              </a:spcBef>
+              <a:spcAft>
+                <a:spcPts val="0"/>
+              </a:spcAft>
+              <a:buNone/>
+            </a:pPr>
+            <a:endParaRPr/>
+          </a:p>
+        </p:txBody>
+      </p:sp>
+      <p:sp>
+        <p:nvSpPr>
+          <p:cNvPr id="335" name="Google Shape;335;p11:notes"/>
+          <p:cNvSpPr>
+            <a:spLocks noGrp="1" noRot="1" noChangeAspect="1"/>
+          </p:cNvSpPr>
+          <p:nvPr>
+            <p:ph type="sldImg" idx="2"/>
+          </p:nvPr>
+        </p:nvSpPr>
+        <p:spPr>
+          <a:xfrm>
+            <a:off x="381000" y="685800"/>
+            <a:ext cx="6096000" cy="3429000"/>
+          </a:xfrm>
+          <a:custGeom>
+            <a:avLst/>
+            <a:gdLst/>
+            <a:ahLst/>
+            <a:cxnLst/>
+            <a:rect l="l" t="t" r="r" b="b"/>
+            <a:pathLst>
+              <a:path w="120000" h="120000" extrusionOk="0">
+                <a:moveTo>
+                  <a:pt x="0" y="0"/>
+                </a:moveTo>
+                <a:lnTo>
+                  <a:pt x="120000" y="0"/>
+                </a:lnTo>
+                <a:lnTo>
+                  <a:pt x="120000" y="120000"/>
+                </a:lnTo>
+                <a:lnTo>
+                  <a:pt x="0" y="120000"/>
+                </a:lnTo>
+                <a:close/>
+              </a:path>
+            </a:pathLst>
+          </a:custGeom>
+        </p:spPr>
+      </p:sp>
+    </p:spTree>
+  </p:cSld>
+  <p:clrMapOvr>
+    <a:masterClrMapping/>
+  </p:clrMapOvr>
+</p:notes>
+</file>
+
+<file path=ppt/notesSlides/notesSlide13.xml><?xml version="1.0" encoding="utf-8"?>
+<p:notes xmlns:a="http://schemas.openxmlformats.org/drawingml/2006/main" xmlns:r="http://schemas.openxmlformats.org/officeDocument/2006/relationships" xmlns:p="http://schemas.openxmlformats.org/presentationml/2006/main" showMasterSp="0" showMasterPhAnim="0">
+  <p:cSld>
+    <p:spTree>
+      <p:nvGrpSpPr>
+        <p:cNvPr id="1" name="Shape 365"/>
+        <p:cNvGrpSpPr/>
+        <p:nvPr/>
+      </p:nvGrpSpPr>
+      <p:grpSpPr>
+        <a:xfrm>
+          <a:off x="0" y="0"/>
+          <a:ext cx="0" cy="0"/>
+          <a:chOff x="0" y="0"/>
+          <a:chExt cx="0" cy="0"/>
+        </a:xfrm>
+      </p:grpSpPr>
+      <p:sp>
+        <p:nvSpPr>
+          <p:cNvPr id="366" name="Google Shape;366;p12:notes"/>
+          <p:cNvSpPr txBox="1">
+            <a:spLocks noGrp="1"/>
+          </p:cNvSpPr>
+          <p:nvPr>
+            <p:ph type="body" idx="1"/>
+          </p:nvPr>
+        </p:nvSpPr>
+        <p:spPr>
+          <a:xfrm>
+            <a:off x="685800" y="4343400"/>
+            <a:ext cx="5486400" cy="4114800"/>
+          </a:xfrm>
+          <a:prstGeom prst="rect">
+            <a:avLst/>
+          </a:prstGeom>
+        </p:spPr>
+        <p:txBody>
+          <a:bodyPr spcFirstLastPara="1" wrap="square" lIns="91425" tIns="91425" rIns="91425" bIns="91425" anchor="t" anchorCtr="0">
+            <a:noAutofit/>
+          </a:bodyPr>
+          <a:lstStyle/>
+          <a:p>
+            <a:pPr marL="0" lvl="0" indent="0" algn="l" rtl="0">
+              <a:spcBef>
+                <a:spcPts val="0"/>
+              </a:spcBef>
+              <a:spcAft>
+                <a:spcPts val="0"/>
+              </a:spcAft>
+              <a:buNone/>
+            </a:pPr>
+            <a:endParaRPr/>
+          </a:p>
+        </p:txBody>
+      </p:sp>
+      <p:sp>
+        <p:nvSpPr>
+          <p:cNvPr id="367" name="Google Shape;367;p12:notes"/>
+          <p:cNvSpPr>
+            <a:spLocks noGrp="1" noRot="1" noChangeAspect="1"/>
+          </p:cNvSpPr>
+          <p:nvPr>
+            <p:ph type="sldImg" idx="2"/>
+          </p:nvPr>
+        </p:nvSpPr>
+        <p:spPr>
+          <a:xfrm>
+            <a:off x="381000" y="685800"/>
+            <a:ext cx="6096000" cy="3429000"/>
+          </a:xfrm>
+          <a:custGeom>
+            <a:avLst/>
+            <a:gdLst/>
+            <a:ahLst/>
+            <a:cxnLst/>
+            <a:rect l="l" t="t" r="r" b="b"/>
+            <a:pathLst>
+              <a:path w="120000" h="120000" extrusionOk="0">
+                <a:moveTo>
+                  <a:pt x="0" y="0"/>
+                </a:moveTo>
+                <a:lnTo>
+                  <a:pt x="120000" y="0"/>
+                </a:lnTo>
+                <a:lnTo>
+                  <a:pt x="120000" y="120000"/>
+                </a:lnTo>
+                <a:lnTo>
+                  <a:pt x="0" y="120000"/>
+                </a:lnTo>
+                <a:close/>
+              </a:path>
+            </a:pathLst>
+          </a:custGeom>
+        </p:spPr>
+      </p:sp>
+    </p:spTree>
+  </p:cSld>
+  <p:clrMapOvr>
+    <a:masterClrMapping/>
+  </p:clrMapOvr>
+</p:notes>
+</file>
+
+<file path=ppt/notesSlides/notesSlide14.xml><?xml version="1.0" encoding="utf-8"?>
+<p:notes xmlns:a="http://schemas.openxmlformats.org/drawingml/2006/main" xmlns:r="http://schemas.openxmlformats.org/officeDocument/2006/relationships" xmlns:p="http://schemas.openxmlformats.org/presentationml/2006/main" showMasterSp="0" showMasterPhAnim="0">
+  <p:cSld>
+    <p:spTree>
+      <p:nvGrpSpPr>
+        <p:cNvPr id="1" name="Shape 387"/>
+        <p:cNvGrpSpPr/>
+        <p:nvPr/>
+      </p:nvGrpSpPr>
+      <p:grpSpPr>
+        <a:xfrm>
+          <a:off x="0" y="0"/>
+          <a:ext cx="0" cy="0"/>
+          <a:chOff x="0" y="0"/>
+          <a:chExt cx="0" cy="0"/>
+        </a:xfrm>
+      </p:grpSpPr>
+      <p:sp>
+        <p:nvSpPr>
+          <p:cNvPr id="388" name="Google Shape;388;p13:notes"/>
+          <p:cNvSpPr txBox="1">
+            <a:spLocks noGrp="1"/>
+          </p:cNvSpPr>
+          <p:nvPr>
+            <p:ph type="body" idx="1"/>
+          </p:nvPr>
+        </p:nvSpPr>
+        <p:spPr>
+          <a:xfrm>
+            <a:off x="685800" y="4343400"/>
+            <a:ext cx="5486400" cy="4114800"/>
+          </a:xfrm>
+          <a:prstGeom prst="rect">
+            <a:avLst/>
+          </a:prstGeom>
+        </p:spPr>
+        <p:txBody>
+          <a:bodyPr spcFirstLastPara="1" wrap="square" lIns="91425" tIns="91425" rIns="91425" bIns="91425" anchor="t" anchorCtr="0">
+            <a:noAutofit/>
+          </a:bodyPr>
+          <a:lstStyle/>
+          <a:p>
+            <a:pPr marL="0" lvl="0" indent="0" algn="l" rtl="0">
+              <a:spcBef>
+                <a:spcPts val="0"/>
+              </a:spcBef>
+              <a:spcAft>
+                <a:spcPts val="0"/>
+              </a:spcAft>
+              <a:buNone/>
+            </a:pPr>
+            <a:endParaRPr/>
+          </a:p>
+        </p:txBody>
+      </p:sp>
+      <p:sp>
+        <p:nvSpPr>
+          <p:cNvPr id="389" name="Google Shape;389;p13:notes"/>
+          <p:cNvSpPr>
+            <a:spLocks noGrp="1" noRot="1" noChangeAspect="1"/>
+          </p:cNvSpPr>
+          <p:nvPr>
+            <p:ph type="sldImg" idx="2"/>
+          </p:nvPr>
+        </p:nvSpPr>
+        <p:spPr>
+          <a:xfrm>
+            <a:off x="381000" y="685800"/>
+            <a:ext cx="6096000" cy="3429000"/>
+          </a:xfrm>
+          <a:custGeom>
+            <a:avLst/>
+            <a:gdLst/>
+            <a:ahLst/>
+            <a:cxnLst/>
+            <a:rect l="l" t="t" r="r" b="b"/>
+            <a:pathLst>
+              <a:path w="120000" h="120000" extrusionOk="0">
+                <a:moveTo>
+                  <a:pt x="0" y="0"/>
+                </a:moveTo>
+                <a:lnTo>
+                  <a:pt x="120000" y="0"/>
+                </a:lnTo>
+                <a:lnTo>
+                  <a:pt x="120000" y="120000"/>
+                </a:lnTo>
+                <a:lnTo>
+                  <a:pt x="0" y="120000"/>
+                </a:lnTo>
+                <a:close/>
+              </a:path>
+            </a:pathLst>
+          </a:custGeom>
+        </p:spPr>
+      </p:sp>
+    </p:spTree>
+  </p:cSld>
+  <p:clrMapOvr>
+    <a:masterClrMapping/>
+  </p:clrMapOvr>
+</p:notes>
+</file>
+
+<file path=ppt/notesSlides/notesSlide15.xml><?xml version="1.0" encoding="utf-8"?>
+<p:notes xmlns:a="http://schemas.openxmlformats.org/drawingml/2006/main" xmlns:r="http://schemas.openxmlformats.org/officeDocument/2006/relationships" xmlns:p="http://schemas.openxmlformats.org/presentationml/2006/main" showMasterSp="0" showMasterPhAnim="0">
+  <p:cSld>
+    <p:spTree>
+      <p:nvGrpSpPr>
+        <p:cNvPr id="1" name="Shape 410"/>
+        <p:cNvGrpSpPr/>
+        <p:nvPr/>
+      </p:nvGrpSpPr>
+      <p:grpSpPr>
+        <a:xfrm>
+          <a:off x="0" y="0"/>
+          <a:ext cx="0" cy="0"/>
+          <a:chOff x="0" y="0"/>
+          <a:chExt cx="0" cy="0"/>
+        </a:xfrm>
+      </p:grpSpPr>
+      <p:sp>
+        <p:nvSpPr>
+          <p:cNvPr id="411" name="Google Shape;411;p14:notes"/>
+          <p:cNvSpPr txBox="1">
+            <a:spLocks noGrp="1"/>
+          </p:cNvSpPr>
+          <p:nvPr>
+            <p:ph type="body" idx="1"/>
+          </p:nvPr>
+        </p:nvSpPr>
+        <p:spPr>
+          <a:xfrm>
+            <a:off x="685800" y="4343400"/>
+            <a:ext cx="5486400" cy="4114800"/>
+          </a:xfrm>
+          <a:prstGeom prst="rect">
+            <a:avLst/>
+          </a:prstGeom>
+        </p:spPr>
+        <p:txBody>
+          <a:bodyPr spcFirstLastPara="1" wrap="square" lIns="91425" tIns="91425" rIns="91425" bIns="91425" anchor="t" anchorCtr="0">
+            <a:noAutofit/>
+          </a:bodyPr>
+          <a:lstStyle/>
+          <a:p>
+            <a:pPr marL="0" lvl="0" indent="0" algn="l" rtl="0">
+              <a:spcBef>
+                <a:spcPts val="0"/>
+              </a:spcBef>
+              <a:spcAft>
+                <a:spcPts val="0"/>
+              </a:spcAft>
+              <a:buNone/>
+            </a:pPr>
+            <a:endParaRPr/>
+          </a:p>
+        </p:txBody>
+      </p:sp>
+      <p:sp>
+        <p:nvSpPr>
+          <p:cNvPr id="412" name="Google Shape;412;p14:notes"/>
+          <p:cNvSpPr>
+            <a:spLocks noGrp="1" noRot="1" noChangeAspect="1"/>
+          </p:cNvSpPr>
+          <p:nvPr>
+            <p:ph type="sldImg" idx="2"/>
+          </p:nvPr>
+        </p:nvSpPr>
+        <p:spPr>
+          <a:xfrm>
+            <a:off x="381000" y="685800"/>
+            <a:ext cx="6096000" cy="3429000"/>
+          </a:xfrm>
+          <a:custGeom>
+            <a:avLst/>
+            <a:gdLst/>
+            <a:ahLst/>
+            <a:cxnLst/>
+            <a:rect l="l" t="t" r="r" b="b"/>
+            <a:pathLst>
+              <a:path w="120000" h="120000" extrusionOk="0">
+                <a:moveTo>
+                  <a:pt x="0" y="0"/>
+                </a:moveTo>
+                <a:lnTo>
+                  <a:pt x="120000" y="0"/>
+                </a:lnTo>
+                <a:lnTo>
+                  <a:pt x="120000" y="120000"/>
+                </a:lnTo>
+                <a:lnTo>
+                  <a:pt x="0" y="120000"/>
+                </a:lnTo>
+                <a:close/>
+              </a:path>
+            </a:pathLst>
+          </a:custGeom>
+        </p:spPr>
+      </p:sp>
+    </p:spTree>
+  </p:cSld>
+  <p:clrMapOvr>
+    <a:masterClrMapping/>
+  </p:clrMapOvr>
+</p:notes>
+</file>
+
+<file path=ppt/notesSlides/notesSlide16.xml><?xml version="1.0" encoding="utf-8"?>
+<p:notes xmlns:a="http://schemas.openxmlformats.org/drawingml/2006/main" xmlns:r="http://schemas.openxmlformats.org/officeDocument/2006/relationships" xmlns:p="http://schemas.openxmlformats.org/presentationml/2006/main" showMasterSp="0" showMasterPhAnim="0">
+  <p:cSld>
+    <p:spTree>
+      <p:nvGrpSpPr>
+        <p:cNvPr id="1" name="Shape 438"/>
+        <p:cNvGrpSpPr/>
+        <p:nvPr/>
+      </p:nvGrpSpPr>
+      <p:grpSpPr>
+        <a:xfrm>
+          <a:off x="0" y="0"/>
+          <a:ext cx="0" cy="0"/>
+          <a:chOff x="0" y="0"/>
+          <a:chExt cx="0" cy="0"/>
+        </a:xfrm>
+      </p:grpSpPr>
+      <p:sp>
+        <p:nvSpPr>
+          <p:cNvPr id="439" name="Google Shape;439;p15:notes"/>
+          <p:cNvSpPr txBox="1">
+            <a:spLocks noGrp="1"/>
+          </p:cNvSpPr>
+          <p:nvPr>
+            <p:ph type="body" idx="1"/>
+          </p:nvPr>
+        </p:nvSpPr>
+        <p:spPr>
+          <a:xfrm>
+            <a:off x="685800" y="4343400"/>
+            <a:ext cx="5486400" cy="4114800"/>
+          </a:xfrm>
+          <a:prstGeom prst="rect">
+            <a:avLst/>
+          </a:prstGeom>
+        </p:spPr>
+        <p:txBody>
+          <a:bodyPr spcFirstLastPara="1" wrap="square" lIns="91425" tIns="91425" rIns="91425" bIns="91425" anchor="t" anchorCtr="0">
+            <a:noAutofit/>
+          </a:bodyPr>
+          <a:lstStyle/>
+          <a:p>
+            <a:pPr marL="0" lvl="0" indent="0" algn="l" rtl="0">
+              <a:spcBef>
+                <a:spcPts val="0"/>
+              </a:spcBef>
+              <a:spcAft>
+                <a:spcPts val="0"/>
+              </a:spcAft>
+              <a:buNone/>
+            </a:pPr>
+            <a:endParaRPr/>
+          </a:p>
+        </p:txBody>
+      </p:sp>
+      <p:sp>
+        <p:nvSpPr>
+          <p:cNvPr id="440" name="Google Shape;440;p15:notes"/>
+          <p:cNvSpPr>
+            <a:spLocks noGrp="1" noRot="1" noChangeAspect="1"/>
+          </p:cNvSpPr>
+          <p:nvPr>
+            <p:ph type="sldImg" idx="2"/>
+          </p:nvPr>
+        </p:nvSpPr>
+        <p:spPr>
+          <a:xfrm>
+            <a:off x="381000" y="685800"/>
+            <a:ext cx="6096000" cy="3429000"/>
+          </a:xfrm>
+          <a:custGeom>
+            <a:avLst/>
+            <a:gdLst/>
+            <a:ahLst/>
+            <a:cxnLst/>
+            <a:rect l="l" t="t" r="r" b="b"/>
+            <a:pathLst>
+              <a:path w="120000" h="120000" extrusionOk="0">
+                <a:moveTo>
+                  <a:pt x="0" y="0"/>
+                </a:moveTo>
+                <a:lnTo>
+                  <a:pt x="120000" y="0"/>
+                </a:lnTo>
+                <a:lnTo>
+                  <a:pt x="120000" y="120000"/>
+                </a:lnTo>
+                <a:lnTo>
+                  <a:pt x="0" y="120000"/>
+                </a:lnTo>
+                <a:close/>
+              </a:path>
+            </a:pathLst>
+          </a:custGeom>
+        </p:spPr>
+      </p:sp>
+    </p:spTree>
+  </p:cSld>
+  <p:clrMapOvr>
+    <a:masterClrMapping/>
+  </p:clrMapOvr>
+</p:notes>
+</file>
+
+<file path=ppt/notesSlides/notesSlide17.xml><?xml version="1.0" encoding="utf-8"?>
+<p:notes xmlns:a="http://schemas.openxmlformats.org/drawingml/2006/main" xmlns:r="http://schemas.openxmlformats.org/officeDocument/2006/relationships" xmlns:p="http://schemas.openxmlformats.org/presentationml/2006/main" showMasterSp="0" showMasterPhAnim="0">
+  <p:cSld>
+    <p:spTree>
+      <p:nvGrpSpPr>
+        <p:cNvPr id="1" name="Shape 465"/>
+        <p:cNvGrpSpPr/>
+        <p:nvPr/>
+      </p:nvGrpSpPr>
+      <p:grpSpPr>
+        <a:xfrm>
+          <a:off x="0" y="0"/>
+          <a:ext cx="0" cy="0"/>
+          <a:chOff x="0" y="0"/>
+          <a:chExt cx="0" cy="0"/>
+        </a:xfrm>
+      </p:grpSpPr>
+      <p:sp>
+        <p:nvSpPr>
+          <p:cNvPr id="466" name="Google Shape;466;p16:notes"/>
+          <p:cNvSpPr txBox="1">
+            <a:spLocks noGrp="1"/>
+          </p:cNvSpPr>
+          <p:nvPr>
+            <p:ph type="body" idx="1"/>
+          </p:nvPr>
+        </p:nvSpPr>
+        <p:spPr>
+          <a:xfrm>
+            <a:off x="685800" y="4343400"/>
+            <a:ext cx="5486400" cy="4114800"/>
+          </a:xfrm>
+          <a:prstGeom prst="rect">
+            <a:avLst/>
+          </a:prstGeom>
+        </p:spPr>
+        <p:txBody>
+          <a:bodyPr spcFirstLastPara="1" wrap="square" lIns="91425" tIns="91425" rIns="91425" bIns="91425" anchor="t" anchorCtr="0">
+            <a:noAutofit/>
+          </a:bodyPr>
+          <a:lstStyle/>
+          <a:p>
+            <a:pPr marL="0" lvl="0" indent="0" algn="l" rtl="0">
+              <a:spcBef>
+                <a:spcPts val="0"/>
+              </a:spcBef>
+              <a:spcAft>
+                <a:spcPts val="0"/>
+              </a:spcAft>
+              <a:buNone/>
+            </a:pPr>
+            <a:endParaRPr/>
+          </a:p>
+        </p:txBody>
+      </p:sp>
+      <p:sp>
+        <p:nvSpPr>
+          <p:cNvPr id="467" name="Google Shape;467;p16:notes"/>
+          <p:cNvSpPr>
+            <a:spLocks noGrp="1" noRot="1" noChangeAspect="1"/>
+          </p:cNvSpPr>
+          <p:nvPr>
+            <p:ph type="sldImg" idx="2"/>
+          </p:nvPr>
+        </p:nvSpPr>
+        <p:spPr>
+          <a:xfrm>
+            <a:off x="1143225" y="685800"/>
+            <a:ext cx="4572300" cy="3429000"/>
+          </a:xfrm>
+          <a:custGeom>
+            <a:avLst/>
+            <a:gdLst/>
+            <a:ahLst/>
+            <a:cxnLst/>
+            <a:rect l="l" t="t" r="r" b="b"/>
+            <a:pathLst>
+              <a:path w="120000" h="120000" extrusionOk="0">
+                <a:moveTo>
+                  <a:pt x="0" y="0"/>
+                </a:moveTo>
+                <a:lnTo>
+                  <a:pt x="120000" y="0"/>
+                </a:lnTo>
+                <a:lnTo>
+                  <a:pt x="120000" y="120000"/>
+                </a:lnTo>
+                <a:lnTo>
+                  <a:pt x="0" y="120000"/>
+                </a:lnTo>
+                <a:close/>
+              </a:path>
+            </a:pathLst>
+          </a:custGeom>
+        </p:spPr>
+      </p:sp>
+    </p:spTree>
+  </p:cSld>
+  <p:clrMapOvr>
+    <a:masterClrMapping/>
+  </p:clrMapOvr>
+</p:notes>
+</file>
+
+<file path=ppt/notesSlides/notesSlide18.xml><?xml version="1.0" encoding="utf-8"?>
+<p:notes xmlns:a="http://schemas.openxmlformats.org/drawingml/2006/main" xmlns:r="http://schemas.openxmlformats.org/officeDocument/2006/relationships" xmlns:p="http://schemas.openxmlformats.org/presentationml/2006/main" showMasterSp="0" showMasterPhAnim="0">
+  <p:cSld>
+    <p:spTree>
+      <p:nvGrpSpPr>
+        <p:cNvPr id="1" name="Shape 492"/>
+        <p:cNvGrpSpPr/>
+        <p:nvPr/>
+      </p:nvGrpSpPr>
+      <p:grpSpPr>
+        <a:xfrm>
+          <a:off x="0" y="0"/>
+          <a:ext cx="0" cy="0"/>
+          <a:chOff x="0" y="0"/>
+          <a:chExt cx="0" cy="0"/>
+        </a:xfrm>
+      </p:grpSpPr>
+      <p:sp>
+        <p:nvSpPr>
+          <p:cNvPr id="493" name="Google Shape;493;p17:notes"/>
+          <p:cNvSpPr txBox="1">
+            <a:spLocks noGrp="1"/>
+          </p:cNvSpPr>
+          <p:nvPr>
+            <p:ph type="body" idx="1"/>
+          </p:nvPr>
+        </p:nvSpPr>
+        <p:spPr>
+          <a:xfrm>
+            <a:off x="685800" y="4343400"/>
+            <a:ext cx="5486400" cy="4114800"/>
+          </a:xfrm>
+          <a:prstGeom prst="rect">
+            <a:avLst/>
+          </a:prstGeom>
+        </p:spPr>
+        <p:txBody>
+          <a:bodyPr spcFirstLastPara="1" wrap="square" lIns="91425" tIns="91425" rIns="91425" bIns="91425" anchor="t" anchorCtr="0">
+            <a:noAutofit/>
+          </a:bodyPr>
+          <a:lstStyle/>
+          <a:p>
+            <a:pPr marL="0" lvl="0" indent="0" algn="l" rtl="0">
+              <a:spcBef>
+                <a:spcPts val="0"/>
+              </a:spcBef>
+              <a:spcAft>
+                <a:spcPts val="0"/>
+              </a:spcAft>
+              <a:buNone/>
+            </a:pPr>
+            <a:endParaRPr/>
+          </a:p>
+        </p:txBody>
+      </p:sp>
+      <p:sp>
+        <p:nvSpPr>
+          <p:cNvPr id="494" name="Google Shape;494;p17:notes"/>
+          <p:cNvSpPr>
+            <a:spLocks noGrp="1" noRot="1" noChangeAspect="1"/>
+          </p:cNvSpPr>
+          <p:nvPr>
+            <p:ph type="sldImg" idx="2"/>
+          </p:nvPr>
+        </p:nvSpPr>
+        <p:spPr>
+          <a:xfrm>
+            <a:off x="381000" y="685800"/>
+            <a:ext cx="6096000" cy="3429000"/>
+          </a:xfrm>
+          <a:custGeom>
+            <a:avLst/>
+            <a:gdLst/>
+            <a:ahLst/>
+            <a:cxnLst/>
+            <a:rect l="l" t="t" r="r" b="b"/>
+            <a:pathLst>
+              <a:path w="120000" h="120000" extrusionOk="0">
+                <a:moveTo>
+                  <a:pt x="0" y="0"/>
+                </a:moveTo>
+                <a:lnTo>
+                  <a:pt x="120000" y="0"/>
+                </a:lnTo>
+                <a:lnTo>
+                  <a:pt x="120000" y="120000"/>
+                </a:lnTo>
+                <a:lnTo>
+                  <a:pt x="0" y="120000"/>
+                </a:lnTo>
+                <a:close/>
+              </a:path>
+            </a:pathLst>
+          </a:custGeom>
+        </p:spPr>
+      </p:sp>
+    </p:spTree>
+  </p:cSld>
+  <p:clrMapOvr>
+    <a:masterClrMapping/>
+  </p:clrMapOvr>
+</p:notes>
+</file>
+
+<file path=ppt/notesSlides/notesSlide19.xml><?xml version="1.0" encoding="utf-8"?>
+<p:notes xmlns:a="http://schemas.openxmlformats.org/drawingml/2006/main" xmlns:r="http://schemas.openxmlformats.org/officeDocument/2006/relationships" xmlns:p="http://schemas.openxmlformats.org/presentationml/2006/main" showMasterSp="0" showMasterPhAnim="0">
+  <p:cSld>
+    <p:spTree>
+      <p:nvGrpSpPr>
+        <p:cNvPr id="1" name="Shape 506"/>
+        <p:cNvGrpSpPr/>
+        <p:nvPr/>
+      </p:nvGrpSpPr>
+      <p:grpSpPr>
+        <a:xfrm>
+          <a:off x="0" y="0"/>
+          <a:ext cx="0" cy="0"/>
+          <a:chOff x="0" y="0"/>
+          <a:chExt cx="0" cy="0"/>
+        </a:xfrm>
+      </p:grpSpPr>
+      <p:sp>
+        <p:nvSpPr>
+          <p:cNvPr id="507" name="Google Shape;507;p18:notes"/>
+          <p:cNvSpPr txBox="1">
+            <a:spLocks noGrp="1"/>
+          </p:cNvSpPr>
+          <p:nvPr>
+            <p:ph type="body" idx="1"/>
+          </p:nvPr>
+        </p:nvSpPr>
+        <p:spPr>
+          <a:xfrm>
+            <a:off x="685800" y="4343400"/>
+            <a:ext cx="5486400" cy="4114800"/>
+          </a:xfrm>
+          <a:prstGeom prst="rect">
+            <a:avLst/>
+          </a:prstGeom>
+        </p:spPr>
+        <p:txBody>
+          <a:bodyPr spcFirstLastPara="1" wrap="square" lIns="91425" tIns="91425" rIns="91425" bIns="91425" anchor="t" anchorCtr="0">
+            <a:noAutofit/>
+          </a:bodyPr>
+          <a:lstStyle/>
+          <a:p>
+            <a:pPr marL="0" lvl="0" indent="0" algn="l" rtl="0">
+              <a:spcBef>
+                <a:spcPts val="0"/>
+              </a:spcBef>
+              <a:spcAft>
+                <a:spcPts val="0"/>
+              </a:spcAft>
+              <a:buNone/>
+            </a:pPr>
+            <a:endParaRPr/>
+          </a:p>
+        </p:txBody>
+      </p:sp>
+      <p:sp>
+        <p:nvSpPr>
+          <p:cNvPr id="508" name="Google Shape;508;p18:notes"/>
+          <p:cNvSpPr>
+            <a:spLocks noGrp="1" noRot="1" noChangeAspect="1"/>
+          </p:cNvSpPr>
+          <p:nvPr>
+            <p:ph type="sldImg" idx="2"/>
+          </p:nvPr>
+        </p:nvSpPr>
+        <p:spPr>
+          <a:xfrm>
+            <a:off x="381000" y="685800"/>
+            <a:ext cx="6096000" cy="3429000"/>
+          </a:xfrm>
+          <a:custGeom>
+            <a:avLst/>
+            <a:gdLst/>
+            <a:ahLst/>
+            <a:cxnLst/>
+            <a:rect l="l" t="t" r="r" b="b"/>
+            <a:pathLst>
+              <a:path w="120000" h="120000" extrusionOk="0">
+                <a:moveTo>
+                  <a:pt x="0" y="0"/>
+                </a:moveTo>
+                <a:lnTo>
+                  <a:pt x="120000" y="0"/>
+                </a:lnTo>
+                <a:lnTo>
+                  <a:pt x="120000" y="120000"/>
+                </a:lnTo>
+                <a:lnTo>
+                  <a:pt x="0" y="120000"/>
+                </a:lnTo>
+                <a:close/>
+              </a:path>
+            </a:pathLst>
+          </a:custGeom>
+        </p:spPr>
+      </p:sp>
+    </p:spTree>
+  </p:cSld>
+  <p:clrMapOvr>
+    <a:masterClrMapping/>
+  </p:clrMapOvr>
+</p:notes>
+</file>
+
+<file path=ppt/notesSlides/notesSlide2.xml><?xml version="1.0" encoding="utf-8"?>
+<p:notes xmlns:a="http://schemas.openxmlformats.org/drawingml/2006/main" xmlns:r="http://schemas.openxmlformats.org/officeDocument/2006/relationships" xmlns:p="http://schemas.openxmlformats.org/presentationml/2006/main" showMasterSp="0" showMasterPhAnim="0">
+  <p:cSld>
+    <p:spTree>
+      <p:nvGrpSpPr>
         <p:cNvPr id="1" name="Shape 80"/>
         <p:cNvGrpSpPr/>
         <p:nvPr/>
@@ -862,943 +2030,7 @@
 </p:notes>
 </file>
 
-<file path=ppt/notesSlides/notesSlide10.xml><?xml version="1.0" encoding="utf-8"?>
-<p:notes xmlns:a="http://schemas.openxmlformats.org/drawingml/2006/main" xmlns:r="http://schemas.openxmlformats.org/officeDocument/2006/relationships" xmlns:p="http://schemas.openxmlformats.org/presentationml/2006/main" showMasterSp="0" showMasterPhAnim="0">
-  <p:cSld>
-    <p:spTree>
-      <p:nvGrpSpPr>
-        <p:cNvPr id="1" name="Shape 305"/>
-        <p:cNvGrpSpPr/>
-        <p:nvPr/>
-      </p:nvGrpSpPr>
-      <p:grpSpPr>
-        <a:xfrm>
-          <a:off x="0" y="0"/>
-          <a:ext cx="0" cy="0"/>
-          <a:chOff x="0" y="0"/>
-          <a:chExt cx="0" cy="0"/>
-        </a:xfrm>
-      </p:grpSpPr>
-      <p:sp>
-        <p:nvSpPr>
-          <p:cNvPr id="306" name="Google Shape;306;p10:notes"/>
-          <p:cNvSpPr txBox="1">
-            <a:spLocks noGrp="1"/>
-          </p:cNvSpPr>
-          <p:nvPr>
-            <p:ph type="body" idx="1"/>
-          </p:nvPr>
-        </p:nvSpPr>
-        <p:spPr>
-          <a:xfrm>
-            <a:off x="685800" y="4343400"/>
-            <a:ext cx="5486400" cy="4114800"/>
-          </a:xfrm>
-          <a:prstGeom prst="rect">
-            <a:avLst/>
-          </a:prstGeom>
-        </p:spPr>
-        <p:txBody>
-          <a:bodyPr spcFirstLastPara="1" wrap="square" lIns="91425" tIns="91425" rIns="91425" bIns="91425" anchor="t" anchorCtr="0">
-            <a:noAutofit/>
-          </a:bodyPr>
-          <a:lstStyle/>
-          <a:p>
-            <a:pPr marL="0" lvl="0" indent="0" algn="l" rtl="0">
-              <a:spcBef>
-                <a:spcPts val="0"/>
-              </a:spcBef>
-              <a:spcAft>
-                <a:spcPts val="0"/>
-              </a:spcAft>
-              <a:buNone/>
-            </a:pPr>
-            <a:endParaRPr/>
-          </a:p>
-        </p:txBody>
-      </p:sp>
-      <p:sp>
-        <p:nvSpPr>
-          <p:cNvPr id="307" name="Google Shape;307;p10:notes"/>
-          <p:cNvSpPr>
-            <a:spLocks noGrp="1" noRot="1" noChangeAspect="1"/>
-          </p:cNvSpPr>
-          <p:nvPr>
-            <p:ph type="sldImg" idx="2"/>
-          </p:nvPr>
-        </p:nvSpPr>
-        <p:spPr>
-          <a:xfrm>
-            <a:off x="381000" y="685800"/>
-            <a:ext cx="6096000" cy="3429000"/>
-          </a:xfrm>
-          <a:custGeom>
-            <a:avLst/>
-            <a:gdLst/>
-            <a:ahLst/>
-            <a:cxnLst/>
-            <a:rect l="l" t="t" r="r" b="b"/>
-            <a:pathLst>
-              <a:path w="120000" h="120000" extrusionOk="0">
-                <a:moveTo>
-                  <a:pt x="0" y="0"/>
-                </a:moveTo>
-                <a:lnTo>
-                  <a:pt x="120000" y="0"/>
-                </a:lnTo>
-                <a:lnTo>
-                  <a:pt x="120000" y="120000"/>
-                </a:lnTo>
-                <a:lnTo>
-                  <a:pt x="0" y="120000"/>
-                </a:lnTo>
-                <a:close/>
-              </a:path>
-            </a:pathLst>
-          </a:custGeom>
-        </p:spPr>
-      </p:sp>
-    </p:spTree>
-  </p:cSld>
-  <p:clrMapOvr>
-    <a:masterClrMapping/>
-  </p:clrMapOvr>
-</p:notes>
-</file>
-
-<file path=ppt/notesSlides/notesSlide11.xml><?xml version="1.0" encoding="utf-8"?>
-<p:notes xmlns:a="http://schemas.openxmlformats.org/drawingml/2006/main" xmlns:r="http://schemas.openxmlformats.org/officeDocument/2006/relationships" xmlns:p="http://schemas.openxmlformats.org/presentationml/2006/main" showMasterSp="0" showMasterPhAnim="0">
-  <p:cSld>
-    <p:spTree>
-      <p:nvGrpSpPr>
-        <p:cNvPr id="1" name="Shape 333"/>
-        <p:cNvGrpSpPr/>
-        <p:nvPr/>
-      </p:nvGrpSpPr>
-      <p:grpSpPr>
-        <a:xfrm>
-          <a:off x="0" y="0"/>
-          <a:ext cx="0" cy="0"/>
-          <a:chOff x="0" y="0"/>
-          <a:chExt cx="0" cy="0"/>
-        </a:xfrm>
-      </p:grpSpPr>
-      <p:sp>
-        <p:nvSpPr>
-          <p:cNvPr id="334" name="Google Shape;334;p11:notes"/>
-          <p:cNvSpPr txBox="1">
-            <a:spLocks noGrp="1"/>
-          </p:cNvSpPr>
-          <p:nvPr>
-            <p:ph type="body" idx="1"/>
-          </p:nvPr>
-        </p:nvSpPr>
-        <p:spPr>
-          <a:xfrm>
-            <a:off x="685800" y="4343400"/>
-            <a:ext cx="5486400" cy="4114800"/>
-          </a:xfrm>
-          <a:prstGeom prst="rect">
-            <a:avLst/>
-          </a:prstGeom>
-        </p:spPr>
-        <p:txBody>
-          <a:bodyPr spcFirstLastPara="1" wrap="square" lIns="91425" tIns="91425" rIns="91425" bIns="91425" anchor="t" anchorCtr="0">
-            <a:noAutofit/>
-          </a:bodyPr>
-          <a:lstStyle/>
-          <a:p>
-            <a:pPr marL="0" lvl="0" indent="0" algn="l" rtl="0">
-              <a:spcBef>
-                <a:spcPts val="0"/>
-              </a:spcBef>
-              <a:spcAft>
-                <a:spcPts val="0"/>
-              </a:spcAft>
-              <a:buNone/>
-            </a:pPr>
-            <a:endParaRPr/>
-          </a:p>
-        </p:txBody>
-      </p:sp>
-      <p:sp>
-        <p:nvSpPr>
-          <p:cNvPr id="335" name="Google Shape;335;p11:notes"/>
-          <p:cNvSpPr>
-            <a:spLocks noGrp="1" noRot="1" noChangeAspect="1"/>
-          </p:cNvSpPr>
-          <p:nvPr>
-            <p:ph type="sldImg" idx="2"/>
-          </p:nvPr>
-        </p:nvSpPr>
-        <p:spPr>
-          <a:xfrm>
-            <a:off x="381000" y="685800"/>
-            <a:ext cx="6096000" cy="3429000"/>
-          </a:xfrm>
-          <a:custGeom>
-            <a:avLst/>
-            <a:gdLst/>
-            <a:ahLst/>
-            <a:cxnLst/>
-            <a:rect l="l" t="t" r="r" b="b"/>
-            <a:pathLst>
-              <a:path w="120000" h="120000" extrusionOk="0">
-                <a:moveTo>
-                  <a:pt x="0" y="0"/>
-                </a:moveTo>
-                <a:lnTo>
-                  <a:pt x="120000" y="0"/>
-                </a:lnTo>
-                <a:lnTo>
-                  <a:pt x="120000" y="120000"/>
-                </a:lnTo>
-                <a:lnTo>
-                  <a:pt x="0" y="120000"/>
-                </a:lnTo>
-                <a:close/>
-              </a:path>
-            </a:pathLst>
-          </a:custGeom>
-        </p:spPr>
-      </p:sp>
-    </p:spTree>
-  </p:cSld>
-  <p:clrMapOvr>
-    <a:masterClrMapping/>
-  </p:clrMapOvr>
-</p:notes>
-</file>
-
-<file path=ppt/notesSlides/notesSlide12.xml><?xml version="1.0" encoding="utf-8"?>
-<p:notes xmlns:a="http://schemas.openxmlformats.org/drawingml/2006/main" xmlns:r="http://schemas.openxmlformats.org/officeDocument/2006/relationships" xmlns:p="http://schemas.openxmlformats.org/presentationml/2006/main" showMasterSp="0" showMasterPhAnim="0">
-  <p:cSld>
-    <p:spTree>
-      <p:nvGrpSpPr>
-        <p:cNvPr id="1" name="Shape 365"/>
-        <p:cNvGrpSpPr/>
-        <p:nvPr/>
-      </p:nvGrpSpPr>
-      <p:grpSpPr>
-        <a:xfrm>
-          <a:off x="0" y="0"/>
-          <a:ext cx="0" cy="0"/>
-          <a:chOff x="0" y="0"/>
-          <a:chExt cx="0" cy="0"/>
-        </a:xfrm>
-      </p:grpSpPr>
-      <p:sp>
-        <p:nvSpPr>
-          <p:cNvPr id="366" name="Google Shape;366;p12:notes"/>
-          <p:cNvSpPr txBox="1">
-            <a:spLocks noGrp="1"/>
-          </p:cNvSpPr>
-          <p:nvPr>
-            <p:ph type="body" idx="1"/>
-          </p:nvPr>
-        </p:nvSpPr>
-        <p:spPr>
-          <a:xfrm>
-            <a:off x="685800" y="4343400"/>
-            <a:ext cx="5486400" cy="4114800"/>
-          </a:xfrm>
-          <a:prstGeom prst="rect">
-            <a:avLst/>
-          </a:prstGeom>
-        </p:spPr>
-        <p:txBody>
-          <a:bodyPr spcFirstLastPara="1" wrap="square" lIns="91425" tIns="91425" rIns="91425" bIns="91425" anchor="t" anchorCtr="0">
-            <a:noAutofit/>
-          </a:bodyPr>
-          <a:lstStyle/>
-          <a:p>
-            <a:pPr marL="0" lvl="0" indent="0" algn="l" rtl="0">
-              <a:spcBef>
-                <a:spcPts val="0"/>
-              </a:spcBef>
-              <a:spcAft>
-                <a:spcPts val="0"/>
-              </a:spcAft>
-              <a:buNone/>
-            </a:pPr>
-            <a:endParaRPr/>
-          </a:p>
-        </p:txBody>
-      </p:sp>
-      <p:sp>
-        <p:nvSpPr>
-          <p:cNvPr id="367" name="Google Shape;367;p12:notes"/>
-          <p:cNvSpPr>
-            <a:spLocks noGrp="1" noRot="1" noChangeAspect="1"/>
-          </p:cNvSpPr>
-          <p:nvPr>
-            <p:ph type="sldImg" idx="2"/>
-          </p:nvPr>
-        </p:nvSpPr>
-        <p:spPr>
-          <a:xfrm>
-            <a:off x="381000" y="685800"/>
-            <a:ext cx="6096000" cy="3429000"/>
-          </a:xfrm>
-          <a:custGeom>
-            <a:avLst/>
-            <a:gdLst/>
-            <a:ahLst/>
-            <a:cxnLst/>
-            <a:rect l="l" t="t" r="r" b="b"/>
-            <a:pathLst>
-              <a:path w="120000" h="120000" extrusionOk="0">
-                <a:moveTo>
-                  <a:pt x="0" y="0"/>
-                </a:moveTo>
-                <a:lnTo>
-                  <a:pt x="120000" y="0"/>
-                </a:lnTo>
-                <a:lnTo>
-                  <a:pt x="120000" y="120000"/>
-                </a:lnTo>
-                <a:lnTo>
-                  <a:pt x="0" y="120000"/>
-                </a:lnTo>
-                <a:close/>
-              </a:path>
-            </a:pathLst>
-          </a:custGeom>
-        </p:spPr>
-      </p:sp>
-    </p:spTree>
-  </p:cSld>
-  <p:clrMapOvr>
-    <a:masterClrMapping/>
-  </p:clrMapOvr>
-</p:notes>
-</file>
-
-<file path=ppt/notesSlides/notesSlide13.xml><?xml version="1.0" encoding="utf-8"?>
-<p:notes xmlns:a="http://schemas.openxmlformats.org/drawingml/2006/main" xmlns:r="http://schemas.openxmlformats.org/officeDocument/2006/relationships" xmlns:p="http://schemas.openxmlformats.org/presentationml/2006/main" showMasterSp="0" showMasterPhAnim="0">
-  <p:cSld>
-    <p:spTree>
-      <p:nvGrpSpPr>
-        <p:cNvPr id="1" name="Shape 387"/>
-        <p:cNvGrpSpPr/>
-        <p:nvPr/>
-      </p:nvGrpSpPr>
-      <p:grpSpPr>
-        <a:xfrm>
-          <a:off x="0" y="0"/>
-          <a:ext cx="0" cy="0"/>
-          <a:chOff x="0" y="0"/>
-          <a:chExt cx="0" cy="0"/>
-        </a:xfrm>
-      </p:grpSpPr>
-      <p:sp>
-        <p:nvSpPr>
-          <p:cNvPr id="388" name="Google Shape;388;p13:notes"/>
-          <p:cNvSpPr txBox="1">
-            <a:spLocks noGrp="1"/>
-          </p:cNvSpPr>
-          <p:nvPr>
-            <p:ph type="body" idx="1"/>
-          </p:nvPr>
-        </p:nvSpPr>
-        <p:spPr>
-          <a:xfrm>
-            <a:off x="685800" y="4343400"/>
-            <a:ext cx="5486400" cy="4114800"/>
-          </a:xfrm>
-          <a:prstGeom prst="rect">
-            <a:avLst/>
-          </a:prstGeom>
-        </p:spPr>
-        <p:txBody>
-          <a:bodyPr spcFirstLastPara="1" wrap="square" lIns="91425" tIns="91425" rIns="91425" bIns="91425" anchor="t" anchorCtr="0">
-            <a:noAutofit/>
-          </a:bodyPr>
-          <a:lstStyle/>
-          <a:p>
-            <a:pPr marL="0" lvl="0" indent="0" algn="l" rtl="0">
-              <a:spcBef>
-                <a:spcPts val="0"/>
-              </a:spcBef>
-              <a:spcAft>
-                <a:spcPts val="0"/>
-              </a:spcAft>
-              <a:buNone/>
-            </a:pPr>
-            <a:endParaRPr/>
-          </a:p>
-        </p:txBody>
-      </p:sp>
-      <p:sp>
-        <p:nvSpPr>
-          <p:cNvPr id="389" name="Google Shape;389;p13:notes"/>
-          <p:cNvSpPr>
-            <a:spLocks noGrp="1" noRot="1" noChangeAspect="1"/>
-          </p:cNvSpPr>
-          <p:nvPr>
-            <p:ph type="sldImg" idx="2"/>
-          </p:nvPr>
-        </p:nvSpPr>
-        <p:spPr>
-          <a:xfrm>
-            <a:off x="381000" y="685800"/>
-            <a:ext cx="6096000" cy="3429000"/>
-          </a:xfrm>
-          <a:custGeom>
-            <a:avLst/>
-            <a:gdLst/>
-            <a:ahLst/>
-            <a:cxnLst/>
-            <a:rect l="l" t="t" r="r" b="b"/>
-            <a:pathLst>
-              <a:path w="120000" h="120000" extrusionOk="0">
-                <a:moveTo>
-                  <a:pt x="0" y="0"/>
-                </a:moveTo>
-                <a:lnTo>
-                  <a:pt x="120000" y="0"/>
-                </a:lnTo>
-                <a:lnTo>
-                  <a:pt x="120000" y="120000"/>
-                </a:lnTo>
-                <a:lnTo>
-                  <a:pt x="0" y="120000"/>
-                </a:lnTo>
-                <a:close/>
-              </a:path>
-            </a:pathLst>
-          </a:custGeom>
-        </p:spPr>
-      </p:sp>
-    </p:spTree>
-  </p:cSld>
-  <p:clrMapOvr>
-    <a:masterClrMapping/>
-  </p:clrMapOvr>
-</p:notes>
-</file>
-
-<file path=ppt/notesSlides/notesSlide14.xml><?xml version="1.0" encoding="utf-8"?>
-<p:notes xmlns:a="http://schemas.openxmlformats.org/drawingml/2006/main" xmlns:r="http://schemas.openxmlformats.org/officeDocument/2006/relationships" xmlns:p="http://schemas.openxmlformats.org/presentationml/2006/main" showMasterSp="0" showMasterPhAnim="0">
-  <p:cSld>
-    <p:spTree>
-      <p:nvGrpSpPr>
-        <p:cNvPr id="1" name="Shape 410"/>
-        <p:cNvGrpSpPr/>
-        <p:nvPr/>
-      </p:nvGrpSpPr>
-      <p:grpSpPr>
-        <a:xfrm>
-          <a:off x="0" y="0"/>
-          <a:ext cx="0" cy="0"/>
-          <a:chOff x="0" y="0"/>
-          <a:chExt cx="0" cy="0"/>
-        </a:xfrm>
-      </p:grpSpPr>
-      <p:sp>
-        <p:nvSpPr>
-          <p:cNvPr id="411" name="Google Shape;411;p14:notes"/>
-          <p:cNvSpPr txBox="1">
-            <a:spLocks noGrp="1"/>
-          </p:cNvSpPr>
-          <p:nvPr>
-            <p:ph type="body" idx="1"/>
-          </p:nvPr>
-        </p:nvSpPr>
-        <p:spPr>
-          <a:xfrm>
-            <a:off x="685800" y="4343400"/>
-            <a:ext cx="5486400" cy="4114800"/>
-          </a:xfrm>
-          <a:prstGeom prst="rect">
-            <a:avLst/>
-          </a:prstGeom>
-        </p:spPr>
-        <p:txBody>
-          <a:bodyPr spcFirstLastPara="1" wrap="square" lIns="91425" tIns="91425" rIns="91425" bIns="91425" anchor="t" anchorCtr="0">
-            <a:noAutofit/>
-          </a:bodyPr>
-          <a:lstStyle/>
-          <a:p>
-            <a:pPr marL="0" lvl="0" indent="0" algn="l" rtl="0">
-              <a:spcBef>
-                <a:spcPts val="0"/>
-              </a:spcBef>
-              <a:spcAft>
-                <a:spcPts val="0"/>
-              </a:spcAft>
-              <a:buNone/>
-            </a:pPr>
-            <a:endParaRPr/>
-          </a:p>
-        </p:txBody>
-      </p:sp>
-      <p:sp>
-        <p:nvSpPr>
-          <p:cNvPr id="412" name="Google Shape;412;p14:notes"/>
-          <p:cNvSpPr>
-            <a:spLocks noGrp="1" noRot="1" noChangeAspect="1"/>
-          </p:cNvSpPr>
-          <p:nvPr>
-            <p:ph type="sldImg" idx="2"/>
-          </p:nvPr>
-        </p:nvSpPr>
-        <p:spPr>
-          <a:xfrm>
-            <a:off x="381000" y="685800"/>
-            <a:ext cx="6096000" cy="3429000"/>
-          </a:xfrm>
-          <a:custGeom>
-            <a:avLst/>
-            <a:gdLst/>
-            <a:ahLst/>
-            <a:cxnLst/>
-            <a:rect l="l" t="t" r="r" b="b"/>
-            <a:pathLst>
-              <a:path w="120000" h="120000" extrusionOk="0">
-                <a:moveTo>
-                  <a:pt x="0" y="0"/>
-                </a:moveTo>
-                <a:lnTo>
-                  <a:pt x="120000" y="0"/>
-                </a:lnTo>
-                <a:lnTo>
-                  <a:pt x="120000" y="120000"/>
-                </a:lnTo>
-                <a:lnTo>
-                  <a:pt x="0" y="120000"/>
-                </a:lnTo>
-                <a:close/>
-              </a:path>
-            </a:pathLst>
-          </a:custGeom>
-        </p:spPr>
-      </p:sp>
-    </p:spTree>
-  </p:cSld>
-  <p:clrMapOvr>
-    <a:masterClrMapping/>
-  </p:clrMapOvr>
-</p:notes>
-</file>
-
-<file path=ppt/notesSlides/notesSlide15.xml><?xml version="1.0" encoding="utf-8"?>
-<p:notes xmlns:a="http://schemas.openxmlformats.org/drawingml/2006/main" xmlns:r="http://schemas.openxmlformats.org/officeDocument/2006/relationships" xmlns:p="http://schemas.openxmlformats.org/presentationml/2006/main" showMasterSp="0" showMasterPhAnim="0">
-  <p:cSld>
-    <p:spTree>
-      <p:nvGrpSpPr>
-        <p:cNvPr id="1" name="Shape 438"/>
-        <p:cNvGrpSpPr/>
-        <p:nvPr/>
-      </p:nvGrpSpPr>
-      <p:grpSpPr>
-        <a:xfrm>
-          <a:off x="0" y="0"/>
-          <a:ext cx="0" cy="0"/>
-          <a:chOff x="0" y="0"/>
-          <a:chExt cx="0" cy="0"/>
-        </a:xfrm>
-      </p:grpSpPr>
-      <p:sp>
-        <p:nvSpPr>
-          <p:cNvPr id="439" name="Google Shape;439;p15:notes"/>
-          <p:cNvSpPr txBox="1">
-            <a:spLocks noGrp="1"/>
-          </p:cNvSpPr>
-          <p:nvPr>
-            <p:ph type="body" idx="1"/>
-          </p:nvPr>
-        </p:nvSpPr>
-        <p:spPr>
-          <a:xfrm>
-            <a:off x="685800" y="4343400"/>
-            <a:ext cx="5486400" cy="4114800"/>
-          </a:xfrm>
-          <a:prstGeom prst="rect">
-            <a:avLst/>
-          </a:prstGeom>
-        </p:spPr>
-        <p:txBody>
-          <a:bodyPr spcFirstLastPara="1" wrap="square" lIns="91425" tIns="91425" rIns="91425" bIns="91425" anchor="t" anchorCtr="0">
-            <a:noAutofit/>
-          </a:bodyPr>
-          <a:lstStyle/>
-          <a:p>
-            <a:pPr marL="0" lvl="0" indent="0" algn="l" rtl="0">
-              <a:spcBef>
-                <a:spcPts val="0"/>
-              </a:spcBef>
-              <a:spcAft>
-                <a:spcPts val="0"/>
-              </a:spcAft>
-              <a:buNone/>
-            </a:pPr>
-            <a:endParaRPr/>
-          </a:p>
-        </p:txBody>
-      </p:sp>
-      <p:sp>
-        <p:nvSpPr>
-          <p:cNvPr id="440" name="Google Shape;440;p15:notes"/>
-          <p:cNvSpPr>
-            <a:spLocks noGrp="1" noRot="1" noChangeAspect="1"/>
-          </p:cNvSpPr>
-          <p:nvPr>
-            <p:ph type="sldImg" idx="2"/>
-          </p:nvPr>
-        </p:nvSpPr>
-        <p:spPr>
-          <a:xfrm>
-            <a:off x="381000" y="685800"/>
-            <a:ext cx="6096000" cy="3429000"/>
-          </a:xfrm>
-          <a:custGeom>
-            <a:avLst/>
-            <a:gdLst/>
-            <a:ahLst/>
-            <a:cxnLst/>
-            <a:rect l="l" t="t" r="r" b="b"/>
-            <a:pathLst>
-              <a:path w="120000" h="120000" extrusionOk="0">
-                <a:moveTo>
-                  <a:pt x="0" y="0"/>
-                </a:moveTo>
-                <a:lnTo>
-                  <a:pt x="120000" y="0"/>
-                </a:lnTo>
-                <a:lnTo>
-                  <a:pt x="120000" y="120000"/>
-                </a:lnTo>
-                <a:lnTo>
-                  <a:pt x="0" y="120000"/>
-                </a:lnTo>
-                <a:close/>
-              </a:path>
-            </a:pathLst>
-          </a:custGeom>
-        </p:spPr>
-      </p:sp>
-    </p:spTree>
-  </p:cSld>
-  <p:clrMapOvr>
-    <a:masterClrMapping/>
-  </p:clrMapOvr>
-</p:notes>
-</file>
-
-<file path=ppt/notesSlides/notesSlide16.xml><?xml version="1.0" encoding="utf-8"?>
-<p:notes xmlns:a="http://schemas.openxmlformats.org/drawingml/2006/main" xmlns:r="http://schemas.openxmlformats.org/officeDocument/2006/relationships" xmlns:p="http://schemas.openxmlformats.org/presentationml/2006/main" showMasterSp="0" showMasterPhAnim="0">
-  <p:cSld>
-    <p:spTree>
-      <p:nvGrpSpPr>
-        <p:cNvPr id="1" name="Shape 465"/>
-        <p:cNvGrpSpPr/>
-        <p:nvPr/>
-      </p:nvGrpSpPr>
-      <p:grpSpPr>
-        <a:xfrm>
-          <a:off x="0" y="0"/>
-          <a:ext cx="0" cy="0"/>
-          <a:chOff x="0" y="0"/>
-          <a:chExt cx="0" cy="0"/>
-        </a:xfrm>
-      </p:grpSpPr>
-      <p:sp>
-        <p:nvSpPr>
-          <p:cNvPr id="466" name="Google Shape;466;p16:notes"/>
-          <p:cNvSpPr txBox="1">
-            <a:spLocks noGrp="1"/>
-          </p:cNvSpPr>
-          <p:nvPr>
-            <p:ph type="body" idx="1"/>
-          </p:nvPr>
-        </p:nvSpPr>
-        <p:spPr>
-          <a:xfrm>
-            <a:off x="685800" y="4343400"/>
-            <a:ext cx="5486400" cy="4114800"/>
-          </a:xfrm>
-          <a:prstGeom prst="rect">
-            <a:avLst/>
-          </a:prstGeom>
-        </p:spPr>
-        <p:txBody>
-          <a:bodyPr spcFirstLastPara="1" wrap="square" lIns="91425" tIns="91425" rIns="91425" bIns="91425" anchor="t" anchorCtr="0">
-            <a:noAutofit/>
-          </a:bodyPr>
-          <a:lstStyle/>
-          <a:p>
-            <a:pPr marL="0" lvl="0" indent="0" algn="l" rtl="0">
-              <a:spcBef>
-                <a:spcPts val="0"/>
-              </a:spcBef>
-              <a:spcAft>
-                <a:spcPts val="0"/>
-              </a:spcAft>
-              <a:buNone/>
-            </a:pPr>
-            <a:endParaRPr/>
-          </a:p>
-        </p:txBody>
-      </p:sp>
-      <p:sp>
-        <p:nvSpPr>
-          <p:cNvPr id="467" name="Google Shape;467;p16:notes"/>
-          <p:cNvSpPr>
-            <a:spLocks noGrp="1" noRot="1" noChangeAspect="1"/>
-          </p:cNvSpPr>
-          <p:nvPr>
-            <p:ph type="sldImg" idx="2"/>
-          </p:nvPr>
-        </p:nvSpPr>
-        <p:spPr>
-          <a:xfrm>
-            <a:off x="1143225" y="685800"/>
-            <a:ext cx="4572300" cy="3429000"/>
-          </a:xfrm>
-          <a:custGeom>
-            <a:avLst/>
-            <a:gdLst/>
-            <a:ahLst/>
-            <a:cxnLst/>
-            <a:rect l="l" t="t" r="r" b="b"/>
-            <a:pathLst>
-              <a:path w="120000" h="120000" extrusionOk="0">
-                <a:moveTo>
-                  <a:pt x="0" y="0"/>
-                </a:moveTo>
-                <a:lnTo>
-                  <a:pt x="120000" y="0"/>
-                </a:lnTo>
-                <a:lnTo>
-                  <a:pt x="120000" y="120000"/>
-                </a:lnTo>
-                <a:lnTo>
-                  <a:pt x="0" y="120000"/>
-                </a:lnTo>
-                <a:close/>
-              </a:path>
-            </a:pathLst>
-          </a:custGeom>
-        </p:spPr>
-      </p:sp>
-    </p:spTree>
-  </p:cSld>
-  <p:clrMapOvr>
-    <a:masterClrMapping/>
-  </p:clrMapOvr>
-</p:notes>
-</file>
-
-<file path=ppt/notesSlides/notesSlide17.xml><?xml version="1.0" encoding="utf-8"?>
-<p:notes xmlns:a="http://schemas.openxmlformats.org/drawingml/2006/main" xmlns:r="http://schemas.openxmlformats.org/officeDocument/2006/relationships" xmlns:p="http://schemas.openxmlformats.org/presentationml/2006/main" showMasterSp="0" showMasterPhAnim="0">
-  <p:cSld>
-    <p:spTree>
-      <p:nvGrpSpPr>
-        <p:cNvPr id="1" name="Shape 492"/>
-        <p:cNvGrpSpPr/>
-        <p:nvPr/>
-      </p:nvGrpSpPr>
-      <p:grpSpPr>
-        <a:xfrm>
-          <a:off x="0" y="0"/>
-          <a:ext cx="0" cy="0"/>
-          <a:chOff x="0" y="0"/>
-          <a:chExt cx="0" cy="0"/>
-        </a:xfrm>
-      </p:grpSpPr>
-      <p:sp>
-        <p:nvSpPr>
-          <p:cNvPr id="493" name="Google Shape;493;p17:notes"/>
-          <p:cNvSpPr txBox="1">
-            <a:spLocks noGrp="1"/>
-          </p:cNvSpPr>
-          <p:nvPr>
-            <p:ph type="body" idx="1"/>
-          </p:nvPr>
-        </p:nvSpPr>
-        <p:spPr>
-          <a:xfrm>
-            <a:off x="685800" y="4343400"/>
-            <a:ext cx="5486400" cy="4114800"/>
-          </a:xfrm>
-          <a:prstGeom prst="rect">
-            <a:avLst/>
-          </a:prstGeom>
-        </p:spPr>
-        <p:txBody>
-          <a:bodyPr spcFirstLastPara="1" wrap="square" lIns="91425" tIns="91425" rIns="91425" bIns="91425" anchor="t" anchorCtr="0">
-            <a:noAutofit/>
-          </a:bodyPr>
-          <a:lstStyle/>
-          <a:p>
-            <a:pPr marL="0" lvl="0" indent="0" algn="l" rtl="0">
-              <a:spcBef>
-                <a:spcPts val="0"/>
-              </a:spcBef>
-              <a:spcAft>
-                <a:spcPts val="0"/>
-              </a:spcAft>
-              <a:buNone/>
-            </a:pPr>
-            <a:endParaRPr/>
-          </a:p>
-        </p:txBody>
-      </p:sp>
-      <p:sp>
-        <p:nvSpPr>
-          <p:cNvPr id="494" name="Google Shape;494;p17:notes"/>
-          <p:cNvSpPr>
-            <a:spLocks noGrp="1" noRot="1" noChangeAspect="1"/>
-          </p:cNvSpPr>
-          <p:nvPr>
-            <p:ph type="sldImg" idx="2"/>
-          </p:nvPr>
-        </p:nvSpPr>
-        <p:spPr>
-          <a:xfrm>
-            <a:off x="381000" y="685800"/>
-            <a:ext cx="6096000" cy="3429000"/>
-          </a:xfrm>
-          <a:custGeom>
-            <a:avLst/>
-            <a:gdLst/>
-            <a:ahLst/>
-            <a:cxnLst/>
-            <a:rect l="l" t="t" r="r" b="b"/>
-            <a:pathLst>
-              <a:path w="120000" h="120000" extrusionOk="0">
-                <a:moveTo>
-                  <a:pt x="0" y="0"/>
-                </a:moveTo>
-                <a:lnTo>
-                  <a:pt x="120000" y="0"/>
-                </a:lnTo>
-                <a:lnTo>
-                  <a:pt x="120000" y="120000"/>
-                </a:lnTo>
-                <a:lnTo>
-                  <a:pt x="0" y="120000"/>
-                </a:lnTo>
-                <a:close/>
-              </a:path>
-            </a:pathLst>
-          </a:custGeom>
-        </p:spPr>
-      </p:sp>
-    </p:spTree>
-  </p:cSld>
-  <p:clrMapOvr>
-    <a:masterClrMapping/>
-  </p:clrMapOvr>
-</p:notes>
-</file>
-
-<file path=ppt/notesSlides/notesSlide18.xml><?xml version="1.0" encoding="utf-8"?>
-<p:notes xmlns:a="http://schemas.openxmlformats.org/drawingml/2006/main" xmlns:r="http://schemas.openxmlformats.org/officeDocument/2006/relationships" xmlns:p="http://schemas.openxmlformats.org/presentationml/2006/main" showMasterSp="0" showMasterPhAnim="0">
-  <p:cSld>
-    <p:spTree>
-      <p:nvGrpSpPr>
-        <p:cNvPr id="1" name="Shape 506"/>
-        <p:cNvGrpSpPr/>
-        <p:nvPr/>
-      </p:nvGrpSpPr>
-      <p:grpSpPr>
-        <a:xfrm>
-          <a:off x="0" y="0"/>
-          <a:ext cx="0" cy="0"/>
-          <a:chOff x="0" y="0"/>
-          <a:chExt cx="0" cy="0"/>
-        </a:xfrm>
-      </p:grpSpPr>
-      <p:sp>
-        <p:nvSpPr>
-          <p:cNvPr id="507" name="Google Shape;507;p18:notes"/>
-          <p:cNvSpPr txBox="1">
-            <a:spLocks noGrp="1"/>
-          </p:cNvSpPr>
-          <p:nvPr>
-            <p:ph type="body" idx="1"/>
-          </p:nvPr>
-        </p:nvSpPr>
-        <p:spPr>
-          <a:xfrm>
-            <a:off x="685800" y="4343400"/>
-            <a:ext cx="5486400" cy="4114800"/>
-          </a:xfrm>
-          <a:prstGeom prst="rect">
-            <a:avLst/>
-          </a:prstGeom>
-        </p:spPr>
-        <p:txBody>
-          <a:bodyPr spcFirstLastPara="1" wrap="square" lIns="91425" tIns="91425" rIns="91425" bIns="91425" anchor="t" anchorCtr="0">
-            <a:noAutofit/>
-          </a:bodyPr>
-          <a:lstStyle/>
-          <a:p>
-            <a:pPr marL="0" lvl="0" indent="0" algn="l" rtl="0">
-              <a:spcBef>
-                <a:spcPts val="0"/>
-              </a:spcBef>
-              <a:spcAft>
-                <a:spcPts val="0"/>
-              </a:spcAft>
-              <a:buNone/>
-            </a:pPr>
-            <a:endParaRPr/>
-          </a:p>
-        </p:txBody>
-      </p:sp>
-      <p:sp>
-        <p:nvSpPr>
-          <p:cNvPr id="508" name="Google Shape;508;p18:notes"/>
-          <p:cNvSpPr>
-            <a:spLocks noGrp="1" noRot="1" noChangeAspect="1"/>
-          </p:cNvSpPr>
-          <p:nvPr>
-            <p:ph type="sldImg" idx="2"/>
-          </p:nvPr>
-        </p:nvSpPr>
-        <p:spPr>
-          <a:xfrm>
-            <a:off x="381000" y="685800"/>
-            <a:ext cx="6096000" cy="3429000"/>
-          </a:xfrm>
-          <a:custGeom>
-            <a:avLst/>
-            <a:gdLst/>
-            <a:ahLst/>
-            <a:cxnLst/>
-            <a:rect l="l" t="t" r="r" b="b"/>
-            <a:pathLst>
-              <a:path w="120000" h="120000" extrusionOk="0">
-                <a:moveTo>
-                  <a:pt x="0" y="0"/>
-                </a:moveTo>
-                <a:lnTo>
-                  <a:pt x="120000" y="0"/>
-                </a:lnTo>
-                <a:lnTo>
-                  <a:pt x="120000" y="120000"/>
-                </a:lnTo>
-                <a:lnTo>
-                  <a:pt x="0" y="120000"/>
-                </a:lnTo>
-                <a:close/>
-              </a:path>
-            </a:pathLst>
-          </a:custGeom>
-        </p:spPr>
-      </p:sp>
-    </p:spTree>
-  </p:cSld>
-  <p:clrMapOvr>
-    <a:masterClrMapping/>
-  </p:clrMapOvr>
-</p:notes>
-</file>
-
-<file path=ppt/notesSlides/notesSlide19.xml><?xml version="1.0" encoding="utf-8"?>
+<file path=ppt/notesSlides/notesSlide20.xml><?xml version="1.0" encoding="utf-8"?>
 <p:notes xmlns:a="http://schemas.openxmlformats.org/drawingml/2006/main" xmlns:r="http://schemas.openxmlformats.org/officeDocument/2006/relationships" xmlns:p="http://schemas.openxmlformats.org/presentationml/2006/main" showMasterSp="0" showMasterPhAnim="0">
   <p:cSld>
     <p:spTree>
@@ -1902,111 +2134,7 @@
 </p:notes>
 </file>
 
-<file path=ppt/notesSlides/notesSlide2.xml><?xml version="1.0" encoding="utf-8"?>
-<p:notes xmlns:a="http://schemas.openxmlformats.org/drawingml/2006/main" xmlns:r="http://schemas.openxmlformats.org/officeDocument/2006/relationships" xmlns:p="http://schemas.openxmlformats.org/presentationml/2006/main" showMasterSp="0" showMasterPhAnim="0">
-  <p:cSld>
-    <p:spTree>
-      <p:nvGrpSpPr>
-        <p:cNvPr id="1" name="Shape 97"/>
-        <p:cNvGrpSpPr/>
-        <p:nvPr/>
-      </p:nvGrpSpPr>
-      <p:grpSpPr>
-        <a:xfrm>
-          <a:off x="0" y="0"/>
-          <a:ext cx="0" cy="0"/>
-          <a:chOff x="0" y="0"/>
-          <a:chExt cx="0" cy="0"/>
-        </a:xfrm>
-      </p:grpSpPr>
-      <p:sp>
-        <p:nvSpPr>
-          <p:cNvPr id="98" name="Google Shape;98;p2:notes"/>
-          <p:cNvSpPr txBox="1">
-            <a:spLocks noGrp="1"/>
-          </p:cNvSpPr>
-          <p:nvPr>
-            <p:ph type="body" idx="1"/>
-          </p:nvPr>
-        </p:nvSpPr>
-        <p:spPr>
-          <a:xfrm>
-            <a:off x="685800" y="4343400"/>
-            <a:ext cx="5486400" cy="4114800"/>
-          </a:xfrm>
-          <a:prstGeom prst="rect">
-            <a:avLst/>
-          </a:prstGeom>
-        </p:spPr>
-        <p:txBody>
-          <a:bodyPr spcFirstLastPara="1" wrap="square" lIns="91425" tIns="91425" rIns="91425" bIns="91425" anchor="t" anchorCtr="0">
-            <a:noAutofit/>
-          </a:bodyPr>
-          <a:lstStyle/>
-          <a:p>
-            <a:pPr marL="0" lvl="0" indent="0" algn="l" rtl="0">
-              <a:spcBef>
-                <a:spcPts val="0"/>
-              </a:spcBef>
-              <a:spcAft>
-                <a:spcPts val="0"/>
-              </a:spcAft>
-              <a:buNone/>
-            </a:pPr>
-            <a:endParaRPr/>
-          </a:p>
-        </p:txBody>
-      </p:sp>
-      <p:sp>
-        <p:nvSpPr>
-          <p:cNvPr id="99" name="Google Shape;99;p2:notes"/>
-          <p:cNvSpPr>
-            <a:spLocks noGrp="1" noRot="1" noChangeAspect="1"/>
-          </p:cNvSpPr>
-          <p:nvPr>
-            <p:ph type="sldImg" idx="2"/>
-          </p:nvPr>
-        </p:nvSpPr>
-        <p:spPr>
-          <a:xfrm>
-            <a:off x="381000" y="685800"/>
-            <a:ext cx="6096000" cy="3429000"/>
-          </a:xfrm>
-          <a:custGeom>
-            <a:avLst/>
-            <a:gdLst/>
-            <a:ahLst/>
-            <a:cxnLst/>
-            <a:rect l="l" t="t" r="r" b="b"/>
-            <a:pathLst>
-              <a:path w="120000" h="120000" extrusionOk="0">
-                <a:moveTo>
-                  <a:pt x="0" y="0"/>
-                </a:moveTo>
-                <a:lnTo>
-                  <a:pt x="120000" y="0"/>
-                </a:lnTo>
-                <a:lnTo>
-                  <a:pt x="120000" y="120000"/>
-                </a:lnTo>
-                <a:lnTo>
-                  <a:pt x="0" y="120000"/>
-                </a:lnTo>
-                <a:close/>
-              </a:path>
-            </a:pathLst>
-          </a:custGeom>
-        </p:spPr>
-      </p:sp>
-    </p:spTree>
-  </p:cSld>
-  <p:clrMapOvr>
-    <a:masterClrMapping/>
-  </p:clrMapOvr>
-</p:notes>
-</file>
-
-<file path=ppt/notesSlides/notesSlide20.xml><?xml version="1.0" encoding="utf-8"?>
+<file path=ppt/notesSlides/notesSlide21.xml><?xml version="1.0" encoding="utf-8"?>
 <p:notes xmlns:a="http://schemas.openxmlformats.org/drawingml/2006/main" xmlns:r="http://schemas.openxmlformats.org/officeDocument/2006/relationships" xmlns:p="http://schemas.openxmlformats.org/presentationml/2006/main" showMasterSp="0" showMasterPhAnim="0">
   <p:cSld>
     <p:spTree>
@@ -2115,6 +2243,110 @@
   <p:cSld>
     <p:spTree>
       <p:nvGrpSpPr>
+        <p:cNvPr id="1" name="Shape 97"/>
+        <p:cNvGrpSpPr/>
+        <p:nvPr/>
+      </p:nvGrpSpPr>
+      <p:grpSpPr>
+        <a:xfrm>
+          <a:off x="0" y="0"/>
+          <a:ext cx="0" cy="0"/>
+          <a:chOff x="0" y="0"/>
+          <a:chExt cx="0" cy="0"/>
+        </a:xfrm>
+      </p:grpSpPr>
+      <p:sp>
+        <p:nvSpPr>
+          <p:cNvPr id="98" name="Google Shape;98;p2:notes"/>
+          <p:cNvSpPr txBox="1">
+            <a:spLocks noGrp="1"/>
+          </p:cNvSpPr>
+          <p:nvPr>
+            <p:ph type="body" idx="1"/>
+          </p:nvPr>
+        </p:nvSpPr>
+        <p:spPr>
+          <a:xfrm>
+            <a:off x="685800" y="4343400"/>
+            <a:ext cx="5486400" cy="4114800"/>
+          </a:xfrm>
+          <a:prstGeom prst="rect">
+            <a:avLst/>
+          </a:prstGeom>
+        </p:spPr>
+        <p:txBody>
+          <a:bodyPr spcFirstLastPara="1" wrap="square" lIns="91425" tIns="91425" rIns="91425" bIns="91425" anchor="t" anchorCtr="0">
+            <a:noAutofit/>
+          </a:bodyPr>
+          <a:lstStyle/>
+          <a:p>
+            <a:pPr marL="0" lvl="0" indent="0" algn="l" rtl="0">
+              <a:spcBef>
+                <a:spcPts val="0"/>
+              </a:spcBef>
+              <a:spcAft>
+                <a:spcPts val="0"/>
+              </a:spcAft>
+              <a:buNone/>
+            </a:pPr>
+            <a:endParaRPr/>
+          </a:p>
+        </p:txBody>
+      </p:sp>
+      <p:sp>
+        <p:nvSpPr>
+          <p:cNvPr id="99" name="Google Shape;99;p2:notes"/>
+          <p:cNvSpPr>
+            <a:spLocks noGrp="1" noRot="1" noChangeAspect="1"/>
+          </p:cNvSpPr>
+          <p:nvPr>
+            <p:ph type="sldImg" idx="2"/>
+          </p:nvPr>
+        </p:nvSpPr>
+        <p:spPr>
+          <a:xfrm>
+            <a:off x="381000" y="685800"/>
+            <a:ext cx="6096000" cy="3429000"/>
+          </a:xfrm>
+          <a:custGeom>
+            <a:avLst/>
+            <a:gdLst/>
+            <a:ahLst/>
+            <a:cxnLst/>
+            <a:rect l="l" t="t" r="r" b="b"/>
+            <a:pathLst>
+              <a:path w="120000" h="120000" extrusionOk="0">
+                <a:moveTo>
+                  <a:pt x="0" y="0"/>
+                </a:moveTo>
+                <a:lnTo>
+                  <a:pt x="120000" y="0"/>
+                </a:lnTo>
+                <a:lnTo>
+                  <a:pt x="120000" y="120000"/>
+                </a:lnTo>
+                <a:lnTo>
+                  <a:pt x="0" y="120000"/>
+                </a:lnTo>
+                <a:close/>
+              </a:path>
+            </a:pathLst>
+          </a:custGeom>
+        </p:spPr>
+      </p:sp>
+    </p:spTree>
+  </p:cSld>
+  <p:clrMapOvr>
+    <a:masterClrMapping/>
+  </p:clrMapOvr>
+</p:notes>
+</file>
+
+<file path=ppt/notesSlides/notesSlide4.xml><?xml version="1.0" encoding="utf-8"?>
+<p:notes xmlns:a="http://schemas.openxmlformats.org/drawingml/2006/main" xmlns:r="http://schemas.openxmlformats.org/officeDocument/2006/relationships" xmlns:p="http://schemas.openxmlformats.org/presentationml/2006/main" showMasterSp="0" showMasterPhAnim="0">
+  <p:cSld>
+    <p:spTree>
+      <p:nvGrpSpPr>
         <p:cNvPr id="1" name="Shape 126"/>
         <p:cNvGrpSpPr/>
         <p:nvPr/>
@@ -2214,7 +2446,7 @@
 </p:notes>
 </file>
 
-<file path=ppt/notesSlides/notesSlide4.xml><?xml version="1.0" encoding="utf-8"?>
+<file path=ppt/notesSlides/notesSlide5.xml><?xml version="1.0" encoding="utf-8"?>
 <p:notes xmlns:a="http://schemas.openxmlformats.org/drawingml/2006/main" xmlns:r="http://schemas.openxmlformats.org/officeDocument/2006/relationships" xmlns:p="http://schemas.openxmlformats.org/presentationml/2006/main" showMasterSp="0" showMasterPhAnim="0">
   <p:cSld>
     <p:spTree>
@@ -2318,7 +2550,7 @@
 </p:notes>
 </file>
 
-<file path=ppt/notesSlides/notesSlide5.xml><?xml version="1.0" encoding="utf-8"?>
+<file path=ppt/notesSlides/notesSlide6.xml><?xml version="1.0" encoding="utf-8"?>
 <p:notes xmlns:a="http://schemas.openxmlformats.org/drawingml/2006/main" xmlns:r="http://schemas.openxmlformats.org/officeDocument/2006/relationships" xmlns:p="http://schemas.openxmlformats.org/presentationml/2006/main" showMasterSp="0" showMasterPhAnim="0">
   <p:cSld>
     <p:spTree>
@@ -2422,7 +2654,7 @@
 </p:notes>
 </file>
 
-<file path=ppt/notesSlides/notesSlide6.xml><?xml version="1.0" encoding="utf-8"?>
+<file path=ppt/notesSlides/notesSlide7.xml><?xml version="1.0" encoding="utf-8"?>
 <p:notes xmlns:a="http://schemas.openxmlformats.org/drawingml/2006/main" xmlns:r="http://schemas.openxmlformats.org/officeDocument/2006/relationships" xmlns:p="http://schemas.openxmlformats.org/presentationml/2006/main" showMasterSp="0" showMasterPhAnim="0">
   <p:cSld>
     <p:spTree>
@@ -2526,7 +2758,7 @@
 </p:notes>
 </file>
 
-<file path=ppt/notesSlides/notesSlide7.xml><?xml version="1.0" encoding="utf-8"?>
+<file path=ppt/notesSlides/notesSlide8.xml><?xml version="1.0" encoding="utf-8"?>
 <p:notes xmlns:a="http://schemas.openxmlformats.org/drawingml/2006/main" xmlns:r="http://schemas.openxmlformats.org/officeDocument/2006/relationships" xmlns:p="http://schemas.openxmlformats.org/presentationml/2006/main" showMasterSp="0" showMasterPhAnim="0">
   <p:cSld>
     <p:spTree>
@@ -2630,7 +2862,7 @@
 </p:notes>
 </file>
 
-<file path=ppt/notesSlides/notesSlide8.xml><?xml version="1.0" encoding="utf-8"?>
+<file path=ppt/notesSlides/notesSlide9.xml><?xml version="1.0" encoding="utf-8"?>
 <p:notes xmlns:a="http://schemas.openxmlformats.org/drawingml/2006/main" xmlns:r="http://schemas.openxmlformats.org/officeDocument/2006/relationships" xmlns:p="http://schemas.openxmlformats.org/presentationml/2006/main" showMasterSp="0" showMasterPhAnim="0">
   <p:cSld>
     <p:spTree>
@@ -2688,110 +2920,6 @@
       <p:sp>
         <p:nvSpPr>
           <p:cNvPr id="263" name="Google Shape;263;p8:notes"/>
-          <p:cNvSpPr>
-            <a:spLocks noGrp="1" noRot="1" noChangeAspect="1"/>
-          </p:cNvSpPr>
-          <p:nvPr>
-            <p:ph type="sldImg" idx="2"/>
-          </p:nvPr>
-        </p:nvSpPr>
-        <p:spPr>
-          <a:xfrm>
-            <a:off x="1143225" y="685800"/>
-            <a:ext cx="4572300" cy="3429000"/>
-          </a:xfrm>
-          <a:custGeom>
-            <a:avLst/>
-            <a:gdLst/>
-            <a:ahLst/>
-            <a:cxnLst/>
-            <a:rect l="l" t="t" r="r" b="b"/>
-            <a:pathLst>
-              <a:path w="120000" h="120000" extrusionOk="0">
-                <a:moveTo>
-                  <a:pt x="0" y="0"/>
-                </a:moveTo>
-                <a:lnTo>
-                  <a:pt x="120000" y="0"/>
-                </a:lnTo>
-                <a:lnTo>
-                  <a:pt x="120000" y="120000"/>
-                </a:lnTo>
-                <a:lnTo>
-                  <a:pt x="0" y="120000"/>
-                </a:lnTo>
-                <a:close/>
-              </a:path>
-            </a:pathLst>
-          </a:custGeom>
-        </p:spPr>
-      </p:sp>
-    </p:spTree>
-  </p:cSld>
-  <p:clrMapOvr>
-    <a:masterClrMapping/>
-  </p:clrMapOvr>
-</p:notes>
-</file>
-
-<file path=ppt/notesSlides/notesSlide9.xml><?xml version="1.0" encoding="utf-8"?>
-<p:notes xmlns:a="http://schemas.openxmlformats.org/drawingml/2006/main" xmlns:r="http://schemas.openxmlformats.org/officeDocument/2006/relationships" xmlns:p="http://schemas.openxmlformats.org/presentationml/2006/main" showMasterSp="0" showMasterPhAnim="0">
-  <p:cSld>
-    <p:spTree>
-      <p:nvGrpSpPr>
-        <p:cNvPr id="1" name="Shape 278"/>
-        <p:cNvGrpSpPr/>
-        <p:nvPr/>
-      </p:nvGrpSpPr>
-      <p:grpSpPr>
-        <a:xfrm>
-          <a:off x="0" y="0"/>
-          <a:ext cx="0" cy="0"/>
-          <a:chOff x="0" y="0"/>
-          <a:chExt cx="0" cy="0"/>
-        </a:xfrm>
-      </p:grpSpPr>
-      <p:sp>
-        <p:nvSpPr>
-          <p:cNvPr id="279" name="Google Shape;279;p9:notes"/>
-          <p:cNvSpPr txBox="1">
-            <a:spLocks noGrp="1"/>
-          </p:cNvSpPr>
-          <p:nvPr>
-            <p:ph type="body" idx="1"/>
-          </p:nvPr>
-        </p:nvSpPr>
-        <p:spPr>
-          <a:xfrm>
-            <a:off x="685800" y="4343400"/>
-            <a:ext cx="5486400" cy="4114800"/>
-          </a:xfrm>
-          <a:prstGeom prst="rect">
-            <a:avLst/>
-          </a:prstGeom>
-        </p:spPr>
-        <p:txBody>
-          <a:bodyPr spcFirstLastPara="1" wrap="square" lIns="91425" tIns="91425" rIns="91425" bIns="91425" anchor="t" anchorCtr="0">
-            <a:noAutofit/>
-          </a:bodyPr>
-          <a:lstStyle/>
-          <a:p>
-            <a:pPr marL="0" lvl="0" indent="0" algn="l" rtl="0">
-              <a:spcBef>
-                <a:spcPts val="0"/>
-              </a:spcBef>
-              <a:spcAft>
-                <a:spcPts val="0"/>
-              </a:spcAft>
-              <a:buNone/>
-            </a:pPr>
-            <a:endParaRPr/>
-          </a:p>
-        </p:txBody>
-      </p:sp>
-      <p:sp>
-        <p:nvSpPr>
-          <p:cNvPr id="280" name="Google Shape;280;p9:notes"/>
           <p:cNvSpPr>
             <a:spLocks noGrp="1" noRot="1" noChangeAspect="1"/>
           </p:cNvSpPr>
@@ -12664,22 +12792,15 @@
 <file path=ppt/slides/slide1.xml><?xml version="1.0" encoding="utf-8"?>
 <p:sld xmlns:a="http://schemas.openxmlformats.org/drawingml/2006/main" xmlns:r="http://schemas.openxmlformats.org/officeDocument/2006/relationships" xmlns:p="http://schemas.openxmlformats.org/presentationml/2006/main">
   <p:cSld>
-    <p:bg>
-      <p:bgPr>
-        <a:blipFill>
-          <a:blip r:embed="rId3">
-            <a:alphaModFix/>
-          </a:blip>
-          <a:stretch>
-            <a:fillRect/>
-          </a:stretch>
-        </a:blipFill>
-        <a:effectLst/>
-      </p:bgPr>
-    </p:bg>
     <p:spTree>
       <p:nvGrpSpPr>
-        <p:cNvPr id="1" name="Shape 83"/>
+        <p:cNvPr id="1" name="Shape 252">
+          <a:extLst>
+            <a:ext uri="{FF2B5EF4-FFF2-40B4-BE49-F238E27FC236}">
+              <a16:creationId xmlns:a16="http://schemas.microsoft.com/office/drawing/2014/main" id="{8C8C9362-8CFD-7671-1067-125A801D5ED2}"/>
+            </a:ext>
+          </a:extLst>
+        </p:cNvPr>
         <p:cNvGrpSpPr/>
         <p:nvPr/>
       </p:nvGrpSpPr>
@@ -12691,16 +12812,55 @@
           <a:chExt cx="0" cy="0"/>
         </a:xfrm>
       </p:grpSpPr>
+      <p:pic>
+        <p:nvPicPr>
+          <p:cNvPr id="253" name="Google Shape;253;p19" descr="image.png">
+            <a:extLst>
+              <a:ext uri="{FF2B5EF4-FFF2-40B4-BE49-F238E27FC236}">
+                <a16:creationId xmlns:a16="http://schemas.microsoft.com/office/drawing/2014/main" id="{2F9A0FA5-5981-43E4-DF46-9AEE750F4D50}"/>
+              </a:ext>
+            </a:extLst>
+          </p:cNvPr>
+          <p:cNvPicPr preferRelativeResize="0"/>
+          <p:nvPr/>
+        </p:nvPicPr>
+        <p:blipFill rotWithShape="1">
+          <a:blip r:embed="rId3">
+            <a:alphaModFix/>
+          </a:blip>
+          <a:srcRect/>
+          <a:stretch/>
+        </p:blipFill>
+        <p:spPr>
+          <a:xfrm>
+            <a:off x="10858500" y="5524500"/>
+            <a:ext cx="952500" cy="952500"/>
+          </a:xfrm>
+          <a:prstGeom prst="rect">
+            <a:avLst/>
+          </a:prstGeom>
+          <a:noFill/>
+          <a:ln>
+            <a:noFill/>
+          </a:ln>
+        </p:spPr>
+      </p:pic>
       <p:sp>
         <p:nvSpPr>
-          <p:cNvPr id="84" name="Google Shape;84;p13"/>
+          <p:cNvPr id="257" name="Google Shape;257;p19">
+            <a:extLst>
+              <a:ext uri="{FF2B5EF4-FFF2-40B4-BE49-F238E27FC236}">
+                <a16:creationId xmlns:a16="http://schemas.microsoft.com/office/drawing/2014/main" id="{F25244FB-3432-B9FE-020C-0349645835C5}"/>
+              </a:ext>
+            </a:extLst>
+          </p:cNvPr>
           <p:cNvSpPr txBox="1"/>
           <p:nvPr/>
         </p:nvSpPr>
         <p:spPr>
           <a:xfrm>
-            <a:off x="762000" y="381000"/>
-            <a:ext cx="10668000" cy="1238400"/>
+            <a:off x="4520803" y="2566987"/>
+            <a:ext cx="3150393" cy="646331"/>
           </a:xfrm>
           <a:prstGeom prst="rect">
             <a:avLst/>
@@ -12712,11 +12872,11 @@
         </p:spPr>
         <p:txBody>
           <a:bodyPr spcFirstLastPara="1" wrap="square" lIns="0" tIns="0" rIns="0" bIns="0" anchor="t" anchorCtr="0">
-            <a:noAutofit/>
+            <a:spAutoFit/>
           </a:bodyPr>
           <a:lstStyle/>
           <a:p>
-            <a:pPr marL="0" lvl="0" indent="0" algn="l" rtl="0">
+            <a:pPr marL="0" marR="0" lvl="0" indent="0" algn="ctr" rtl="0">
               <a:spcBef>
                 <a:spcPts val="0"/>
               </a:spcBef>
@@ -12726,43 +12886,55 @@
               <a:buNone/>
             </a:pPr>
             <a:r>
-              <a:rPr lang="en-US" sz="1000" b="1">
+              <a:rPr lang="en-US" sz="4200" b="1" i="0" u="none" strike="noStrike" cap="none" dirty="0">
                 <a:solidFill>
-                  <a:srgbClr val="0F172A"/>
+                  <a:srgbClr val="22C55E"/>
                 </a:solidFill>
-                <a:highlight>
-                  <a:srgbClr val="E2E8F0"/>
-                </a:highlight>
-                <a:latin typeface="Inter"/>
-                <a:ea typeface="Inter"/>
-                <a:cs typeface="Inter"/>
-                <a:sym typeface="Inter"/>
+                <a:latin typeface="DM Sans"/>
+                <a:ea typeface="DM Sans"/>
+                <a:cs typeface="DM Sans"/>
+                <a:sym typeface="DM Sans"/>
               </a:rPr>
-              <a:t>🤖 Agentic AI</a:t>
+              <a:t>Agentic AI</a:t>
             </a:r>
-            <a:r>
-              <a:rPr lang="en-US" sz="1100" b="0">
-                <a:solidFill>
-                  <a:srgbClr val="64748B"/>
-                </a:solidFill>
-                <a:latin typeface="Inter Medium"/>
-                <a:ea typeface="Inter Medium"/>
-                <a:cs typeface="Inter Medium"/>
-                <a:sym typeface="Inter Medium"/>
-              </a:rPr>
-              <a:t>Slide 01</a:t>
-            </a:r>
-            <a:endParaRPr>
-              <a:latin typeface="DM Sans"/>
-              <a:ea typeface="DM Sans"/>
-              <a:cs typeface="DM Sans"/>
-              <a:sym typeface="DM Sans"/>
-            </a:endParaRPr>
+            <a:endParaRPr dirty="0"/>
           </a:p>
+        </p:txBody>
+      </p:sp>
+      <p:sp>
+        <p:nvSpPr>
+          <p:cNvPr id="258" name="Google Shape;258;p19">
+            <a:extLst>
+              <a:ext uri="{FF2B5EF4-FFF2-40B4-BE49-F238E27FC236}">
+                <a16:creationId xmlns:a16="http://schemas.microsoft.com/office/drawing/2014/main" id="{CC38BC82-02F2-611E-89A0-B326228955F8}"/>
+              </a:ext>
+            </a:extLst>
+          </p:cNvPr>
+          <p:cNvSpPr txBox="1"/>
+          <p:nvPr/>
+        </p:nvSpPr>
+        <p:spPr>
+          <a:xfrm>
+            <a:off x="2790586" y="3309937"/>
+            <a:ext cx="6610826" cy="466725"/>
+          </a:xfrm>
+          <a:prstGeom prst="rect">
+            <a:avLst/>
+          </a:prstGeom>
+          <a:noFill/>
+          <a:ln>
+            <a:noFill/>
+          </a:ln>
+        </p:spPr>
+        <p:txBody>
+          <a:bodyPr spcFirstLastPara="1" wrap="square" lIns="0" tIns="0" rIns="0" bIns="0" anchor="t" anchorCtr="0">
+            <a:spAutoFit/>
+          </a:bodyPr>
+          <a:lstStyle/>
           <a:p>
-            <a:pPr marL="0" lvl="0" indent="0" algn="l" rtl="0">
-              <a:spcBef>
-                <a:spcPts val="750"/>
+            <a:pPr marL="0" marR="0" lvl="0" indent="0" algn="ctr" rtl="0">
+              <a:spcBef>
+                <a:spcPts val="0"/>
               </a:spcBef>
               <a:spcAft>
                 <a:spcPts val="0"/>
@@ -12770,388 +12942,251 @@
               <a:buNone/>
             </a:pPr>
             <a:r>
-              <a:rPr lang="en-US" sz="3200" b="0">
+              <a:rPr lang="en-US" sz="3000" b="0" i="0" u="none" strike="noStrike" cap="none">
                 <a:solidFill>
-                  <a:srgbClr val="0F172A"/>
-                </a:solidFill>
-                <a:latin typeface="DM Sans ExtraBold"/>
-                <a:ea typeface="DM Sans ExtraBold"/>
-                <a:cs typeface="DM Sans ExtraBold"/>
-                <a:sym typeface="DM Sans ExtraBold"/>
-              </a:rPr>
-              <a:t>What is Agentic AI?</a:t>
-            </a:r>
-            <a:endParaRPr sz="3200" b="0">
-              <a:solidFill>
-                <a:srgbClr val="0F172A"/>
-              </a:solidFill>
-              <a:latin typeface="DM Sans ExtraBold"/>
-              <a:ea typeface="DM Sans ExtraBold"/>
-              <a:cs typeface="DM Sans ExtraBold"/>
-              <a:sym typeface="DM Sans ExtraBold"/>
-            </a:endParaRPr>
-          </a:p>
-          <a:p>
-            <a:pPr marL="0" lvl="0" indent="0" algn="l" rtl="0">
-              <a:spcBef>
-                <a:spcPts val="300"/>
-              </a:spcBef>
-              <a:spcAft>
-                <a:spcPts val="0"/>
-              </a:spcAft>
-              <a:buNone/>
-            </a:pPr>
-            <a:r>
-              <a:rPr lang="en-US" sz="1600" b="0">
-                <a:solidFill>
-                  <a:srgbClr val="475569"/>
+                  <a:srgbClr val="FFFFFF"/>
                 </a:solidFill>
                 <a:latin typeface="Inter"/>
                 <a:ea typeface="Inter"/>
                 <a:cs typeface="Inter"/>
                 <a:sym typeface="Inter"/>
               </a:rPr>
-              <a:t>The Next Frontier: Moving from Passive Chat to Autonomous Action</a:t>
+              <a:t>Autonomous AI Research Assistant</a:t>
             </a:r>
-            <a:endParaRPr sz="1600" b="0">
+            <a:endParaRPr/>
+          </a:p>
+        </p:txBody>
+      </p:sp>
+      <p:sp>
+        <p:nvSpPr>
+          <p:cNvPr id="259" name="Google Shape;259;p19">
+            <a:extLst>
+              <a:ext uri="{FF2B5EF4-FFF2-40B4-BE49-F238E27FC236}">
+                <a16:creationId xmlns:a16="http://schemas.microsoft.com/office/drawing/2014/main" id="{EBB6A8DE-E2BA-1FE6-92A5-7FDFF7B788BC}"/>
+              </a:ext>
+            </a:extLst>
+          </p:cNvPr>
+          <p:cNvSpPr/>
+          <p:nvPr/>
+        </p:nvSpPr>
+        <p:spPr>
+          <a:xfrm>
+            <a:off x="5715000" y="3871912"/>
+            <a:ext cx="762000" cy="38100"/>
+          </a:xfrm>
+          <a:prstGeom prst="rect">
+            <a:avLst/>
+          </a:prstGeom>
+          <a:solidFill>
+            <a:srgbClr val="22C55E"/>
+          </a:solidFill>
+          <a:ln>
+            <a:noFill/>
+          </a:ln>
+        </p:spPr>
+        <p:txBody>
+          <a:bodyPr spcFirstLastPara="1" wrap="square" lIns="91425" tIns="45700" rIns="91425" bIns="45700" anchor="ctr" anchorCtr="0">
+            <a:noAutofit/>
+          </a:bodyPr>
+          <a:lstStyle/>
+          <a:p>
+            <a:pPr marL="0" marR="0" lvl="0" indent="0" algn="ctr" rtl="0">
+              <a:spcBef>
+                <a:spcPts val="0"/>
+              </a:spcBef>
+              <a:spcAft>
+                <a:spcPts val="0"/>
+              </a:spcAft>
+              <a:buNone/>
+            </a:pPr>
+            <a:endParaRPr sz="1800" b="0" i="0" u="none" strike="noStrike" cap="none">
               <a:solidFill>
-                <a:srgbClr val="475569"/>
+                <a:schemeClr val="dk1"/>
               </a:solidFill>
-              <a:latin typeface="Inter"/>
-              <a:ea typeface="Inter"/>
-              <a:cs typeface="Inter"/>
-              <a:sym typeface="Inter"/>
+              <a:latin typeface="Calibri"/>
+              <a:ea typeface="Calibri"/>
+              <a:cs typeface="Calibri"/>
+              <a:sym typeface="Calibri"/>
             </a:endParaRPr>
           </a:p>
         </p:txBody>
       </p:sp>
+      <p:sp>
+        <p:nvSpPr>
+          <p:cNvPr id="260" name="Google Shape;260;p19">
+            <a:extLst>
+              <a:ext uri="{FF2B5EF4-FFF2-40B4-BE49-F238E27FC236}">
+                <a16:creationId xmlns:a16="http://schemas.microsoft.com/office/drawing/2014/main" id="{2025EC65-D2AE-C6A0-281F-8099BE3DEA11}"/>
+              </a:ext>
+            </a:extLst>
+          </p:cNvPr>
+          <p:cNvSpPr txBox="1"/>
+          <p:nvPr/>
+        </p:nvSpPr>
+        <p:spPr>
+          <a:xfrm>
+            <a:off x="3338512" y="4195762"/>
+            <a:ext cx="5514975" cy="190500"/>
+          </a:xfrm>
+          <a:prstGeom prst="rect">
+            <a:avLst/>
+          </a:prstGeom>
+          <a:noFill/>
+          <a:ln>
+            <a:noFill/>
+          </a:ln>
+        </p:spPr>
+        <p:txBody>
+          <a:bodyPr spcFirstLastPara="1" wrap="square" lIns="0" tIns="0" rIns="0" bIns="0" anchor="t" anchorCtr="0">
+            <a:spAutoFit/>
+          </a:bodyPr>
+          <a:lstStyle/>
+          <a:p>
+            <a:pPr marL="0" marR="0" lvl="0" indent="0" algn="ctr" rtl="0">
+              <a:spcBef>
+                <a:spcPts val="0"/>
+              </a:spcBef>
+              <a:spcAft>
+                <a:spcPts val="0"/>
+              </a:spcAft>
+              <a:buNone/>
+            </a:pPr>
+            <a:r>
+              <a:rPr lang="en-US" sz="1200" b="0" i="0" u="none" strike="noStrike" cap="none">
+                <a:solidFill>
+                  <a:srgbClr val="FFFFFF"/>
+                </a:solidFill>
+                <a:latin typeface="Inter"/>
+                <a:ea typeface="Inter"/>
+                <a:cs typeface="Inter"/>
+                <a:sym typeface="Inter"/>
+              </a:rPr>
+              <a:t>Applying Agentic principles to automate market research and data synthesis.</a:t>
+            </a:r>
+            <a:endParaRPr/>
+          </a:p>
+        </p:txBody>
+      </p:sp>
+    </p:spTree>
+    <p:extLst>
+      <p:ext uri="{BB962C8B-B14F-4D97-AF65-F5344CB8AC3E}">
+        <p14:creationId xmlns:p14="http://schemas.microsoft.com/office/powerpoint/2010/main" val="797379270"/>
+      </p:ext>
+    </p:extLst>
+  </p:cSld>
+  <p:clrMapOvr>
+    <a:masterClrMapping/>
+  </p:clrMapOvr>
+</p:sld>
+</file>
+
+<file path=ppt/slides/slide10.xml><?xml version="1.0" encoding="utf-8"?>
+<p:sld xmlns:a="http://schemas.openxmlformats.org/drawingml/2006/main" xmlns:r="http://schemas.openxmlformats.org/officeDocument/2006/relationships" xmlns:p="http://schemas.openxmlformats.org/presentationml/2006/main">
+  <p:cSld>
+    <p:bg>
+      <p:bgPr>
+        <a:solidFill>
+          <a:srgbClr val="FFFFFF"/>
+        </a:solidFill>
+        <a:effectLst/>
+      </p:bgPr>
+    </p:bg>
+    <p:spTree>
+      <p:nvGrpSpPr>
+        <p:cNvPr id="1" name="Shape 281"/>
+        <p:cNvGrpSpPr/>
+        <p:nvPr/>
+      </p:nvGrpSpPr>
+      <p:grpSpPr>
+        <a:xfrm>
+          <a:off x="0" y="0"/>
+          <a:ext cx="0" cy="0"/>
+          <a:chOff x="0" y="0"/>
+          <a:chExt cx="0" cy="0"/>
+        </a:xfrm>
+      </p:grpSpPr>
+      <p:pic>
+        <p:nvPicPr>
+          <p:cNvPr id="282" name="Google Shape;282;p21" descr="image.png"/>
+          <p:cNvPicPr preferRelativeResize="0"/>
+          <p:nvPr/>
+        </p:nvPicPr>
+        <p:blipFill rotWithShape="1">
+          <a:blip r:embed="rId3">
+            <a:alphaModFix/>
+          </a:blip>
+          <a:srcRect/>
+          <a:stretch/>
+        </p:blipFill>
+        <p:spPr>
+          <a:xfrm>
+            <a:off x="5448300" y="190500"/>
+            <a:ext cx="1295400" cy="342900"/>
+          </a:xfrm>
+          <a:prstGeom prst="rect">
+            <a:avLst/>
+          </a:prstGeom>
+          <a:noFill/>
+          <a:ln>
+            <a:noFill/>
+          </a:ln>
+        </p:spPr>
+      </p:pic>
+      <p:pic>
+        <p:nvPicPr>
+          <p:cNvPr id="283" name="Google Shape;283;p21" descr="image.png"/>
+          <p:cNvPicPr preferRelativeResize="0"/>
+          <p:nvPr/>
+        </p:nvPicPr>
+        <p:blipFill rotWithShape="1">
+          <a:blip r:embed="rId4">
+            <a:alphaModFix/>
+          </a:blip>
+          <a:srcRect/>
+          <a:stretch/>
+        </p:blipFill>
+        <p:spPr>
+          <a:xfrm>
+            <a:off x="381000" y="6434137"/>
+            <a:ext cx="1390650" cy="276225"/>
+          </a:xfrm>
+          <a:prstGeom prst="rect">
+            <a:avLst/>
+          </a:prstGeom>
+          <a:noFill/>
+          <a:ln>
+            <a:noFill/>
+          </a:ln>
+        </p:spPr>
+      </p:pic>
       <p:grpSp>
         <p:nvGrpSpPr>
-          <p:cNvPr id="85" name="Google Shape;85;p13"/>
+          <p:cNvPr id="284" name="Google Shape;284;p21"/>
           <p:cNvGrpSpPr/>
           <p:nvPr/>
         </p:nvGrpSpPr>
         <p:grpSpPr>
           <a:xfrm>
-            <a:off x="762000" y="1809750"/>
-            <a:ext cx="5143500" cy="2762400"/>
-            <a:chOff x="0" y="0"/>
-            <a:chExt cx="5143500" cy="2762400"/>
+            <a:off x="6000750" y="1809750"/>
+            <a:ext cx="5429400" cy="4000500"/>
+            <a:chOff x="6000750" y="1809750"/>
+            <a:chExt cx="5429400" cy="4000500"/>
           </a:xfrm>
         </p:grpSpPr>
         <p:sp>
           <p:nvSpPr>
-            <p:cNvPr id="86" name="Google Shape;86;p13"/>
+            <p:cNvPr id="285" name="Google Shape;285;p21"/>
             <p:cNvSpPr/>
             <p:nvPr/>
           </p:nvSpPr>
           <p:spPr>
             <a:xfrm>
-              <a:off x="0" y="0"/>
-              <a:ext cx="5143500" cy="2762400"/>
+              <a:off x="6000750" y="1809750"/>
+              <a:ext cx="5429400" cy="4000500"/>
             </a:xfrm>
             <a:prstGeom prst="roundRect">
               <a:avLst>
-                <a:gd name="adj" fmla="val 5517"/>
-              </a:avLst>
-            </a:prstGeom>
-            <a:solidFill>
-              <a:srgbClr val="FFFFFF"/>
-            </a:solidFill>
-            <a:ln w="14300" cap="flat" cmpd="sng">
-              <a:solidFill>
-                <a:srgbClr val="E2E8F0"/>
-              </a:solidFill>
-              <a:prstDash val="solid"/>
-              <a:round/>
-              <a:headEnd type="none" w="sm" len="sm"/>
-              <a:tailEnd type="none" w="sm" len="sm"/>
-            </a:ln>
-          </p:spPr>
-          <p:txBody>
-            <a:bodyPr spcFirstLastPara="1" wrap="square" lIns="0" tIns="0" rIns="0" bIns="0" anchor="ctr" anchorCtr="0">
-              <a:noAutofit/>
-            </a:bodyPr>
-            <a:lstStyle/>
-            <a:p>
-              <a:pPr marL="0" lvl="0" indent="0" algn="l" rtl="0">
-                <a:spcBef>
-                  <a:spcPts val="0"/>
-                </a:spcBef>
-                <a:spcAft>
-                  <a:spcPts val="0"/>
-                </a:spcAft>
-                <a:buNone/>
-              </a:pPr>
-              <a:endParaRPr/>
-            </a:p>
-          </p:txBody>
-        </p:sp>
-        <p:sp>
-          <p:nvSpPr>
-            <p:cNvPr id="87" name="Google Shape;87;p13"/>
-            <p:cNvSpPr txBox="1"/>
-            <p:nvPr/>
-          </p:nvSpPr>
-          <p:spPr>
-            <a:xfrm>
-              <a:off x="228600" y="228600"/>
-              <a:ext cx="4686300" cy="2305200"/>
-            </a:xfrm>
-            <a:prstGeom prst="rect">
-              <a:avLst/>
-            </a:prstGeom>
-            <a:noFill/>
-            <a:ln>
-              <a:noFill/>
-            </a:ln>
-          </p:spPr>
-          <p:txBody>
-            <a:bodyPr spcFirstLastPara="1" wrap="square" lIns="0" tIns="0" rIns="0" bIns="0" anchor="ctr" anchorCtr="0">
-              <a:noAutofit/>
-            </a:bodyPr>
-            <a:lstStyle/>
-            <a:p>
-              <a:pPr marL="0" lvl="0" indent="0" algn="l" rtl="0">
-                <a:spcBef>
-                  <a:spcPts val="0"/>
-                </a:spcBef>
-                <a:spcAft>
-                  <a:spcPts val="0"/>
-                </a:spcAft>
-                <a:buNone/>
-              </a:pPr>
-              <a:r>
-                <a:rPr lang="en-US" sz="1000" b="1">
-                  <a:solidFill>
-                    <a:srgbClr val="2563EB"/>
-                  </a:solidFill>
-                  <a:highlight>
-                    <a:srgbClr val="EFF6FF"/>
-                  </a:highlight>
-                  <a:latin typeface="Inter"/>
-                  <a:ea typeface="Inter"/>
-                  <a:cs typeface="Inter"/>
-                  <a:sym typeface="Inter"/>
-                </a:rPr>
-                <a:t>📚 DEFINITION</a:t>
-              </a:r>
-              <a:endParaRPr sz="1000" b="1">
-                <a:solidFill>
-                  <a:srgbClr val="2563EB"/>
-                </a:solidFill>
-                <a:highlight>
-                  <a:srgbClr val="EFF6FF"/>
-                </a:highlight>
-                <a:latin typeface="Inter"/>
-                <a:ea typeface="Inter"/>
-                <a:cs typeface="Inter"/>
-                <a:sym typeface="Inter"/>
-              </a:endParaRPr>
-            </a:p>
-            <a:p>
-              <a:pPr marL="0" lvl="0" indent="0" algn="l" rtl="0">
-                <a:spcBef>
-                  <a:spcPts val="1200"/>
-                </a:spcBef>
-                <a:spcAft>
-                  <a:spcPts val="0"/>
-                </a:spcAft>
-                <a:buNone/>
-              </a:pPr>
-              <a:r>
-                <a:rPr lang="en-US" sz="1350" b="1">
-                  <a:solidFill>
-                    <a:srgbClr val="0F172A"/>
-                  </a:solidFill>
-                  <a:latin typeface="Inter"/>
-                  <a:ea typeface="Inter"/>
-                  <a:cs typeface="Inter"/>
-                  <a:sym typeface="Inter"/>
-                </a:rPr>
-                <a:t>Agentic AI</a:t>
-              </a:r>
-              <a:r>
-                <a:rPr lang="en-US" sz="1350" b="0">
-                  <a:solidFill>
-                    <a:srgbClr val="1E293B"/>
-                  </a:solidFill>
-                  <a:latin typeface="Inter"/>
-                  <a:ea typeface="Inter"/>
-                  <a:cs typeface="Inter"/>
-                  <a:sym typeface="Inter"/>
-                </a:rPr>
-                <a:t> refers to systems that use </a:t>
-              </a:r>
-              <a:r>
-                <a:rPr lang="en-US" sz="1350" b="1">
-                  <a:solidFill>
-                    <a:srgbClr val="2563EB"/>
-                  </a:solidFill>
-                  <a:latin typeface="Inter"/>
-                  <a:ea typeface="Inter"/>
-                  <a:cs typeface="Inter"/>
-                  <a:sym typeface="Inter"/>
-                </a:rPr>
-                <a:t>Large Language Models (LLMs)</a:t>
-              </a:r>
-              <a:r>
-                <a:rPr lang="en-US" sz="1350" b="0">
-                  <a:solidFill>
-                    <a:srgbClr val="1E293B"/>
-                  </a:solidFill>
-                  <a:latin typeface="Inter"/>
-                  <a:ea typeface="Inter"/>
-                  <a:cs typeface="Inter"/>
-                  <a:sym typeface="Inter"/>
-                </a:rPr>
-                <a:t> as a "reasoning engine" to autonomously </a:t>
-              </a:r>
-              <a:r>
-                <a:rPr lang="en-US" sz="1350" b="0">
-                  <a:solidFill>
-                    <a:srgbClr val="0F172A"/>
-                  </a:solidFill>
-                  <a:latin typeface="Inter SemiBold"/>
-                  <a:ea typeface="Inter SemiBold"/>
-                  <a:cs typeface="Inter SemiBold"/>
-                  <a:sym typeface="Inter SemiBold"/>
-                </a:rPr>
-                <a:t>plan</a:t>
-              </a:r>
-              <a:r>
-                <a:rPr lang="en-US" sz="1350" b="0">
-                  <a:solidFill>
-                    <a:srgbClr val="1E293B"/>
-                  </a:solidFill>
-                  <a:latin typeface="Inter"/>
-                  <a:ea typeface="Inter"/>
-                  <a:cs typeface="Inter"/>
-                  <a:sym typeface="Inter"/>
-                </a:rPr>
-                <a:t>, </a:t>
-              </a:r>
-              <a:r>
-                <a:rPr lang="en-US" sz="1350" b="0">
-                  <a:solidFill>
-                    <a:srgbClr val="0F172A"/>
-                  </a:solidFill>
-                  <a:latin typeface="Inter SemiBold"/>
-                  <a:ea typeface="Inter SemiBold"/>
-                  <a:cs typeface="Inter SemiBold"/>
-                  <a:sym typeface="Inter SemiBold"/>
-                </a:rPr>
-                <a:t>execute</a:t>
-              </a:r>
-              <a:r>
-                <a:rPr lang="en-US" sz="1350" b="0">
-                  <a:solidFill>
-                    <a:srgbClr val="1E293B"/>
-                  </a:solidFill>
-                  <a:latin typeface="Inter"/>
-                  <a:ea typeface="Inter"/>
-                  <a:cs typeface="Inter"/>
-                  <a:sym typeface="Inter"/>
-                </a:rPr>
-                <a:t> tasks, and </a:t>
-              </a:r>
-              <a:r>
-                <a:rPr lang="en-US" sz="1350" b="0">
-                  <a:solidFill>
-                    <a:srgbClr val="0F172A"/>
-                  </a:solidFill>
-                  <a:latin typeface="Inter SemiBold"/>
-                  <a:ea typeface="Inter SemiBold"/>
-                  <a:cs typeface="Inter SemiBold"/>
-                  <a:sym typeface="Inter SemiBold"/>
-                </a:rPr>
-                <a:t>use tools</a:t>
-              </a:r>
-              <a:r>
-                <a:rPr lang="en-US" sz="1350" b="0">
-                  <a:solidFill>
-                    <a:srgbClr val="1E293B"/>
-                  </a:solidFill>
-                  <a:latin typeface="Inter"/>
-                  <a:ea typeface="Inter"/>
-                  <a:cs typeface="Inter"/>
-                  <a:sym typeface="Inter"/>
-                </a:rPr>
-                <a:t> to achieve high-level goals with minimal human intervention.</a:t>
-              </a:r>
-              <a:endParaRPr sz="1350" b="0">
-                <a:solidFill>
-                  <a:srgbClr val="1E293B"/>
-                </a:solidFill>
-                <a:latin typeface="Inter"/>
-                <a:ea typeface="Inter"/>
-                <a:cs typeface="Inter"/>
-                <a:sym typeface="Inter"/>
-              </a:endParaRPr>
-            </a:p>
-            <a:p>
-              <a:pPr marL="0" lvl="0" indent="0" algn="l" rtl="0">
-                <a:spcBef>
-                  <a:spcPts val="1200"/>
-                </a:spcBef>
-                <a:spcAft>
-                  <a:spcPts val="0"/>
-                </a:spcAft>
-                <a:buNone/>
-              </a:pPr>
-              <a:r>
-                <a:rPr lang="en-US" sz="1000" b="0">
-                  <a:solidFill>
-                    <a:srgbClr val="475569"/>
-                  </a:solidFill>
-                  <a:highlight>
-                    <a:srgbClr val="F1F5F9"/>
-                  </a:highlight>
-                  <a:latin typeface="Inter SemiBold"/>
-                  <a:ea typeface="Inter SemiBold"/>
-                  <a:cs typeface="Inter SemiBold"/>
-                  <a:sym typeface="Inter SemiBold"/>
-                </a:rPr>
-                <a:t>⚡ Autonomy🧠 Reasoning Engine🛠️ Tool Use</a:t>
-              </a:r>
-              <a:endParaRPr>
-                <a:latin typeface="Inter"/>
-                <a:ea typeface="Inter"/>
-                <a:cs typeface="Inter"/>
-                <a:sym typeface="Inter"/>
-              </a:endParaRPr>
-            </a:p>
-          </p:txBody>
-        </p:sp>
-      </p:grpSp>
-      <p:grpSp>
-        <p:nvGrpSpPr>
-          <p:cNvPr id="88" name="Google Shape;88;p13"/>
-          <p:cNvGrpSpPr/>
-          <p:nvPr/>
-        </p:nvGrpSpPr>
-        <p:grpSpPr>
-          <a:xfrm>
-            <a:off x="6286500" y="1809750"/>
-            <a:ext cx="5143500" cy="2762400"/>
-            <a:chOff x="0" y="0"/>
-            <a:chExt cx="5143500" cy="2762400"/>
-          </a:xfrm>
-        </p:grpSpPr>
-        <p:sp>
-          <p:nvSpPr>
-            <p:cNvPr id="89" name="Google Shape;89;p13"/>
-            <p:cNvSpPr/>
-            <p:nvPr/>
-          </p:nvSpPr>
-          <p:spPr>
-            <a:xfrm>
-              <a:off x="0" y="0"/>
-              <a:ext cx="5143500" cy="2762400"/>
-            </a:xfrm>
-            <a:prstGeom prst="roundRect">
-              <a:avLst>
-                <a:gd name="adj" fmla="val 5517"/>
+                <a:gd name="adj" fmla="val 2857"/>
               </a:avLst>
             </a:prstGeom>
             <a:solidFill>
@@ -13186,16 +13221,23 @@
             </a:p>
           </p:txBody>
         </p:sp>
-        <p:sp>
-          <p:nvSpPr>
-            <p:cNvPr id="90" name="Google Shape;90;p13"/>
-            <p:cNvSpPr txBox="1"/>
+        <p:pic>
+          <p:nvPicPr>
+            <p:cNvPr id="286" name="Google Shape;286;p21"/>
+            <p:cNvPicPr preferRelativeResize="0"/>
             <p:nvPr/>
-          </p:nvSpPr>
+          </p:nvPicPr>
+          <p:blipFill rotWithShape="1">
+            <a:blip r:embed="rId5">
+              <a:alphaModFix/>
+            </a:blip>
+            <a:srcRect t="787" b="797"/>
+            <a:stretch/>
+          </p:blipFill>
           <p:spPr>
             <a:xfrm>
-              <a:off x="228600" y="228600"/>
-              <a:ext cx="4686300" cy="2305200"/>
+              <a:off x="6191250" y="1952625"/>
+              <a:ext cx="5048400" cy="3714900"/>
             </a:xfrm>
             <a:prstGeom prst="rect">
               <a:avLst/>
@@ -13203,6 +13245,51 @@
             <a:noFill/>
             <a:ln>
               <a:noFill/>
+            </a:ln>
+          </p:spPr>
+        </p:pic>
+      </p:grpSp>
+      <p:grpSp>
+        <p:nvGrpSpPr>
+          <p:cNvPr id="287" name="Google Shape;287;p21"/>
+          <p:cNvGrpSpPr/>
+          <p:nvPr/>
+        </p:nvGrpSpPr>
+        <p:grpSpPr>
+          <a:xfrm>
+            <a:off x="762000" y="2381250"/>
+            <a:ext cx="4762500" cy="809700"/>
+            <a:chOff x="0" y="0"/>
+            <a:chExt cx="4762500" cy="809700"/>
+          </a:xfrm>
+        </p:grpSpPr>
+        <p:sp>
+          <p:nvSpPr>
+            <p:cNvPr id="288" name="Google Shape;288;p21"/>
+            <p:cNvSpPr/>
+            <p:nvPr/>
+          </p:nvSpPr>
+          <p:spPr>
+            <a:xfrm>
+              <a:off x="0" y="0"/>
+              <a:ext cx="4762500" cy="809700"/>
+            </a:xfrm>
+            <a:prstGeom prst="roundRect">
+              <a:avLst>
+                <a:gd name="adj" fmla="val 9411"/>
+              </a:avLst>
+            </a:prstGeom>
+            <a:solidFill>
+              <a:srgbClr val="EFF6FF"/>
+            </a:solidFill>
+            <a:ln w="9525" cap="flat" cmpd="sng">
+              <a:solidFill>
+                <a:srgbClr val="DBEAFE"/>
+              </a:solidFill>
+              <a:prstDash val="solid"/>
+              <a:round/>
+              <a:headEnd type="none" w="sm" len="sm"/>
+              <a:tailEnd type="none" w="sm" len="sm"/>
             </a:ln>
           </p:spPr>
           <p:txBody>
@@ -13220,284 +13307,49 @@
                 </a:spcAft>
                 <a:buNone/>
               </a:pPr>
-              <a:r>
-                <a:rPr lang="en-US" sz="1000" b="1">
-                  <a:solidFill>
-                    <a:srgbClr val="166534"/>
-                  </a:solidFill>
-                  <a:highlight>
-                    <a:srgbClr val="F0FDF4"/>
-                  </a:highlight>
-                  <a:latin typeface="Inter"/>
-                  <a:ea typeface="Inter"/>
-                  <a:cs typeface="Inter"/>
-                  <a:sym typeface="Inter"/>
-                </a:rPr>
-                <a:t>👨‍🍳 REAL-LIFE ANALOGY</a:t>
-              </a:r>
-              <a:endParaRPr sz="1000" b="1">
-                <a:solidFill>
-                  <a:srgbClr val="166534"/>
-                </a:solidFill>
-                <a:highlight>
-                  <a:srgbClr val="F0FDF4"/>
-                </a:highlight>
-                <a:latin typeface="Inter"/>
-                <a:ea typeface="Inter"/>
-                <a:cs typeface="Inter"/>
-                <a:sym typeface="Inter"/>
-              </a:endParaRPr>
-            </a:p>
-            <a:p>
-              <a:pPr marL="0" lvl="0" indent="0" algn="l" rtl="0">
-                <a:spcBef>
-                  <a:spcPts val="900"/>
-                </a:spcBef>
-                <a:spcAft>
-                  <a:spcPts val="0"/>
-                </a:spcAft>
-                <a:buNone/>
-              </a:pPr>
-              <a:r>
-                <a:rPr lang="en-US" sz="3200">
-                  <a:latin typeface="Inter"/>
-                  <a:ea typeface="Inter"/>
-                  <a:cs typeface="Inter"/>
-                  <a:sym typeface="Inter"/>
-                </a:rPr>
-                <a:t>👨‍🍳</a:t>
-              </a:r>
-              <a:endParaRPr>
-                <a:latin typeface="Inter"/>
-                <a:ea typeface="Inter"/>
-                <a:cs typeface="Inter"/>
-                <a:sym typeface="Inter"/>
-              </a:endParaRPr>
-            </a:p>
-            <a:p>
-              <a:pPr marL="0" lvl="0" indent="0" algn="l" rtl="0">
-                <a:spcBef>
-                  <a:spcPts val="0"/>
-                </a:spcBef>
-                <a:spcAft>
-                  <a:spcPts val="0"/>
-                </a:spcAft>
-                <a:buNone/>
-              </a:pPr>
-              <a:r>
-                <a:rPr lang="en-US" sz="1200" b="1">
-                  <a:solidFill>
-                    <a:srgbClr val="0F172A"/>
-                  </a:solidFill>
-                  <a:latin typeface="Inter"/>
-                  <a:ea typeface="Inter"/>
-                  <a:cs typeface="Inter"/>
-                  <a:sym typeface="Inter"/>
-                </a:rPr>
-                <a:t>Chatbot</a:t>
-              </a:r>
-              <a:r>
-                <a:rPr lang="en-US" sz="1200">
-                  <a:solidFill>
-                    <a:srgbClr val="334155"/>
-                  </a:solidFill>
-                  <a:latin typeface="Inter"/>
-                  <a:ea typeface="Inter"/>
-                  <a:cs typeface="Inter"/>
-                  <a:sym typeface="Inter"/>
-                </a:rPr>
-                <a:t> is like a </a:t>
-              </a:r>
-              <a:r>
-                <a:rPr lang="en-US" sz="1200" b="0" u="sng">
-                  <a:solidFill>
-                    <a:srgbClr val="94A3B8"/>
-                  </a:solidFill>
-                  <a:latin typeface="Inter SemiBold"/>
-                  <a:ea typeface="Inter SemiBold"/>
-                  <a:cs typeface="Inter SemiBold"/>
-                  <a:sym typeface="Inter SemiBold"/>
-                </a:rPr>
-                <a:t>vending machine</a:t>
-              </a:r>
-              <a:r>
-                <a:rPr lang="en-US" sz="1200">
-                  <a:solidFill>
-                    <a:srgbClr val="334155"/>
-                  </a:solidFill>
-                  <a:latin typeface="Inter"/>
-                  <a:ea typeface="Inter"/>
-                  <a:cs typeface="Inter"/>
-                  <a:sym typeface="Inter"/>
-                </a:rPr>
-                <a:t>: you ask for a specific item and immediately get it.</a:t>
-              </a:r>
-              <a:endParaRPr sz="1200">
-                <a:solidFill>
-                  <a:srgbClr val="334155"/>
-                </a:solidFill>
-                <a:latin typeface="Inter"/>
-                <a:ea typeface="Inter"/>
-                <a:cs typeface="Inter"/>
-                <a:sym typeface="Inter"/>
-              </a:endParaRPr>
-            </a:p>
-            <a:p>
-              <a:pPr marL="0" lvl="0" indent="0" algn="l" rtl="0">
-                <a:spcBef>
-                  <a:spcPts val="0"/>
-                </a:spcBef>
-                <a:spcAft>
-                  <a:spcPts val="0"/>
-                </a:spcAft>
-                <a:buNone/>
-              </a:pPr>
-              <a:r>
-                <a:rPr lang="en-US" sz="1200" b="1">
-                  <a:solidFill>
-                    <a:srgbClr val="166534"/>
-                  </a:solidFill>
-                  <a:latin typeface="Inter"/>
-                  <a:ea typeface="Inter"/>
-                  <a:cs typeface="Inter"/>
-                  <a:sym typeface="Inter"/>
-                </a:rPr>
-                <a:t>Agent</a:t>
-              </a:r>
-              <a:r>
-                <a:rPr lang="en-US" sz="1200">
-                  <a:solidFill>
-                    <a:srgbClr val="334155"/>
-                  </a:solidFill>
-                  <a:latin typeface="Inter"/>
-                  <a:ea typeface="Inter"/>
-                  <a:cs typeface="Inter"/>
-                  <a:sym typeface="Inter"/>
-                </a:rPr>
-                <a:t> is a </a:t>
-              </a:r>
-              <a:r>
-                <a:rPr lang="en-US" sz="1200" b="1">
-                  <a:solidFill>
-                    <a:srgbClr val="166534"/>
-                  </a:solidFill>
-                  <a:latin typeface="Inter"/>
-                  <a:ea typeface="Inter"/>
-                  <a:cs typeface="Inter"/>
-                  <a:sym typeface="Inter"/>
-                </a:rPr>
-                <a:t>Personal Chef</a:t>
-              </a:r>
-              <a:r>
-                <a:rPr lang="en-US" sz="1200">
-                  <a:solidFill>
-                    <a:srgbClr val="334155"/>
-                  </a:solidFill>
-                  <a:latin typeface="Inter"/>
-                  <a:ea typeface="Inter"/>
-                  <a:cs typeface="Inter"/>
-                  <a:sym typeface="Inter"/>
-                </a:rPr>
-                <a:t>: hears dietary goals, shops for ingredients, and cooks autonomously.</a:t>
-              </a:r>
-              <a:endParaRPr sz="1200">
-                <a:solidFill>
-                  <a:srgbClr val="334155"/>
-                </a:solidFill>
-                <a:latin typeface="Inter"/>
-                <a:ea typeface="Inter"/>
-                <a:cs typeface="Inter"/>
-                <a:sym typeface="Inter"/>
-              </a:endParaRPr>
-            </a:p>
-            <a:p>
-              <a:pPr marL="0" lvl="0" indent="0" algn="l" rtl="0">
-                <a:spcBef>
-                  <a:spcPts val="0"/>
-                </a:spcBef>
-                <a:spcAft>
-                  <a:spcPts val="0"/>
-                </a:spcAft>
-                <a:buNone/>
-              </a:pPr>
-              <a:r>
-                <a:rPr lang="en-US" sz="1100" b="1">
-                  <a:solidFill>
-                    <a:srgbClr val="065F46"/>
-                  </a:solidFill>
-                  <a:highlight>
-                    <a:srgbClr val="ECFDF5"/>
-                  </a:highlight>
-                  <a:latin typeface="Inter"/>
-                  <a:ea typeface="Inter"/>
-                  <a:cs typeface="Inter"/>
-                  <a:sym typeface="Inter"/>
-                </a:rPr>
-                <a:t>Mapping:</a:t>
-              </a:r>
-              <a:r>
-                <a:rPr lang="en-US" sz="1100" b="0">
-                  <a:solidFill>
-                    <a:srgbClr val="065F46"/>
-                  </a:solidFill>
-                  <a:highlight>
-                    <a:srgbClr val="ECFDF5"/>
-                  </a:highlight>
-                  <a:latin typeface="Inter Medium"/>
-                  <a:ea typeface="Inter Medium"/>
-                  <a:cs typeface="Inter Medium"/>
-                  <a:sym typeface="Inter Medium"/>
-                </a:rPr>
-                <a:t> The Chef (Agent) uses Tools (Knife/Stove) and Memory (Recipes) to reach the Goal (Dinner).</a:t>
-              </a:r>
-              <a:endParaRPr sz="1100" b="0">
-                <a:solidFill>
-                  <a:srgbClr val="065F46"/>
-                </a:solidFill>
-                <a:highlight>
-                  <a:srgbClr val="ECFDF5"/>
-                </a:highlight>
-                <a:latin typeface="Inter Medium"/>
-                <a:ea typeface="Inter Medium"/>
-                <a:cs typeface="Inter Medium"/>
-                <a:sym typeface="Inter Medium"/>
-              </a:endParaRPr>
+              <a:endParaRPr/>
             </a:p>
           </p:txBody>
         </p:sp>
-      </p:grpSp>
-      <p:grpSp>
-        <p:nvGrpSpPr>
-          <p:cNvPr id="91" name="Google Shape;91;p13"/>
-          <p:cNvGrpSpPr/>
-          <p:nvPr/>
-        </p:nvGrpSpPr>
-        <p:grpSpPr>
-          <a:xfrm>
-            <a:off x="762000" y="4762500"/>
-            <a:ext cx="10668000" cy="1143000"/>
-            <a:chOff x="0" y="0"/>
-            <a:chExt cx="10668000" cy="1143000"/>
-          </a:xfrm>
-        </p:grpSpPr>
         <p:sp>
           <p:nvSpPr>
-            <p:cNvPr id="92" name="Google Shape;92;p13"/>
+            <p:cNvPr id="289" name="Google Shape;289;p21"/>
             <p:cNvSpPr/>
             <p:nvPr/>
           </p:nvSpPr>
           <p:spPr>
             <a:xfrm>
               <a:off x="0" y="0"/>
-              <a:ext cx="10668000" cy="1143000"/>
+              <a:ext cx="76200" cy="809700"/>
             </a:xfrm>
-            <a:prstGeom prst="roundRect">
-              <a:avLst>
-                <a:gd name="adj" fmla="val 10000"/>
-              </a:avLst>
-            </a:prstGeom>
+            <a:custGeom>
+              <a:avLst/>
+              <a:gdLst/>
+              <a:ahLst/>
+              <a:cxnLst/>
+              <a:rect l="l" t="t" r="r" b="b"/>
+              <a:pathLst>
+                <a:path w="120000" h="120000" extrusionOk="0">
+                  <a:moveTo>
+                    <a:pt x="0" y="11294"/>
+                  </a:moveTo>
+                  <a:quadBezTo>
+                    <a:pt x="0" y="0"/>
+                    <a:pt x="120000" y="0"/>
+                  </a:quadBezTo>
+                  <a:lnTo>
+                    <a:pt x="120000" y="120000"/>
+                  </a:lnTo>
+                  <a:quadBezTo>
+                    <a:pt x="0" y="120000"/>
+                    <a:pt x="0" y="108706"/>
+                  </a:quadBezTo>
+                  <a:close/>
+                </a:path>
+              </a:pathLst>
+            </a:custGeom>
             <a:solidFill>
-              <a:srgbClr val="0F172A"/>
+              <a:srgbClr val="3B82F6"/>
             </a:solidFill>
             <a:ln>
               <a:noFill/>
@@ -13524,14 +13376,14 @@
         </p:sp>
         <p:sp>
           <p:nvSpPr>
-            <p:cNvPr id="93" name="Google Shape;93;p13"/>
+            <p:cNvPr id="290" name="Google Shape;290;p21"/>
             <p:cNvSpPr txBox="1"/>
             <p:nvPr/>
           </p:nvSpPr>
           <p:spPr>
             <a:xfrm>
-              <a:off x="228600" y="152400"/>
-              <a:ext cx="10210800" cy="838200"/>
+              <a:off x="228600" y="0"/>
+              <a:ext cx="4343400" cy="809700"/>
             </a:xfrm>
             <a:prstGeom prst="rect">
               <a:avLst/>
@@ -13557,36 +13409,110 @@
                 <a:buNone/>
               </a:pPr>
               <a:r>
-                <a:rPr lang="en-US" sz="1000" b="1">
+                <a:rPr lang="en-US" sz="1400" b="1">
                   <a:solidFill>
-                    <a:srgbClr val="94A3B8"/>
+                    <a:srgbClr val="1E3A8A"/>
                   </a:solidFill>
                   <a:latin typeface="Inter"/>
                   <a:ea typeface="Inter"/>
                   <a:cs typeface="Inter"/>
                   <a:sym typeface="Inter"/>
                 </a:rPr>
-                <a:t>🖥️ LIVE DEMO SCENARIO: AI Research Assistant</a:t>
+                <a:t>1. The Scout</a:t>
               </a:r>
+              <a:endParaRPr sz="1400" b="1">
+                <a:solidFill>
+                  <a:srgbClr val="1E3A8A"/>
+                </a:solidFill>
+                <a:latin typeface="Inter"/>
+                <a:ea typeface="Inter"/>
+                <a:cs typeface="Inter"/>
+                <a:sym typeface="Inter"/>
+              </a:endParaRPr>
+            </a:p>
+            <a:p>
+              <a:pPr marL="0" lvl="0" indent="0" algn="l" rtl="0">
+                <a:spcBef>
+                  <a:spcPts val="300"/>
+                </a:spcBef>
+                <a:spcAft>
+                  <a:spcPts val="0"/>
+                </a:spcAft>
+                <a:buNone/>
+              </a:pPr>
               <a:r>
-                <a:rPr lang="en-US" sz="900" b="1">
+                <a:rPr lang="en-US" sz="1100" b="0">
                   <a:solidFill>
-                    <a:srgbClr val="22C55E"/>
+                    <a:srgbClr val="1E40AF"/>
                   </a:solidFill>
                   <a:latin typeface="Inter"/>
                   <a:ea typeface="Inter"/>
                   <a:cs typeface="Inter"/>
                   <a:sym typeface="Inter"/>
                 </a:rPr>
-                <a:t>● ACTIVE LOOP</a:t>
+                <a:t>Searches the web and structured databases for raw information.</a:t>
               </a:r>
-              <a:endParaRPr>
-                <a:latin typeface="Courier New"/>
-                <a:ea typeface="Courier New"/>
-                <a:cs typeface="Courier New"/>
-                <a:sym typeface="Courier New"/>
+              <a:endParaRPr sz="1100" b="0">
+                <a:solidFill>
+                  <a:srgbClr val="1E40AF"/>
+                </a:solidFill>
+                <a:latin typeface="Inter"/>
+                <a:ea typeface="Inter"/>
+                <a:cs typeface="Inter"/>
+                <a:sym typeface="Inter"/>
               </a:endParaRPr>
             </a:p>
+          </p:txBody>
+        </p:sp>
+      </p:grpSp>
+      <p:grpSp>
+        <p:nvGrpSpPr>
+          <p:cNvPr id="291" name="Google Shape;291;p21"/>
+          <p:cNvGrpSpPr/>
+          <p:nvPr/>
+        </p:nvGrpSpPr>
+        <p:grpSpPr>
+          <a:xfrm>
+            <a:off x="762000" y="3333750"/>
+            <a:ext cx="4762500" cy="809700"/>
+            <a:chOff x="0" y="0"/>
+            <a:chExt cx="4762500" cy="809700"/>
+          </a:xfrm>
+        </p:grpSpPr>
+        <p:sp>
+          <p:nvSpPr>
+            <p:cNvPr id="292" name="Google Shape;292;p21"/>
+            <p:cNvSpPr/>
+            <p:nvPr/>
+          </p:nvSpPr>
+          <p:spPr>
+            <a:xfrm>
+              <a:off x="0" y="0"/>
+              <a:ext cx="4762500" cy="809700"/>
+            </a:xfrm>
+            <a:prstGeom prst="roundRect">
+              <a:avLst>
+                <a:gd name="adj" fmla="val 9411"/>
+              </a:avLst>
+            </a:prstGeom>
+            <a:solidFill>
+              <a:srgbClr val="F0FDF4"/>
+            </a:solidFill>
+            <a:ln w="9525" cap="flat" cmpd="sng">
+              <a:solidFill>
+                <a:srgbClr val="DCFCE7"/>
+              </a:solidFill>
+              <a:prstDash val="solid"/>
+              <a:round/>
+              <a:headEnd type="none" w="sm" len="sm"/>
+              <a:tailEnd type="none" w="sm" len="sm"/>
+            </a:ln>
+          </p:spPr>
+          <p:txBody>
+            <a:bodyPr spcFirstLastPara="1" wrap="square" lIns="0" tIns="0" rIns="0" bIns="0" anchor="ctr" anchorCtr="0">
+              <a:noAutofit/>
+            </a:bodyPr>
+            <a:lstStyle/>
             <a:p>
               <a:pPr marL="0" lvl="0" indent="0" algn="l" rtl="0">
                 <a:spcBef>
@@ -13597,112 +13523,49 @@
                 </a:spcAft>
                 <a:buNone/>
               </a:pPr>
-              <a:r>
-                <a:rPr lang="en-US" sz="900" b="1">
-                  <a:solidFill>
-                    <a:srgbClr val="0F172A"/>
-                  </a:solidFill>
-                  <a:highlight>
-                    <a:srgbClr val="E2E8F0"/>
-                  </a:highlight>
-                  <a:latin typeface="Inter"/>
-                  <a:ea typeface="Inter"/>
-                  <a:cs typeface="Inter"/>
-                  <a:sym typeface="Inter"/>
-                </a:rPr>
-                <a:t>INPUT</a:t>
-              </a:r>
-              <a:r>
-                <a:rPr lang="en-US" sz="1100" b="0">
-                  <a:solidFill>
-                    <a:srgbClr val="F1F5F9"/>
-                  </a:solidFill>
-                  <a:latin typeface="Inter SemiBold"/>
-                  <a:ea typeface="Inter SemiBold"/>
-                  <a:cs typeface="Inter SemiBold"/>
-                  <a:sym typeface="Inter SemiBold"/>
-                </a:rPr>
-                <a:t>"Find and summarize recent 6G wireless research papers."</a:t>
-              </a:r>
-              <a:r>
-                <a:rPr lang="en-US">
-                  <a:solidFill>
-                    <a:srgbClr val="64748B"/>
-                  </a:solidFill>
-                  <a:latin typeface="Inter"/>
-                  <a:ea typeface="Inter"/>
-                  <a:cs typeface="Inter"/>
-                  <a:sym typeface="Inter"/>
-                </a:rPr>
-                <a:t>➔</a:t>
-              </a:r>
-              <a:r>
-                <a:rPr lang="en-US" sz="900" b="1">
-                  <a:solidFill>
-                    <a:srgbClr val="0F172A"/>
-                  </a:solidFill>
-                  <a:highlight>
-                    <a:srgbClr val="F59E0B"/>
-                  </a:highlight>
-                  <a:latin typeface="Inter"/>
-                  <a:ea typeface="Inter"/>
-                  <a:cs typeface="Inter"/>
-                  <a:sym typeface="Inter"/>
-                </a:rPr>
-                <a:t>AGENT ACTION</a:t>
-              </a:r>
-              <a:r>
-                <a:rPr lang="en-US" sz="1100">
-                  <a:solidFill>
-                    <a:srgbClr val="FCD34D"/>
-                  </a:solidFill>
-                  <a:latin typeface="Inter"/>
-                  <a:ea typeface="Inter"/>
-                  <a:cs typeface="Inter"/>
-                  <a:sym typeface="Inter"/>
-                </a:rPr>
-                <a:t>Searching ArXiv... Found 12 results... Summarizing...</a:t>
-              </a:r>
-              <a:endParaRPr>
-                <a:latin typeface="Courier New"/>
-                <a:ea typeface="Courier New"/>
-                <a:cs typeface="Courier New"/>
-                <a:sym typeface="Courier New"/>
-              </a:endParaRPr>
+              <a:endParaRPr/>
             </a:p>
           </p:txBody>
         </p:sp>
-      </p:grpSp>
-      <p:grpSp>
-        <p:nvGrpSpPr>
-          <p:cNvPr id="94" name="Google Shape;94;p13"/>
-          <p:cNvGrpSpPr/>
-          <p:nvPr/>
-        </p:nvGrpSpPr>
-        <p:grpSpPr>
-          <a:xfrm>
-            <a:off x="0" y="6191250"/>
-            <a:ext cx="12192000" cy="666900"/>
-            <a:chOff x="0" y="0"/>
-            <a:chExt cx="12192000" cy="666900"/>
-          </a:xfrm>
-        </p:grpSpPr>
         <p:sp>
           <p:nvSpPr>
-            <p:cNvPr id="95" name="Google Shape;95;p13"/>
+            <p:cNvPr id="293" name="Google Shape;293;p21"/>
             <p:cNvSpPr/>
             <p:nvPr/>
           </p:nvSpPr>
           <p:spPr>
             <a:xfrm>
               <a:off x="0" y="0"/>
-              <a:ext cx="12192000" cy="666900"/>
+              <a:ext cx="76200" cy="809700"/>
             </a:xfrm>
-            <a:prstGeom prst="rect">
+            <a:custGeom>
               <a:avLst/>
-            </a:prstGeom>
+              <a:gdLst/>
+              <a:ahLst/>
+              <a:cxnLst/>
+              <a:rect l="l" t="t" r="r" b="b"/>
+              <a:pathLst>
+                <a:path w="120000" h="120000" extrusionOk="0">
+                  <a:moveTo>
+                    <a:pt x="0" y="11294"/>
+                  </a:moveTo>
+                  <a:quadBezTo>
+                    <a:pt x="0" y="0"/>
+                    <a:pt x="120000" y="0"/>
+                  </a:quadBezTo>
+                  <a:lnTo>
+                    <a:pt x="120000" y="120000"/>
+                  </a:lnTo>
+                  <a:quadBezTo>
+                    <a:pt x="0" y="120000"/>
+                    <a:pt x="0" y="108706"/>
+                  </a:quadBezTo>
+                  <a:close/>
+                </a:path>
+              </a:pathLst>
+            </a:custGeom>
             <a:solidFill>
-              <a:srgbClr val="020617"/>
+              <a:srgbClr val="22C55E"/>
             </a:solidFill>
             <a:ln>
               <a:noFill/>
@@ -13729,14 +13592,14 @@
         </p:sp>
         <p:sp>
           <p:nvSpPr>
-            <p:cNvPr id="96" name="Google Shape;96;p13"/>
+            <p:cNvPr id="294" name="Google Shape;294;p21"/>
             <p:cNvSpPr txBox="1"/>
             <p:nvPr/>
           </p:nvSpPr>
           <p:spPr>
             <a:xfrm>
-              <a:off x="762000" y="0"/>
-              <a:ext cx="10668000" cy="666900"/>
+              <a:off x="228600" y="0"/>
+              <a:ext cx="4343400" cy="809700"/>
             </a:xfrm>
             <a:prstGeom prst="rect">
               <a:avLst/>
@@ -13752,7 +13615,7 @@
             </a:bodyPr>
             <a:lstStyle/>
             <a:p>
-              <a:pPr marL="0" lvl="0" indent="0" algn="ctr" rtl="0">
+              <a:pPr marL="0" lvl="0" indent="0" algn="l" rtl="0">
                 <a:spcBef>
                   <a:spcPts val="0"/>
                 </a:spcBef>
@@ -13762,68 +13625,52 @@
                 <a:buNone/>
               </a:pPr>
               <a:r>
-                <a:rPr lang="en-US" sz="1350" b="0">
+                <a:rPr lang="en-US" sz="1400" b="1">
                   <a:solidFill>
-                    <a:srgbClr val="FFFFFF"/>
+                    <a:srgbClr val="14532D"/>
                   </a:solidFill>
                   <a:latin typeface="Inter"/>
                   <a:ea typeface="Inter"/>
                   <a:cs typeface="Inter"/>
                   <a:sym typeface="Inter"/>
                 </a:rPr>
-                <a:t>Agents don't just talk; they </a:t>
+                <a:t>2. The Analyst</a:t>
               </a:r>
+              <a:endParaRPr sz="1400" b="1">
+                <a:solidFill>
+                  <a:srgbClr val="14532D"/>
+                </a:solidFill>
+                <a:latin typeface="Inter"/>
+                <a:ea typeface="Inter"/>
+                <a:cs typeface="Inter"/>
+                <a:sym typeface="Inter"/>
+              </a:endParaRPr>
+            </a:p>
+            <a:p>
+              <a:pPr marL="0" lvl="0" indent="0" algn="l" rtl="0">
+                <a:spcBef>
+                  <a:spcPts val="300"/>
+                </a:spcBef>
+                <a:spcAft>
+                  <a:spcPts val="0"/>
+                </a:spcAft>
+                <a:buNone/>
+              </a:pPr>
               <a:r>
-                <a:rPr lang="en-US" sz="1350" b="1" u="sng">
+                <a:rPr lang="en-US" sz="1100" b="0">
                   <a:solidFill>
-                    <a:srgbClr val="38BDF8"/>
+                    <a:srgbClr val="166534"/>
                   </a:solidFill>
                   <a:latin typeface="Inter"/>
                   <a:ea typeface="Inter"/>
                   <a:cs typeface="Inter"/>
                   <a:sym typeface="Inter"/>
                 </a:rPr>
-                <a:t>reason</a:t>
+                <a:t>Reads content thoroughly, extracts insights, and fact-checks data.</a:t>
               </a:r>
-              <a:r>
-                <a:rPr lang="en-US" sz="1350" b="0">
-                  <a:solidFill>
-                    <a:srgbClr val="FFFFFF"/>
-                  </a:solidFill>
-                  <a:latin typeface="Inter"/>
-                  <a:ea typeface="Inter"/>
-                  <a:cs typeface="Inter"/>
-                  <a:sym typeface="Inter"/>
-                </a:rPr>
-                <a:t> and </a:t>
-              </a:r>
-              <a:r>
-                <a:rPr lang="en-US" sz="1350" b="1" u="sng">
-                  <a:solidFill>
-                    <a:srgbClr val="38BDF8"/>
-                  </a:solidFill>
-                  <a:latin typeface="Inter"/>
-                  <a:ea typeface="Inter"/>
-                  <a:cs typeface="Inter"/>
-                  <a:sym typeface="Inter"/>
-                </a:rPr>
-                <a:t>act</a:t>
-              </a:r>
-              <a:r>
-                <a:rPr lang="en-US" sz="1350" b="0">
-                  <a:solidFill>
-                    <a:srgbClr val="FFFFFF"/>
-                  </a:solidFill>
-                  <a:latin typeface="Inter"/>
-                  <a:ea typeface="Inter"/>
-                  <a:cs typeface="Inter"/>
-                  <a:sym typeface="Inter"/>
-                </a:rPr>
-                <a:t> through iterative feedback loops.</a:t>
-              </a:r>
-              <a:endParaRPr sz="1350">
+              <a:endParaRPr sz="1100" b="0">
                 <a:solidFill>
-                  <a:srgbClr val="FFFFFF"/>
+                  <a:srgbClr val="166534"/>
                 </a:solidFill>
                 <a:latin typeface="Inter"/>
                 <a:ea typeface="Inter"/>
@@ -13834,6 +13681,584 @@
           </p:txBody>
         </p:sp>
       </p:grpSp>
+      <p:grpSp>
+        <p:nvGrpSpPr>
+          <p:cNvPr id="295" name="Google Shape;295;p21"/>
+          <p:cNvGrpSpPr/>
+          <p:nvPr/>
+        </p:nvGrpSpPr>
+        <p:grpSpPr>
+          <a:xfrm>
+            <a:off x="762000" y="4286250"/>
+            <a:ext cx="4762500" cy="809700"/>
+            <a:chOff x="0" y="0"/>
+            <a:chExt cx="4762500" cy="809700"/>
+          </a:xfrm>
+        </p:grpSpPr>
+        <p:sp>
+          <p:nvSpPr>
+            <p:cNvPr id="296" name="Google Shape;296;p21"/>
+            <p:cNvSpPr/>
+            <p:nvPr/>
+          </p:nvSpPr>
+          <p:spPr>
+            <a:xfrm>
+              <a:off x="0" y="0"/>
+              <a:ext cx="4762500" cy="809700"/>
+            </a:xfrm>
+            <a:prstGeom prst="roundRect">
+              <a:avLst>
+                <a:gd name="adj" fmla="val 9411"/>
+              </a:avLst>
+            </a:prstGeom>
+            <a:solidFill>
+              <a:srgbClr val="FEF9C3"/>
+            </a:solidFill>
+            <a:ln w="9525" cap="flat" cmpd="sng">
+              <a:solidFill>
+                <a:srgbClr val="FEF08A"/>
+              </a:solidFill>
+              <a:prstDash val="solid"/>
+              <a:round/>
+              <a:headEnd type="none" w="sm" len="sm"/>
+              <a:tailEnd type="none" w="sm" len="sm"/>
+            </a:ln>
+          </p:spPr>
+          <p:txBody>
+            <a:bodyPr spcFirstLastPara="1" wrap="square" lIns="0" tIns="0" rIns="0" bIns="0" anchor="ctr" anchorCtr="0">
+              <a:noAutofit/>
+            </a:bodyPr>
+            <a:lstStyle/>
+            <a:p>
+              <a:pPr marL="0" lvl="0" indent="0" algn="l" rtl="0">
+                <a:spcBef>
+                  <a:spcPts val="0"/>
+                </a:spcBef>
+                <a:spcAft>
+                  <a:spcPts val="0"/>
+                </a:spcAft>
+                <a:buNone/>
+              </a:pPr>
+              <a:endParaRPr/>
+            </a:p>
+          </p:txBody>
+        </p:sp>
+        <p:sp>
+          <p:nvSpPr>
+            <p:cNvPr id="297" name="Google Shape;297;p21"/>
+            <p:cNvSpPr/>
+            <p:nvPr/>
+          </p:nvSpPr>
+          <p:spPr>
+            <a:xfrm>
+              <a:off x="0" y="0"/>
+              <a:ext cx="76200" cy="809700"/>
+            </a:xfrm>
+            <a:custGeom>
+              <a:avLst/>
+              <a:gdLst/>
+              <a:ahLst/>
+              <a:cxnLst/>
+              <a:rect l="l" t="t" r="r" b="b"/>
+              <a:pathLst>
+                <a:path w="120000" h="120000" extrusionOk="0">
+                  <a:moveTo>
+                    <a:pt x="0" y="11294"/>
+                  </a:moveTo>
+                  <a:quadBezTo>
+                    <a:pt x="0" y="0"/>
+                    <a:pt x="120000" y="0"/>
+                  </a:quadBezTo>
+                  <a:lnTo>
+                    <a:pt x="120000" y="120000"/>
+                  </a:lnTo>
+                  <a:quadBezTo>
+                    <a:pt x="0" y="120000"/>
+                    <a:pt x="0" y="108706"/>
+                  </a:quadBezTo>
+                  <a:close/>
+                </a:path>
+              </a:pathLst>
+            </a:custGeom>
+            <a:solidFill>
+              <a:srgbClr val="EAB308"/>
+            </a:solidFill>
+            <a:ln>
+              <a:noFill/>
+            </a:ln>
+          </p:spPr>
+          <p:txBody>
+            <a:bodyPr spcFirstLastPara="1" wrap="square" lIns="0" tIns="0" rIns="0" bIns="0" anchor="ctr" anchorCtr="0">
+              <a:noAutofit/>
+            </a:bodyPr>
+            <a:lstStyle/>
+            <a:p>
+              <a:pPr marL="0" lvl="0" indent="0" algn="l" rtl="0">
+                <a:spcBef>
+                  <a:spcPts val="0"/>
+                </a:spcBef>
+                <a:spcAft>
+                  <a:spcPts val="0"/>
+                </a:spcAft>
+                <a:buNone/>
+              </a:pPr>
+              <a:endParaRPr/>
+            </a:p>
+          </p:txBody>
+        </p:sp>
+        <p:sp>
+          <p:nvSpPr>
+            <p:cNvPr id="298" name="Google Shape;298;p21"/>
+            <p:cNvSpPr txBox="1"/>
+            <p:nvPr/>
+          </p:nvSpPr>
+          <p:spPr>
+            <a:xfrm>
+              <a:off x="228600" y="0"/>
+              <a:ext cx="4343400" cy="809700"/>
+            </a:xfrm>
+            <a:prstGeom prst="rect">
+              <a:avLst/>
+            </a:prstGeom>
+            <a:noFill/>
+            <a:ln>
+              <a:noFill/>
+            </a:ln>
+          </p:spPr>
+          <p:txBody>
+            <a:bodyPr spcFirstLastPara="1" wrap="square" lIns="0" tIns="0" rIns="0" bIns="0" anchor="ctr" anchorCtr="0">
+              <a:noAutofit/>
+            </a:bodyPr>
+            <a:lstStyle/>
+            <a:p>
+              <a:pPr marL="0" lvl="0" indent="0" algn="l" rtl="0">
+                <a:spcBef>
+                  <a:spcPts val="0"/>
+                </a:spcBef>
+                <a:spcAft>
+                  <a:spcPts val="0"/>
+                </a:spcAft>
+                <a:buNone/>
+              </a:pPr>
+              <a:r>
+                <a:rPr lang="en-US" sz="1400" b="1">
+                  <a:solidFill>
+                    <a:srgbClr val="713F12"/>
+                  </a:solidFill>
+                  <a:latin typeface="Inter"/>
+                  <a:ea typeface="Inter"/>
+                  <a:cs typeface="Inter"/>
+                  <a:sym typeface="Inter"/>
+                </a:rPr>
+                <a:t>3. The Editor</a:t>
+              </a:r>
+              <a:endParaRPr sz="1400" b="1">
+                <a:solidFill>
+                  <a:srgbClr val="713F12"/>
+                </a:solidFill>
+                <a:latin typeface="Inter"/>
+                <a:ea typeface="Inter"/>
+                <a:cs typeface="Inter"/>
+                <a:sym typeface="Inter"/>
+              </a:endParaRPr>
+            </a:p>
+            <a:p>
+              <a:pPr marL="0" lvl="0" indent="0" algn="l" rtl="0">
+                <a:spcBef>
+                  <a:spcPts val="300"/>
+                </a:spcBef>
+                <a:spcAft>
+                  <a:spcPts val="0"/>
+                </a:spcAft>
+                <a:buNone/>
+              </a:pPr>
+              <a:r>
+                <a:rPr lang="en-US" sz="1100" b="0">
+                  <a:solidFill>
+                    <a:srgbClr val="854D0E"/>
+                  </a:solidFill>
+                  <a:latin typeface="Inter"/>
+                  <a:ea typeface="Inter"/>
+                  <a:cs typeface="Inter"/>
+                  <a:sym typeface="Inter"/>
+                </a:rPr>
+                <a:t>Synthesizes perspectives and drafts the finalized comprehensive report.</a:t>
+              </a:r>
+              <a:endParaRPr sz="1100" b="0">
+                <a:solidFill>
+                  <a:srgbClr val="854D0E"/>
+                </a:solidFill>
+                <a:latin typeface="Inter"/>
+                <a:ea typeface="Inter"/>
+                <a:cs typeface="Inter"/>
+                <a:sym typeface="Inter"/>
+              </a:endParaRPr>
+            </a:p>
+          </p:txBody>
+        </p:sp>
+      </p:grpSp>
+      <p:sp>
+        <p:nvSpPr>
+          <p:cNvPr id="299" name="Google Shape;299;p21"/>
+          <p:cNvSpPr/>
+          <p:nvPr/>
+        </p:nvSpPr>
+        <p:spPr>
+          <a:xfrm>
+            <a:off x="0" y="6286500"/>
+            <a:ext cx="12192000" cy="571500"/>
+          </a:xfrm>
+          <a:prstGeom prst="rect">
+            <a:avLst/>
+          </a:prstGeom>
+          <a:solidFill>
+            <a:srgbClr val="0F172A"/>
+          </a:solidFill>
+          <a:ln>
+            <a:noFill/>
+          </a:ln>
+        </p:spPr>
+        <p:txBody>
+          <a:bodyPr spcFirstLastPara="1" wrap="square" lIns="91425" tIns="45700" rIns="91425" bIns="45700" anchor="ctr" anchorCtr="0">
+            <a:noAutofit/>
+          </a:bodyPr>
+          <a:lstStyle/>
+          <a:p>
+            <a:pPr marL="0" marR="0" lvl="0" indent="0" algn="ctr" rtl="0">
+              <a:spcBef>
+                <a:spcPts val="0"/>
+              </a:spcBef>
+              <a:spcAft>
+                <a:spcPts val="0"/>
+              </a:spcAft>
+              <a:buNone/>
+            </a:pPr>
+            <a:endParaRPr sz="1800" b="0" i="0" u="none" strike="noStrike" cap="none">
+              <a:solidFill>
+                <a:schemeClr val="dk1"/>
+              </a:solidFill>
+              <a:latin typeface="Calibri"/>
+              <a:ea typeface="Calibri"/>
+              <a:cs typeface="Calibri"/>
+              <a:sym typeface="Calibri"/>
+            </a:endParaRPr>
+          </a:p>
+        </p:txBody>
+      </p:sp>
+      <p:sp>
+        <p:nvSpPr>
+          <p:cNvPr id="300" name="Google Shape;300;p21"/>
+          <p:cNvSpPr txBox="1"/>
+          <p:nvPr/>
+        </p:nvSpPr>
+        <p:spPr>
+          <a:xfrm>
+            <a:off x="381000" y="6286500"/>
+            <a:ext cx="11430000" cy="184800"/>
+          </a:xfrm>
+          <a:prstGeom prst="rect">
+            <a:avLst/>
+          </a:prstGeom>
+          <a:noFill/>
+          <a:ln>
+            <a:noFill/>
+          </a:ln>
+        </p:spPr>
+        <p:txBody>
+          <a:bodyPr spcFirstLastPara="1" wrap="square" lIns="0" tIns="0" rIns="0" bIns="0" anchor="ctr" anchorCtr="0">
+            <a:spAutoFit/>
+          </a:bodyPr>
+          <a:lstStyle/>
+          <a:p>
+            <a:pPr marL="0" marR="0" lvl="0" indent="0" algn="l" rtl="0">
+              <a:spcBef>
+                <a:spcPts val="0"/>
+              </a:spcBef>
+              <a:spcAft>
+                <a:spcPts val="0"/>
+              </a:spcAft>
+              <a:buNone/>
+            </a:pPr>
+            <a:r>
+              <a:rPr lang="en-US" sz="1200" b="0" i="0" u="none" strike="noStrike" cap="none">
+                <a:solidFill>
+                  <a:srgbClr val="FFFFFF"/>
+                </a:solidFill>
+                <a:latin typeface="Inter"/>
+                <a:ea typeface="Inter"/>
+                <a:cs typeface="Inter"/>
+                <a:sym typeface="Inter"/>
+              </a:rPr>
+              <a:t>Complexity is managed by </a:t>
+            </a:r>
+            <a:r>
+              <a:rPr lang="en-US" sz="1200" b="1" i="0" u="none" strike="noStrike" cap="none">
+                <a:solidFill>
+                  <a:srgbClr val="FFFFFF"/>
+                </a:solidFill>
+                <a:latin typeface="Inter"/>
+                <a:ea typeface="Inter"/>
+                <a:cs typeface="Inter"/>
+                <a:sym typeface="Inter"/>
+              </a:rPr>
+              <a:t>Delegation</a:t>
+            </a:r>
+            <a:r>
+              <a:rPr lang="en-US" sz="1200" b="0" i="0" u="none" strike="noStrike" cap="none">
+                <a:solidFill>
+                  <a:srgbClr val="FFFFFF"/>
+                </a:solidFill>
+                <a:latin typeface="Inter"/>
+                <a:ea typeface="Inter"/>
+                <a:cs typeface="Inter"/>
+                <a:sym typeface="Inter"/>
+              </a:rPr>
+              <a:t> between specialized agents.</a:t>
+            </a:r>
+            <a:endParaRPr/>
+          </a:p>
+        </p:txBody>
+      </p:sp>
+      <p:sp>
+        <p:nvSpPr>
+          <p:cNvPr id="301" name="Google Shape;301;p21"/>
+          <p:cNvSpPr txBox="1"/>
+          <p:nvPr/>
+        </p:nvSpPr>
+        <p:spPr>
+          <a:xfrm>
+            <a:off x="8953500" y="266700"/>
+            <a:ext cx="2857500" cy="184800"/>
+          </a:xfrm>
+          <a:prstGeom prst="rect">
+            <a:avLst/>
+          </a:prstGeom>
+          <a:noFill/>
+          <a:ln>
+            <a:noFill/>
+          </a:ln>
+        </p:spPr>
+        <p:txBody>
+          <a:bodyPr spcFirstLastPara="1" wrap="square" lIns="0" tIns="0" rIns="0" bIns="0" anchor="t" anchorCtr="0">
+            <a:spAutoFit/>
+          </a:bodyPr>
+          <a:lstStyle/>
+          <a:p>
+            <a:pPr marL="0" marR="0" lvl="0" indent="0" algn="r" rtl="0">
+              <a:spcBef>
+                <a:spcPts val="0"/>
+              </a:spcBef>
+              <a:spcAft>
+                <a:spcPts val="0"/>
+              </a:spcAft>
+              <a:buNone/>
+            </a:pPr>
+            <a:r>
+              <a:rPr lang="en-US" sz="1200" b="0" i="0" u="none" strike="noStrike" cap="none">
+                <a:solidFill>
+                  <a:srgbClr val="94A3B8"/>
+                </a:solidFill>
+                <a:latin typeface="Inter Medium"/>
+                <a:ea typeface="Inter Medium"/>
+                <a:cs typeface="Inter Medium"/>
+                <a:sym typeface="Inter Medium"/>
+              </a:rPr>
+              <a:t>Slide 09</a:t>
+            </a:r>
+            <a:endParaRPr/>
+          </a:p>
+        </p:txBody>
+      </p:sp>
+      <p:sp>
+        <p:nvSpPr>
+          <p:cNvPr id="302" name="Google Shape;302;p21"/>
+          <p:cNvSpPr txBox="1"/>
+          <p:nvPr/>
+        </p:nvSpPr>
+        <p:spPr>
+          <a:xfrm>
+            <a:off x="762000" y="1104900"/>
+            <a:ext cx="11201400" cy="461700"/>
+          </a:xfrm>
+          <a:prstGeom prst="rect">
+            <a:avLst/>
+          </a:prstGeom>
+          <a:noFill/>
+          <a:ln>
+            <a:noFill/>
+          </a:ln>
+        </p:spPr>
+        <p:txBody>
+          <a:bodyPr spcFirstLastPara="1" wrap="square" lIns="0" tIns="0" rIns="0" bIns="0" anchor="t" anchorCtr="0">
+            <a:spAutoFit/>
+          </a:bodyPr>
+          <a:lstStyle/>
+          <a:p>
+            <a:pPr marL="0" marR="0" lvl="0" indent="0" algn="l" rtl="0">
+              <a:spcBef>
+                <a:spcPts val="0"/>
+              </a:spcBef>
+              <a:spcAft>
+                <a:spcPts val="0"/>
+              </a:spcAft>
+              <a:buNone/>
+            </a:pPr>
+            <a:r>
+              <a:rPr lang="en-US" sz="3000" b="1" i="0" u="none" strike="noStrike" cap="none">
+                <a:solidFill>
+                  <a:srgbClr val="0F172A"/>
+                </a:solidFill>
+                <a:latin typeface="DM Sans"/>
+                <a:ea typeface="DM Sans"/>
+                <a:cs typeface="DM Sans"/>
+                <a:sym typeface="DM Sans"/>
+              </a:rPr>
+              <a:t>Agent Workflow Architecture</a:t>
+            </a:r>
+            <a:endParaRPr/>
+          </a:p>
+        </p:txBody>
+      </p:sp>
+      <p:sp>
+        <p:nvSpPr>
+          <p:cNvPr id="303" name="Google Shape;303;p21"/>
+          <p:cNvSpPr/>
+          <p:nvPr/>
+        </p:nvSpPr>
+        <p:spPr>
+          <a:xfrm>
+            <a:off x="381000" y="266700"/>
+            <a:ext cx="381000" cy="190500"/>
+          </a:xfrm>
+          <a:prstGeom prst="roundRect">
+            <a:avLst>
+              <a:gd name="adj" fmla="val 50000"/>
+            </a:avLst>
+          </a:prstGeom>
+          <a:noFill/>
+          <a:ln w="19050" cap="flat" cmpd="sng">
+            <a:solidFill>
+              <a:srgbClr val="0F172A"/>
+            </a:solidFill>
+            <a:prstDash val="solid"/>
+            <a:round/>
+            <a:headEnd type="none" w="sm" len="sm"/>
+            <a:tailEnd type="none" w="sm" len="sm"/>
+          </a:ln>
+        </p:spPr>
+        <p:txBody>
+          <a:bodyPr spcFirstLastPara="1" wrap="square" lIns="91425" tIns="45700" rIns="91425" bIns="45700" anchor="ctr" anchorCtr="0">
+            <a:noAutofit/>
+          </a:bodyPr>
+          <a:lstStyle/>
+          <a:p>
+            <a:pPr marL="0" marR="0" lvl="0" indent="0" algn="ctr" rtl="0">
+              <a:spcBef>
+                <a:spcPts val="0"/>
+              </a:spcBef>
+              <a:spcAft>
+                <a:spcPts val="0"/>
+              </a:spcAft>
+              <a:buNone/>
+            </a:pPr>
+            <a:endParaRPr sz="1800" b="0" i="0" u="none" strike="noStrike" cap="none">
+              <a:solidFill>
+                <a:schemeClr val="dk1"/>
+              </a:solidFill>
+              <a:latin typeface="Calibri"/>
+              <a:ea typeface="Calibri"/>
+              <a:cs typeface="Calibri"/>
+              <a:sym typeface="Calibri"/>
+            </a:endParaRPr>
+          </a:p>
+        </p:txBody>
+      </p:sp>
+      <p:sp>
+        <p:nvSpPr>
+          <p:cNvPr id="304" name="Google Shape;304;p21"/>
+          <p:cNvSpPr txBox="1"/>
+          <p:nvPr/>
+        </p:nvSpPr>
+        <p:spPr>
+          <a:xfrm>
+            <a:off x="762000" y="1809750"/>
+            <a:ext cx="4762500" cy="461700"/>
+          </a:xfrm>
+          <a:prstGeom prst="rect">
+            <a:avLst/>
+          </a:prstGeom>
+          <a:solidFill>
+            <a:srgbClr val="000000">
+              <a:alpha val="0"/>
+            </a:srgbClr>
+          </a:solidFill>
+          <a:ln>
+            <a:noFill/>
+          </a:ln>
+        </p:spPr>
+        <p:txBody>
+          <a:bodyPr spcFirstLastPara="1" wrap="square" lIns="0" tIns="0" rIns="0" bIns="0" anchor="ctr" anchorCtr="0">
+            <a:spAutoFit/>
+          </a:bodyPr>
+          <a:lstStyle/>
+          <a:p>
+            <a:pPr marL="0" lvl="0" indent="0" algn="l" rtl="0">
+              <a:spcBef>
+                <a:spcPts val="0"/>
+              </a:spcBef>
+              <a:spcAft>
+                <a:spcPts val="0"/>
+              </a:spcAft>
+              <a:buNone/>
+            </a:pPr>
+            <a:r>
+              <a:rPr lang="en-US" sz="1500" b="0">
+                <a:solidFill>
+                  <a:srgbClr val="334155"/>
+                </a:solidFill>
+                <a:latin typeface="Inter Medium"/>
+                <a:ea typeface="Inter Medium"/>
+                <a:cs typeface="Inter Medium"/>
+                <a:sym typeface="Inter Medium"/>
+              </a:rPr>
+              <a:t>The Research Assistant operates as a </a:t>
+            </a:r>
+            <a:r>
+              <a:rPr lang="en-US" sz="1500" b="1">
+                <a:solidFill>
+                  <a:srgbClr val="0F172A"/>
+                </a:solidFill>
+                <a:latin typeface="Inter"/>
+                <a:ea typeface="Inter"/>
+                <a:cs typeface="Inter"/>
+                <a:sym typeface="Inter"/>
+              </a:rPr>
+              <a:t>Multi-Agent Team</a:t>
+            </a:r>
+            <a:r>
+              <a:rPr lang="en-US" sz="1500" b="0">
+                <a:solidFill>
+                  <a:srgbClr val="334155"/>
+                </a:solidFill>
+                <a:latin typeface="Inter Medium"/>
+                <a:ea typeface="Inter Medium"/>
+                <a:cs typeface="Inter Medium"/>
+                <a:sym typeface="Inter Medium"/>
+              </a:rPr>
+              <a:t>:</a:t>
+            </a:r>
+            <a:endParaRPr sz="1500" b="0">
+              <a:solidFill>
+                <a:srgbClr val="334155"/>
+              </a:solidFill>
+              <a:latin typeface="Inter Medium"/>
+              <a:ea typeface="Inter Medium"/>
+              <a:cs typeface="Inter Medium"/>
+              <a:sym typeface="Inter Medium"/>
+            </a:endParaRPr>
+          </a:p>
+        </p:txBody>
+      </p:sp>
     </p:spTree>
   </p:cSld>
   <p:clrMapOvr>
@@ -13842,7 +14267,7 @@
 </p:sld>
 </file>
 
-<file path=ppt/slides/slide10.xml><?xml version="1.0" encoding="utf-8"?>
+<file path=ppt/slides/slide11.xml><?xml version="1.0" encoding="utf-8"?>
 <p:sld xmlns:a="http://schemas.openxmlformats.org/drawingml/2006/main" xmlns:r="http://schemas.openxmlformats.org/officeDocument/2006/relationships" xmlns:p="http://schemas.openxmlformats.org/presentationml/2006/main">
   <p:cSld>
     <p:bg>
@@ -15098,7 +15523,7 @@
 </p:sld>
 </file>
 
-<file path=ppt/slides/slide11.xml><?xml version="1.0" encoding="utf-8"?>
+<file path=ppt/slides/slide12.xml><?xml version="1.0" encoding="utf-8"?>
 <p:sld xmlns:a="http://schemas.openxmlformats.org/drawingml/2006/main" xmlns:r="http://schemas.openxmlformats.org/officeDocument/2006/relationships" xmlns:p="http://schemas.openxmlformats.org/presentationml/2006/main">
   <p:cSld>
     <p:bg>
@@ -16548,7 +16973,7 @@
 </p:sld>
 </file>
 
-<file path=ppt/slides/slide12.xml><?xml version="1.0" encoding="utf-8"?>
+<file path=ppt/slides/slide13.xml><?xml version="1.0" encoding="utf-8"?>
 <p:sld xmlns:a="http://schemas.openxmlformats.org/drawingml/2006/main" xmlns:r="http://schemas.openxmlformats.org/officeDocument/2006/relationships" xmlns:p="http://schemas.openxmlformats.org/presentationml/2006/main">
   <p:cSld>
     <p:bg>
@@ -17631,7 +18056,7 @@
 </p:sld>
 </file>
 
-<file path=ppt/slides/slide13.xml><?xml version="1.0" encoding="utf-8"?>
+<file path=ppt/slides/slide14.xml><?xml version="1.0" encoding="utf-8"?>
 <p:sld xmlns:a="http://schemas.openxmlformats.org/drawingml/2006/main" xmlns:r="http://schemas.openxmlformats.org/officeDocument/2006/relationships" xmlns:p="http://schemas.openxmlformats.org/presentationml/2006/main">
   <p:cSld>
     <p:bg>
@@ -18843,7 +19268,7 @@
 </p:sld>
 </file>
 
-<file path=ppt/slides/slide14.xml><?xml version="1.0" encoding="utf-8"?>
+<file path=ppt/slides/slide15.xml><?xml version="1.0" encoding="utf-8"?>
 <p:sld xmlns:a="http://schemas.openxmlformats.org/drawingml/2006/main" xmlns:r="http://schemas.openxmlformats.org/officeDocument/2006/relationships" xmlns:p="http://schemas.openxmlformats.org/presentationml/2006/main">
   <p:cSld>
     <p:bg>
@@ -20548,7 +20973,7 @@
 </p:sld>
 </file>
 
-<file path=ppt/slides/slide15.xml><?xml version="1.0" encoding="utf-8"?>
+<file path=ppt/slides/slide16.xml><?xml version="1.0" encoding="utf-8"?>
 <p:sld xmlns:a="http://schemas.openxmlformats.org/drawingml/2006/main" xmlns:r="http://schemas.openxmlformats.org/officeDocument/2006/relationships" xmlns:p="http://schemas.openxmlformats.org/presentationml/2006/main">
   <p:cSld>
     <p:bg>
@@ -21963,7 +22388,7 @@
 </p:sld>
 </file>
 
-<file path=ppt/slides/slide16.xml><?xml version="1.0" encoding="utf-8"?>
+<file path=ppt/slides/slide17.xml><?xml version="1.0" encoding="utf-8"?>
 <p:sld xmlns:a="http://schemas.openxmlformats.org/drawingml/2006/main" xmlns:r="http://schemas.openxmlformats.org/officeDocument/2006/relationships" xmlns:p="http://schemas.openxmlformats.org/presentationml/2006/main">
   <p:cSld>
     <p:bg>
@@ -23378,7 +23803,7 @@
 </p:sld>
 </file>
 
-<file path=ppt/slides/slide17.xml><?xml version="1.0" encoding="utf-8"?>
+<file path=ppt/slides/slide18.xml><?xml version="1.0" encoding="utf-8"?>
 <p:sld xmlns:a="http://schemas.openxmlformats.org/drawingml/2006/main" xmlns:r="http://schemas.openxmlformats.org/officeDocument/2006/relationships" xmlns:p="http://schemas.openxmlformats.org/presentationml/2006/main">
   <p:cSld>
     <p:bg>
@@ -23948,7 +24373,7 @@
 </p:sld>
 </file>
 
-<file path=ppt/slides/slide18.xml><?xml version="1.0" encoding="utf-8"?>
+<file path=ppt/slides/slide19.xml><?xml version="1.0" encoding="utf-8"?>
 <p:sld xmlns:a="http://schemas.openxmlformats.org/drawingml/2006/main" xmlns:r="http://schemas.openxmlformats.org/officeDocument/2006/relationships" xmlns:p="http://schemas.openxmlformats.org/presentationml/2006/main">
   <p:cSld>
     <p:bg>
@@ -26121,7 +26546,1188 @@
 </p:sld>
 </file>
 
-<file path=ppt/slides/slide19.xml><?xml version="1.0" encoding="utf-8"?>
+<file path=ppt/slides/slide2.xml><?xml version="1.0" encoding="utf-8"?>
+<p:sld xmlns:a="http://schemas.openxmlformats.org/drawingml/2006/main" xmlns:r="http://schemas.openxmlformats.org/officeDocument/2006/relationships" xmlns:p="http://schemas.openxmlformats.org/presentationml/2006/main">
+  <p:cSld>
+    <p:bg>
+      <p:bgPr>
+        <a:blipFill>
+          <a:blip r:embed="rId3">
+            <a:alphaModFix/>
+          </a:blip>
+          <a:stretch>
+            <a:fillRect/>
+          </a:stretch>
+        </a:blipFill>
+        <a:effectLst/>
+      </p:bgPr>
+    </p:bg>
+    <p:spTree>
+      <p:nvGrpSpPr>
+        <p:cNvPr id="1" name="Shape 83"/>
+        <p:cNvGrpSpPr/>
+        <p:nvPr/>
+      </p:nvGrpSpPr>
+      <p:grpSpPr>
+        <a:xfrm>
+          <a:off x="0" y="0"/>
+          <a:ext cx="0" cy="0"/>
+          <a:chOff x="0" y="0"/>
+          <a:chExt cx="0" cy="0"/>
+        </a:xfrm>
+      </p:grpSpPr>
+      <p:sp>
+        <p:nvSpPr>
+          <p:cNvPr id="84" name="Google Shape;84;p13"/>
+          <p:cNvSpPr txBox="1"/>
+          <p:nvPr/>
+        </p:nvSpPr>
+        <p:spPr>
+          <a:xfrm>
+            <a:off x="762000" y="381000"/>
+            <a:ext cx="10668000" cy="1238400"/>
+          </a:xfrm>
+          <a:prstGeom prst="rect">
+            <a:avLst/>
+          </a:prstGeom>
+          <a:noFill/>
+          <a:ln>
+            <a:noFill/>
+          </a:ln>
+        </p:spPr>
+        <p:txBody>
+          <a:bodyPr spcFirstLastPara="1" wrap="square" lIns="0" tIns="0" rIns="0" bIns="0" anchor="t" anchorCtr="0">
+            <a:noAutofit/>
+          </a:bodyPr>
+          <a:lstStyle/>
+          <a:p>
+            <a:pPr marL="0" lvl="0" indent="0" algn="l" rtl="0">
+              <a:spcBef>
+                <a:spcPts val="0"/>
+              </a:spcBef>
+              <a:spcAft>
+                <a:spcPts val="0"/>
+              </a:spcAft>
+              <a:buNone/>
+            </a:pPr>
+            <a:r>
+              <a:rPr lang="en-US" sz="1000" b="1">
+                <a:solidFill>
+                  <a:srgbClr val="0F172A"/>
+                </a:solidFill>
+                <a:highlight>
+                  <a:srgbClr val="E2E8F0"/>
+                </a:highlight>
+                <a:latin typeface="Inter"/>
+                <a:ea typeface="Inter"/>
+                <a:cs typeface="Inter"/>
+                <a:sym typeface="Inter"/>
+              </a:rPr>
+              <a:t>🤖 Agentic AI</a:t>
+            </a:r>
+            <a:r>
+              <a:rPr lang="en-US" sz="1100" b="0">
+                <a:solidFill>
+                  <a:srgbClr val="64748B"/>
+                </a:solidFill>
+                <a:latin typeface="Inter Medium"/>
+                <a:ea typeface="Inter Medium"/>
+                <a:cs typeface="Inter Medium"/>
+                <a:sym typeface="Inter Medium"/>
+              </a:rPr>
+              <a:t>Slide 01</a:t>
+            </a:r>
+            <a:endParaRPr>
+              <a:latin typeface="DM Sans"/>
+              <a:ea typeface="DM Sans"/>
+              <a:cs typeface="DM Sans"/>
+              <a:sym typeface="DM Sans"/>
+            </a:endParaRPr>
+          </a:p>
+          <a:p>
+            <a:pPr marL="0" lvl="0" indent="0" algn="l" rtl="0">
+              <a:spcBef>
+                <a:spcPts val="750"/>
+              </a:spcBef>
+              <a:spcAft>
+                <a:spcPts val="0"/>
+              </a:spcAft>
+              <a:buNone/>
+            </a:pPr>
+            <a:r>
+              <a:rPr lang="en-US" sz="3200" b="0">
+                <a:solidFill>
+                  <a:srgbClr val="0F172A"/>
+                </a:solidFill>
+                <a:latin typeface="DM Sans ExtraBold"/>
+                <a:ea typeface="DM Sans ExtraBold"/>
+                <a:cs typeface="DM Sans ExtraBold"/>
+                <a:sym typeface="DM Sans ExtraBold"/>
+              </a:rPr>
+              <a:t>What is Agentic AI?</a:t>
+            </a:r>
+            <a:endParaRPr sz="3200" b="0">
+              <a:solidFill>
+                <a:srgbClr val="0F172A"/>
+              </a:solidFill>
+              <a:latin typeface="DM Sans ExtraBold"/>
+              <a:ea typeface="DM Sans ExtraBold"/>
+              <a:cs typeface="DM Sans ExtraBold"/>
+              <a:sym typeface="DM Sans ExtraBold"/>
+            </a:endParaRPr>
+          </a:p>
+          <a:p>
+            <a:pPr marL="0" lvl="0" indent="0" algn="l" rtl="0">
+              <a:spcBef>
+                <a:spcPts val="300"/>
+              </a:spcBef>
+              <a:spcAft>
+                <a:spcPts val="0"/>
+              </a:spcAft>
+              <a:buNone/>
+            </a:pPr>
+            <a:r>
+              <a:rPr lang="en-US" sz="1600" b="0">
+                <a:solidFill>
+                  <a:srgbClr val="475569"/>
+                </a:solidFill>
+                <a:latin typeface="Inter"/>
+                <a:ea typeface="Inter"/>
+                <a:cs typeface="Inter"/>
+                <a:sym typeface="Inter"/>
+              </a:rPr>
+              <a:t>The Next Frontier: Moving from Passive Chat to Autonomous Action</a:t>
+            </a:r>
+            <a:endParaRPr sz="1600" b="0">
+              <a:solidFill>
+                <a:srgbClr val="475569"/>
+              </a:solidFill>
+              <a:latin typeface="Inter"/>
+              <a:ea typeface="Inter"/>
+              <a:cs typeface="Inter"/>
+              <a:sym typeface="Inter"/>
+            </a:endParaRPr>
+          </a:p>
+        </p:txBody>
+      </p:sp>
+      <p:grpSp>
+        <p:nvGrpSpPr>
+          <p:cNvPr id="85" name="Google Shape;85;p13"/>
+          <p:cNvGrpSpPr/>
+          <p:nvPr/>
+        </p:nvGrpSpPr>
+        <p:grpSpPr>
+          <a:xfrm>
+            <a:off x="762000" y="1809750"/>
+            <a:ext cx="5143500" cy="2762400"/>
+            <a:chOff x="0" y="0"/>
+            <a:chExt cx="5143500" cy="2762400"/>
+          </a:xfrm>
+        </p:grpSpPr>
+        <p:sp>
+          <p:nvSpPr>
+            <p:cNvPr id="86" name="Google Shape;86;p13"/>
+            <p:cNvSpPr/>
+            <p:nvPr/>
+          </p:nvSpPr>
+          <p:spPr>
+            <a:xfrm>
+              <a:off x="0" y="0"/>
+              <a:ext cx="5143500" cy="2762400"/>
+            </a:xfrm>
+            <a:prstGeom prst="roundRect">
+              <a:avLst>
+                <a:gd name="adj" fmla="val 5517"/>
+              </a:avLst>
+            </a:prstGeom>
+            <a:solidFill>
+              <a:srgbClr val="FFFFFF"/>
+            </a:solidFill>
+            <a:ln w="14300" cap="flat" cmpd="sng">
+              <a:solidFill>
+                <a:srgbClr val="E2E8F0"/>
+              </a:solidFill>
+              <a:prstDash val="solid"/>
+              <a:round/>
+              <a:headEnd type="none" w="sm" len="sm"/>
+              <a:tailEnd type="none" w="sm" len="sm"/>
+            </a:ln>
+          </p:spPr>
+          <p:txBody>
+            <a:bodyPr spcFirstLastPara="1" wrap="square" lIns="0" tIns="0" rIns="0" bIns="0" anchor="ctr" anchorCtr="0">
+              <a:noAutofit/>
+            </a:bodyPr>
+            <a:lstStyle/>
+            <a:p>
+              <a:pPr marL="0" lvl="0" indent="0" algn="l" rtl="0">
+                <a:spcBef>
+                  <a:spcPts val="0"/>
+                </a:spcBef>
+                <a:spcAft>
+                  <a:spcPts val="0"/>
+                </a:spcAft>
+                <a:buNone/>
+              </a:pPr>
+              <a:endParaRPr/>
+            </a:p>
+          </p:txBody>
+        </p:sp>
+        <p:sp>
+          <p:nvSpPr>
+            <p:cNvPr id="87" name="Google Shape;87;p13"/>
+            <p:cNvSpPr txBox="1"/>
+            <p:nvPr/>
+          </p:nvSpPr>
+          <p:spPr>
+            <a:xfrm>
+              <a:off x="228600" y="228600"/>
+              <a:ext cx="4686300" cy="2305200"/>
+            </a:xfrm>
+            <a:prstGeom prst="rect">
+              <a:avLst/>
+            </a:prstGeom>
+            <a:noFill/>
+            <a:ln>
+              <a:noFill/>
+            </a:ln>
+          </p:spPr>
+          <p:txBody>
+            <a:bodyPr spcFirstLastPara="1" wrap="square" lIns="0" tIns="0" rIns="0" bIns="0" anchor="ctr" anchorCtr="0">
+              <a:noAutofit/>
+            </a:bodyPr>
+            <a:lstStyle/>
+            <a:p>
+              <a:pPr marL="0" lvl="0" indent="0" algn="l" rtl="0">
+                <a:spcBef>
+                  <a:spcPts val="0"/>
+                </a:spcBef>
+                <a:spcAft>
+                  <a:spcPts val="0"/>
+                </a:spcAft>
+                <a:buNone/>
+              </a:pPr>
+              <a:r>
+                <a:rPr lang="en-US" sz="1000" b="1">
+                  <a:solidFill>
+                    <a:srgbClr val="2563EB"/>
+                  </a:solidFill>
+                  <a:highlight>
+                    <a:srgbClr val="EFF6FF"/>
+                  </a:highlight>
+                  <a:latin typeface="Inter"/>
+                  <a:ea typeface="Inter"/>
+                  <a:cs typeface="Inter"/>
+                  <a:sym typeface="Inter"/>
+                </a:rPr>
+                <a:t>📚 DEFINITION</a:t>
+              </a:r>
+              <a:endParaRPr sz="1000" b="1">
+                <a:solidFill>
+                  <a:srgbClr val="2563EB"/>
+                </a:solidFill>
+                <a:highlight>
+                  <a:srgbClr val="EFF6FF"/>
+                </a:highlight>
+                <a:latin typeface="Inter"/>
+                <a:ea typeface="Inter"/>
+                <a:cs typeface="Inter"/>
+                <a:sym typeface="Inter"/>
+              </a:endParaRPr>
+            </a:p>
+            <a:p>
+              <a:pPr marL="0" lvl="0" indent="0" algn="l" rtl="0">
+                <a:spcBef>
+                  <a:spcPts val="1200"/>
+                </a:spcBef>
+                <a:spcAft>
+                  <a:spcPts val="0"/>
+                </a:spcAft>
+                <a:buNone/>
+              </a:pPr>
+              <a:r>
+                <a:rPr lang="en-US" sz="1350" b="1">
+                  <a:solidFill>
+                    <a:srgbClr val="0F172A"/>
+                  </a:solidFill>
+                  <a:latin typeface="Inter"/>
+                  <a:ea typeface="Inter"/>
+                  <a:cs typeface="Inter"/>
+                  <a:sym typeface="Inter"/>
+                </a:rPr>
+                <a:t>Agentic AI</a:t>
+              </a:r>
+              <a:r>
+                <a:rPr lang="en-US" sz="1350" b="0">
+                  <a:solidFill>
+                    <a:srgbClr val="1E293B"/>
+                  </a:solidFill>
+                  <a:latin typeface="Inter"/>
+                  <a:ea typeface="Inter"/>
+                  <a:cs typeface="Inter"/>
+                  <a:sym typeface="Inter"/>
+                </a:rPr>
+                <a:t> refers to systems that use </a:t>
+              </a:r>
+              <a:r>
+                <a:rPr lang="en-US" sz="1350" b="1">
+                  <a:solidFill>
+                    <a:srgbClr val="2563EB"/>
+                  </a:solidFill>
+                  <a:latin typeface="Inter"/>
+                  <a:ea typeface="Inter"/>
+                  <a:cs typeface="Inter"/>
+                  <a:sym typeface="Inter"/>
+                </a:rPr>
+                <a:t>Large Language Models (LLMs)</a:t>
+              </a:r>
+              <a:r>
+                <a:rPr lang="en-US" sz="1350" b="0">
+                  <a:solidFill>
+                    <a:srgbClr val="1E293B"/>
+                  </a:solidFill>
+                  <a:latin typeface="Inter"/>
+                  <a:ea typeface="Inter"/>
+                  <a:cs typeface="Inter"/>
+                  <a:sym typeface="Inter"/>
+                </a:rPr>
+                <a:t> as a "reasoning engine" to autonomously </a:t>
+              </a:r>
+              <a:r>
+                <a:rPr lang="en-US" sz="1350" b="0">
+                  <a:solidFill>
+                    <a:srgbClr val="0F172A"/>
+                  </a:solidFill>
+                  <a:latin typeface="Inter SemiBold"/>
+                  <a:ea typeface="Inter SemiBold"/>
+                  <a:cs typeface="Inter SemiBold"/>
+                  <a:sym typeface="Inter SemiBold"/>
+                </a:rPr>
+                <a:t>plan</a:t>
+              </a:r>
+              <a:r>
+                <a:rPr lang="en-US" sz="1350" b="0">
+                  <a:solidFill>
+                    <a:srgbClr val="1E293B"/>
+                  </a:solidFill>
+                  <a:latin typeface="Inter"/>
+                  <a:ea typeface="Inter"/>
+                  <a:cs typeface="Inter"/>
+                  <a:sym typeface="Inter"/>
+                </a:rPr>
+                <a:t>, </a:t>
+              </a:r>
+              <a:r>
+                <a:rPr lang="en-US" sz="1350" b="0">
+                  <a:solidFill>
+                    <a:srgbClr val="0F172A"/>
+                  </a:solidFill>
+                  <a:latin typeface="Inter SemiBold"/>
+                  <a:ea typeface="Inter SemiBold"/>
+                  <a:cs typeface="Inter SemiBold"/>
+                  <a:sym typeface="Inter SemiBold"/>
+                </a:rPr>
+                <a:t>execute</a:t>
+              </a:r>
+              <a:r>
+                <a:rPr lang="en-US" sz="1350" b="0">
+                  <a:solidFill>
+                    <a:srgbClr val="1E293B"/>
+                  </a:solidFill>
+                  <a:latin typeface="Inter"/>
+                  <a:ea typeface="Inter"/>
+                  <a:cs typeface="Inter"/>
+                  <a:sym typeface="Inter"/>
+                </a:rPr>
+                <a:t> tasks, and </a:t>
+              </a:r>
+              <a:r>
+                <a:rPr lang="en-US" sz="1350" b="0">
+                  <a:solidFill>
+                    <a:srgbClr val="0F172A"/>
+                  </a:solidFill>
+                  <a:latin typeface="Inter SemiBold"/>
+                  <a:ea typeface="Inter SemiBold"/>
+                  <a:cs typeface="Inter SemiBold"/>
+                  <a:sym typeface="Inter SemiBold"/>
+                </a:rPr>
+                <a:t>use tools</a:t>
+              </a:r>
+              <a:r>
+                <a:rPr lang="en-US" sz="1350" b="0">
+                  <a:solidFill>
+                    <a:srgbClr val="1E293B"/>
+                  </a:solidFill>
+                  <a:latin typeface="Inter"/>
+                  <a:ea typeface="Inter"/>
+                  <a:cs typeface="Inter"/>
+                  <a:sym typeface="Inter"/>
+                </a:rPr>
+                <a:t> to achieve high-level goals with minimal human intervention.</a:t>
+              </a:r>
+              <a:endParaRPr sz="1350" b="0">
+                <a:solidFill>
+                  <a:srgbClr val="1E293B"/>
+                </a:solidFill>
+                <a:latin typeface="Inter"/>
+                <a:ea typeface="Inter"/>
+                <a:cs typeface="Inter"/>
+                <a:sym typeface="Inter"/>
+              </a:endParaRPr>
+            </a:p>
+            <a:p>
+              <a:pPr marL="0" lvl="0" indent="0" algn="l" rtl="0">
+                <a:spcBef>
+                  <a:spcPts val="1200"/>
+                </a:spcBef>
+                <a:spcAft>
+                  <a:spcPts val="0"/>
+                </a:spcAft>
+                <a:buNone/>
+              </a:pPr>
+              <a:r>
+                <a:rPr lang="en-US" sz="1000" b="0">
+                  <a:solidFill>
+                    <a:srgbClr val="475569"/>
+                  </a:solidFill>
+                  <a:highlight>
+                    <a:srgbClr val="F1F5F9"/>
+                  </a:highlight>
+                  <a:latin typeface="Inter SemiBold"/>
+                  <a:ea typeface="Inter SemiBold"/>
+                  <a:cs typeface="Inter SemiBold"/>
+                  <a:sym typeface="Inter SemiBold"/>
+                </a:rPr>
+                <a:t>⚡ Autonomy🧠 Reasoning Engine🛠️ Tool Use</a:t>
+              </a:r>
+              <a:endParaRPr>
+                <a:latin typeface="Inter"/>
+                <a:ea typeface="Inter"/>
+                <a:cs typeface="Inter"/>
+                <a:sym typeface="Inter"/>
+              </a:endParaRPr>
+            </a:p>
+          </p:txBody>
+        </p:sp>
+      </p:grpSp>
+      <p:grpSp>
+        <p:nvGrpSpPr>
+          <p:cNvPr id="88" name="Google Shape;88;p13"/>
+          <p:cNvGrpSpPr/>
+          <p:nvPr/>
+        </p:nvGrpSpPr>
+        <p:grpSpPr>
+          <a:xfrm>
+            <a:off x="6286500" y="1809750"/>
+            <a:ext cx="5143500" cy="2762400"/>
+            <a:chOff x="0" y="0"/>
+            <a:chExt cx="5143500" cy="2762400"/>
+          </a:xfrm>
+        </p:grpSpPr>
+        <p:sp>
+          <p:nvSpPr>
+            <p:cNvPr id="89" name="Google Shape;89;p13"/>
+            <p:cNvSpPr/>
+            <p:nvPr/>
+          </p:nvSpPr>
+          <p:spPr>
+            <a:xfrm>
+              <a:off x="0" y="0"/>
+              <a:ext cx="5143500" cy="2762400"/>
+            </a:xfrm>
+            <a:prstGeom prst="roundRect">
+              <a:avLst>
+                <a:gd name="adj" fmla="val 5517"/>
+              </a:avLst>
+            </a:prstGeom>
+            <a:solidFill>
+              <a:srgbClr val="F8FAFC"/>
+            </a:solidFill>
+            <a:ln w="14300" cap="flat" cmpd="sng">
+              <a:solidFill>
+                <a:srgbClr val="E2E8F0"/>
+              </a:solidFill>
+              <a:prstDash val="solid"/>
+              <a:round/>
+              <a:headEnd type="none" w="sm" len="sm"/>
+              <a:tailEnd type="none" w="sm" len="sm"/>
+            </a:ln>
+          </p:spPr>
+          <p:txBody>
+            <a:bodyPr spcFirstLastPara="1" wrap="square" lIns="0" tIns="0" rIns="0" bIns="0" anchor="ctr" anchorCtr="0">
+              <a:noAutofit/>
+            </a:bodyPr>
+            <a:lstStyle/>
+            <a:p>
+              <a:pPr marL="0" lvl="0" indent="0" algn="l" rtl="0">
+                <a:spcBef>
+                  <a:spcPts val="0"/>
+                </a:spcBef>
+                <a:spcAft>
+                  <a:spcPts val="0"/>
+                </a:spcAft>
+                <a:buNone/>
+              </a:pPr>
+              <a:endParaRPr/>
+            </a:p>
+          </p:txBody>
+        </p:sp>
+        <p:sp>
+          <p:nvSpPr>
+            <p:cNvPr id="90" name="Google Shape;90;p13"/>
+            <p:cNvSpPr txBox="1"/>
+            <p:nvPr/>
+          </p:nvSpPr>
+          <p:spPr>
+            <a:xfrm>
+              <a:off x="228600" y="228600"/>
+              <a:ext cx="4686300" cy="2305200"/>
+            </a:xfrm>
+            <a:prstGeom prst="rect">
+              <a:avLst/>
+            </a:prstGeom>
+            <a:noFill/>
+            <a:ln>
+              <a:noFill/>
+            </a:ln>
+          </p:spPr>
+          <p:txBody>
+            <a:bodyPr spcFirstLastPara="1" wrap="square" lIns="0" tIns="0" rIns="0" bIns="0" anchor="ctr" anchorCtr="0">
+              <a:noAutofit/>
+            </a:bodyPr>
+            <a:lstStyle/>
+            <a:p>
+              <a:pPr marL="0" lvl="0" indent="0" algn="l" rtl="0">
+                <a:spcBef>
+                  <a:spcPts val="0"/>
+                </a:spcBef>
+                <a:spcAft>
+                  <a:spcPts val="0"/>
+                </a:spcAft>
+                <a:buNone/>
+              </a:pPr>
+              <a:r>
+                <a:rPr lang="en-US" sz="1000" b="1">
+                  <a:solidFill>
+                    <a:srgbClr val="166534"/>
+                  </a:solidFill>
+                  <a:highlight>
+                    <a:srgbClr val="F0FDF4"/>
+                  </a:highlight>
+                  <a:latin typeface="Inter"/>
+                  <a:ea typeface="Inter"/>
+                  <a:cs typeface="Inter"/>
+                  <a:sym typeface="Inter"/>
+                </a:rPr>
+                <a:t>👨‍🍳 REAL-LIFE ANALOGY</a:t>
+              </a:r>
+              <a:endParaRPr sz="1000" b="1">
+                <a:solidFill>
+                  <a:srgbClr val="166534"/>
+                </a:solidFill>
+                <a:highlight>
+                  <a:srgbClr val="F0FDF4"/>
+                </a:highlight>
+                <a:latin typeface="Inter"/>
+                <a:ea typeface="Inter"/>
+                <a:cs typeface="Inter"/>
+                <a:sym typeface="Inter"/>
+              </a:endParaRPr>
+            </a:p>
+            <a:p>
+              <a:pPr marL="0" lvl="0" indent="0" algn="l" rtl="0">
+                <a:spcBef>
+                  <a:spcPts val="900"/>
+                </a:spcBef>
+                <a:spcAft>
+                  <a:spcPts val="0"/>
+                </a:spcAft>
+                <a:buNone/>
+              </a:pPr>
+              <a:r>
+                <a:rPr lang="en-US" sz="3200">
+                  <a:latin typeface="Inter"/>
+                  <a:ea typeface="Inter"/>
+                  <a:cs typeface="Inter"/>
+                  <a:sym typeface="Inter"/>
+                </a:rPr>
+                <a:t>👨‍🍳</a:t>
+              </a:r>
+              <a:endParaRPr>
+                <a:latin typeface="Inter"/>
+                <a:ea typeface="Inter"/>
+                <a:cs typeface="Inter"/>
+                <a:sym typeface="Inter"/>
+              </a:endParaRPr>
+            </a:p>
+            <a:p>
+              <a:pPr marL="0" lvl="0" indent="0" algn="l" rtl="0">
+                <a:spcBef>
+                  <a:spcPts val="0"/>
+                </a:spcBef>
+                <a:spcAft>
+                  <a:spcPts val="0"/>
+                </a:spcAft>
+                <a:buNone/>
+              </a:pPr>
+              <a:r>
+                <a:rPr lang="en-US" sz="1200" b="1">
+                  <a:solidFill>
+                    <a:srgbClr val="0F172A"/>
+                  </a:solidFill>
+                  <a:latin typeface="Inter"/>
+                  <a:ea typeface="Inter"/>
+                  <a:cs typeface="Inter"/>
+                  <a:sym typeface="Inter"/>
+                </a:rPr>
+                <a:t>Chatbot</a:t>
+              </a:r>
+              <a:r>
+                <a:rPr lang="en-US" sz="1200">
+                  <a:solidFill>
+                    <a:srgbClr val="334155"/>
+                  </a:solidFill>
+                  <a:latin typeface="Inter"/>
+                  <a:ea typeface="Inter"/>
+                  <a:cs typeface="Inter"/>
+                  <a:sym typeface="Inter"/>
+                </a:rPr>
+                <a:t> is like a </a:t>
+              </a:r>
+              <a:r>
+                <a:rPr lang="en-US" sz="1200" b="0" u="sng">
+                  <a:solidFill>
+                    <a:srgbClr val="94A3B8"/>
+                  </a:solidFill>
+                  <a:latin typeface="Inter SemiBold"/>
+                  <a:ea typeface="Inter SemiBold"/>
+                  <a:cs typeface="Inter SemiBold"/>
+                  <a:sym typeface="Inter SemiBold"/>
+                </a:rPr>
+                <a:t>vending machine</a:t>
+              </a:r>
+              <a:r>
+                <a:rPr lang="en-US" sz="1200">
+                  <a:solidFill>
+                    <a:srgbClr val="334155"/>
+                  </a:solidFill>
+                  <a:latin typeface="Inter"/>
+                  <a:ea typeface="Inter"/>
+                  <a:cs typeface="Inter"/>
+                  <a:sym typeface="Inter"/>
+                </a:rPr>
+                <a:t>: you ask for a specific item and immediately get it.</a:t>
+              </a:r>
+              <a:endParaRPr sz="1200">
+                <a:solidFill>
+                  <a:srgbClr val="334155"/>
+                </a:solidFill>
+                <a:latin typeface="Inter"/>
+                <a:ea typeface="Inter"/>
+                <a:cs typeface="Inter"/>
+                <a:sym typeface="Inter"/>
+              </a:endParaRPr>
+            </a:p>
+            <a:p>
+              <a:pPr marL="0" lvl="0" indent="0" algn="l" rtl="0">
+                <a:spcBef>
+                  <a:spcPts val="0"/>
+                </a:spcBef>
+                <a:spcAft>
+                  <a:spcPts val="0"/>
+                </a:spcAft>
+                <a:buNone/>
+              </a:pPr>
+              <a:r>
+                <a:rPr lang="en-US" sz="1200" b="1">
+                  <a:solidFill>
+                    <a:srgbClr val="166534"/>
+                  </a:solidFill>
+                  <a:latin typeface="Inter"/>
+                  <a:ea typeface="Inter"/>
+                  <a:cs typeface="Inter"/>
+                  <a:sym typeface="Inter"/>
+                </a:rPr>
+                <a:t>Agent</a:t>
+              </a:r>
+              <a:r>
+                <a:rPr lang="en-US" sz="1200">
+                  <a:solidFill>
+                    <a:srgbClr val="334155"/>
+                  </a:solidFill>
+                  <a:latin typeface="Inter"/>
+                  <a:ea typeface="Inter"/>
+                  <a:cs typeface="Inter"/>
+                  <a:sym typeface="Inter"/>
+                </a:rPr>
+                <a:t> is a </a:t>
+              </a:r>
+              <a:r>
+                <a:rPr lang="en-US" sz="1200" b="1">
+                  <a:solidFill>
+                    <a:srgbClr val="166534"/>
+                  </a:solidFill>
+                  <a:latin typeface="Inter"/>
+                  <a:ea typeface="Inter"/>
+                  <a:cs typeface="Inter"/>
+                  <a:sym typeface="Inter"/>
+                </a:rPr>
+                <a:t>Personal Chef</a:t>
+              </a:r>
+              <a:r>
+                <a:rPr lang="en-US" sz="1200">
+                  <a:solidFill>
+                    <a:srgbClr val="334155"/>
+                  </a:solidFill>
+                  <a:latin typeface="Inter"/>
+                  <a:ea typeface="Inter"/>
+                  <a:cs typeface="Inter"/>
+                  <a:sym typeface="Inter"/>
+                </a:rPr>
+                <a:t>: hears dietary goals, shops for ingredients, and cooks autonomously.</a:t>
+              </a:r>
+              <a:endParaRPr sz="1200">
+                <a:solidFill>
+                  <a:srgbClr val="334155"/>
+                </a:solidFill>
+                <a:latin typeface="Inter"/>
+                <a:ea typeface="Inter"/>
+                <a:cs typeface="Inter"/>
+                <a:sym typeface="Inter"/>
+              </a:endParaRPr>
+            </a:p>
+            <a:p>
+              <a:pPr marL="0" lvl="0" indent="0" algn="l" rtl="0">
+                <a:spcBef>
+                  <a:spcPts val="0"/>
+                </a:spcBef>
+                <a:spcAft>
+                  <a:spcPts val="0"/>
+                </a:spcAft>
+                <a:buNone/>
+              </a:pPr>
+              <a:r>
+                <a:rPr lang="en-US" sz="1100" b="1">
+                  <a:solidFill>
+                    <a:srgbClr val="065F46"/>
+                  </a:solidFill>
+                  <a:highlight>
+                    <a:srgbClr val="ECFDF5"/>
+                  </a:highlight>
+                  <a:latin typeface="Inter"/>
+                  <a:ea typeface="Inter"/>
+                  <a:cs typeface="Inter"/>
+                  <a:sym typeface="Inter"/>
+                </a:rPr>
+                <a:t>Mapping:</a:t>
+              </a:r>
+              <a:r>
+                <a:rPr lang="en-US" sz="1100" b="0">
+                  <a:solidFill>
+                    <a:srgbClr val="065F46"/>
+                  </a:solidFill>
+                  <a:highlight>
+                    <a:srgbClr val="ECFDF5"/>
+                  </a:highlight>
+                  <a:latin typeface="Inter Medium"/>
+                  <a:ea typeface="Inter Medium"/>
+                  <a:cs typeface="Inter Medium"/>
+                  <a:sym typeface="Inter Medium"/>
+                </a:rPr>
+                <a:t> The Chef (Agent) uses Tools (Knife/Stove) and Memory (Recipes) to reach the Goal (Dinner).</a:t>
+              </a:r>
+              <a:endParaRPr sz="1100" b="0">
+                <a:solidFill>
+                  <a:srgbClr val="065F46"/>
+                </a:solidFill>
+                <a:highlight>
+                  <a:srgbClr val="ECFDF5"/>
+                </a:highlight>
+                <a:latin typeface="Inter Medium"/>
+                <a:ea typeface="Inter Medium"/>
+                <a:cs typeface="Inter Medium"/>
+                <a:sym typeface="Inter Medium"/>
+              </a:endParaRPr>
+            </a:p>
+          </p:txBody>
+        </p:sp>
+      </p:grpSp>
+      <p:grpSp>
+        <p:nvGrpSpPr>
+          <p:cNvPr id="91" name="Google Shape;91;p13"/>
+          <p:cNvGrpSpPr/>
+          <p:nvPr/>
+        </p:nvGrpSpPr>
+        <p:grpSpPr>
+          <a:xfrm>
+            <a:off x="762000" y="4762500"/>
+            <a:ext cx="10668000" cy="1143000"/>
+            <a:chOff x="0" y="0"/>
+            <a:chExt cx="10668000" cy="1143000"/>
+          </a:xfrm>
+        </p:grpSpPr>
+        <p:sp>
+          <p:nvSpPr>
+            <p:cNvPr id="92" name="Google Shape;92;p13"/>
+            <p:cNvSpPr/>
+            <p:nvPr/>
+          </p:nvSpPr>
+          <p:spPr>
+            <a:xfrm>
+              <a:off x="0" y="0"/>
+              <a:ext cx="10668000" cy="1143000"/>
+            </a:xfrm>
+            <a:prstGeom prst="roundRect">
+              <a:avLst>
+                <a:gd name="adj" fmla="val 10000"/>
+              </a:avLst>
+            </a:prstGeom>
+            <a:solidFill>
+              <a:srgbClr val="0F172A"/>
+            </a:solidFill>
+            <a:ln>
+              <a:noFill/>
+            </a:ln>
+          </p:spPr>
+          <p:txBody>
+            <a:bodyPr spcFirstLastPara="1" wrap="square" lIns="0" tIns="0" rIns="0" bIns="0" anchor="ctr" anchorCtr="0">
+              <a:noAutofit/>
+            </a:bodyPr>
+            <a:lstStyle/>
+            <a:p>
+              <a:pPr marL="0" lvl="0" indent="0" algn="l" rtl="0">
+                <a:spcBef>
+                  <a:spcPts val="0"/>
+                </a:spcBef>
+                <a:spcAft>
+                  <a:spcPts val="0"/>
+                </a:spcAft>
+                <a:buNone/>
+              </a:pPr>
+              <a:endParaRPr/>
+            </a:p>
+          </p:txBody>
+        </p:sp>
+        <p:sp>
+          <p:nvSpPr>
+            <p:cNvPr id="93" name="Google Shape;93;p13"/>
+            <p:cNvSpPr txBox="1"/>
+            <p:nvPr/>
+          </p:nvSpPr>
+          <p:spPr>
+            <a:xfrm>
+              <a:off x="228600" y="152400"/>
+              <a:ext cx="10210800" cy="838200"/>
+            </a:xfrm>
+            <a:prstGeom prst="rect">
+              <a:avLst/>
+            </a:prstGeom>
+            <a:noFill/>
+            <a:ln>
+              <a:noFill/>
+            </a:ln>
+          </p:spPr>
+          <p:txBody>
+            <a:bodyPr spcFirstLastPara="1" wrap="square" lIns="0" tIns="0" rIns="0" bIns="0" anchor="ctr" anchorCtr="0">
+              <a:noAutofit/>
+            </a:bodyPr>
+            <a:lstStyle/>
+            <a:p>
+              <a:pPr marL="0" lvl="0" indent="0" algn="l" rtl="0">
+                <a:spcBef>
+                  <a:spcPts val="0"/>
+                </a:spcBef>
+                <a:spcAft>
+                  <a:spcPts val="0"/>
+                </a:spcAft>
+                <a:buNone/>
+              </a:pPr>
+              <a:r>
+                <a:rPr lang="en-US" sz="1000" b="1">
+                  <a:solidFill>
+                    <a:srgbClr val="94A3B8"/>
+                  </a:solidFill>
+                  <a:latin typeface="Inter"/>
+                  <a:ea typeface="Inter"/>
+                  <a:cs typeface="Inter"/>
+                  <a:sym typeface="Inter"/>
+                </a:rPr>
+                <a:t>🖥️ LIVE DEMO SCENARIO: AI Research Assistant</a:t>
+              </a:r>
+              <a:r>
+                <a:rPr lang="en-US" sz="900" b="1">
+                  <a:solidFill>
+                    <a:srgbClr val="22C55E"/>
+                  </a:solidFill>
+                  <a:latin typeface="Inter"/>
+                  <a:ea typeface="Inter"/>
+                  <a:cs typeface="Inter"/>
+                  <a:sym typeface="Inter"/>
+                </a:rPr>
+                <a:t>● ACTIVE LOOP</a:t>
+              </a:r>
+              <a:endParaRPr>
+                <a:latin typeface="Courier New"/>
+                <a:ea typeface="Courier New"/>
+                <a:cs typeface="Courier New"/>
+                <a:sym typeface="Courier New"/>
+              </a:endParaRPr>
+            </a:p>
+            <a:p>
+              <a:pPr marL="0" lvl="0" indent="0" algn="l" rtl="0">
+                <a:spcBef>
+                  <a:spcPts val="0"/>
+                </a:spcBef>
+                <a:spcAft>
+                  <a:spcPts val="0"/>
+                </a:spcAft>
+                <a:buNone/>
+              </a:pPr>
+              <a:r>
+                <a:rPr lang="en-US" sz="900" b="1">
+                  <a:solidFill>
+                    <a:srgbClr val="0F172A"/>
+                  </a:solidFill>
+                  <a:highlight>
+                    <a:srgbClr val="E2E8F0"/>
+                  </a:highlight>
+                  <a:latin typeface="Inter"/>
+                  <a:ea typeface="Inter"/>
+                  <a:cs typeface="Inter"/>
+                  <a:sym typeface="Inter"/>
+                </a:rPr>
+                <a:t>INPUT</a:t>
+              </a:r>
+              <a:r>
+                <a:rPr lang="en-US" sz="1100" b="0">
+                  <a:solidFill>
+                    <a:srgbClr val="F1F5F9"/>
+                  </a:solidFill>
+                  <a:latin typeface="Inter SemiBold"/>
+                  <a:ea typeface="Inter SemiBold"/>
+                  <a:cs typeface="Inter SemiBold"/>
+                  <a:sym typeface="Inter SemiBold"/>
+                </a:rPr>
+                <a:t>"Find and summarize recent 6G wireless research papers."</a:t>
+              </a:r>
+              <a:r>
+                <a:rPr lang="en-US">
+                  <a:solidFill>
+                    <a:srgbClr val="64748B"/>
+                  </a:solidFill>
+                  <a:latin typeface="Inter"/>
+                  <a:ea typeface="Inter"/>
+                  <a:cs typeface="Inter"/>
+                  <a:sym typeface="Inter"/>
+                </a:rPr>
+                <a:t>➔</a:t>
+              </a:r>
+              <a:r>
+                <a:rPr lang="en-US" sz="900" b="1">
+                  <a:solidFill>
+                    <a:srgbClr val="0F172A"/>
+                  </a:solidFill>
+                  <a:highlight>
+                    <a:srgbClr val="F59E0B"/>
+                  </a:highlight>
+                  <a:latin typeface="Inter"/>
+                  <a:ea typeface="Inter"/>
+                  <a:cs typeface="Inter"/>
+                  <a:sym typeface="Inter"/>
+                </a:rPr>
+                <a:t>AGENT ACTION</a:t>
+              </a:r>
+              <a:r>
+                <a:rPr lang="en-US" sz="1100">
+                  <a:solidFill>
+                    <a:srgbClr val="FCD34D"/>
+                  </a:solidFill>
+                  <a:latin typeface="Inter"/>
+                  <a:ea typeface="Inter"/>
+                  <a:cs typeface="Inter"/>
+                  <a:sym typeface="Inter"/>
+                </a:rPr>
+                <a:t>Searching ArXiv... Found 12 results... Summarizing...</a:t>
+              </a:r>
+              <a:endParaRPr>
+                <a:latin typeface="Courier New"/>
+                <a:ea typeface="Courier New"/>
+                <a:cs typeface="Courier New"/>
+                <a:sym typeface="Courier New"/>
+              </a:endParaRPr>
+            </a:p>
+          </p:txBody>
+        </p:sp>
+      </p:grpSp>
+      <p:grpSp>
+        <p:nvGrpSpPr>
+          <p:cNvPr id="94" name="Google Shape;94;p13"/>
+          <p:cNvGrpSpPr/>
+          <p:nvPr/>
+        </p:nvGrpSpPr>
+        <p:grpSpPr>
+          <a:xfrm>
+            <a:off x="0" y="6191250"/>
+            <a:ext cx="12192000" cy="666900"/>
+            <a:chOff x="0" y="0"/>
+            <a:chExt cx="12192000" cy="666900"/>
+          </a:xfrm>
+        </p:grpSpPr>
+        <p:sp>
+          <p:nvSpPr>
+            <p:cNvPr id="95" name="Google Shape;95;p13"/>
+            <p:cNvSpPr/>
+            <p:nvPr/>
+          </p:nvSpPr>
+          <p:spPr>
+            <a:xfrm>
+              <a:off x="0" y="0"/>
+              <a:ext cx="12192000" cy="666900"/>
+            </a:xfrm>
+            <a:prstGeom prst="rect">
+              <a:avLst/>
+            </a:prstGeom>
+            <a:solidFill>
+              <a:srgbClr val="020617"/>
+            </a:solidFill>
+            <a:ln>
+              <a:noFill/>
+            </a:ln>
+          </p:spPr>
+          <p:txBody>
+            <a:bodyPr spcFirstLastPara="1" wrap="square" lIns="0" tIns="0" rIns="0" bIns="0" anchor="ctr" anchorCtr="0">
+              <a:noAutofit/>
+            </a:bodyPr>
+            <a:lstStyle/>
+            <a:p>
+              <a:pPr marL="0" lvl="0" indent="0" algn="l" rtl="0">
+                <a:spcBef>
+                  <a:spcPts val="0"/>
+                </a:spcBef>
+                <a:spcAft>
+                  <a:spcPts val="0"/>
+                </a:spcAft>
+                <a:buNone/>
+              </a:pPr>
+              <a:endParaRPr/>
+            </a:p>
+          </p:txBody>
+        </p:sp>
+        <p:sp>
+          <p:nvSpPr>
+            <p:cNvPr id="96" name="Google Shape;96;p13"/>
+            <p:cNvSpPr txBox="1"/>
+            <p:nvPr/>
+          </p:nvSpPr>
+          <p:spPr>
+            <a:xfrm>
+              <a:off x="762000" y="0"/>
+              <a:ext cx="10668000" cy="666900"/>
+            </a:xfrm>
+            <a:prstGeom prst="rect">
+              <a:avLst/>
+            </a:prstGeom>
+            <a:noFill/>
+            <a:ln>
+              <a:noFill/>
+            </a:ln>
+          </p:spPr>
+          <p:txBody>
+            <a:bodyPr spcFirstLastPara="1" wrap="square" lIns="0" tIns="0" rIns="0" bIns="0" anchor="ctr" anchorCtr="0">
+              <a:noAutofit/>
+            </a:bodyPr>
+            <a:lstStyle/>
+            <a:p>
+              <a:pPr marL="0" lvl="0" indent="0" algn="ctr" rtl="0">
+                <a:spcBef>
+                  <a:spcPts val="0"/>
+                </a:spcBef>
+                <a:spcAft>
+                  <a:spcPts val="0"/>
+                </a:spcAft>
+                <a:buNone/>
+              </a:pPr>
+              <a:r>
+                <a:rPr lang="en-US" sz="1350" b="0">
+                  <a:solidFill>
+                    <a:srgbClr val="FFFFFF"/>
+                  </a:solidFill>
+                  <a:latin typeface="Inter"/>
+                  <a:ea typeface="Inter"/>
+                  <a:cs typeface="Inter"/>
+                  <a:sym typeface="Inter"/>
+                </a:rPr>
+                <a:t>Agents don't just talk; they </a:t>
+              </a:r>
+              <a:r>
+                <a:rPr lang="en-US" sz="1350" b="1" u="sng">
+                  <a:solidFill>
+                    <a:srgbClr val="38BDF8"/>
+                  </a:solidFill>
+                  <a:latin typeface="Inter"/>
+                  <a:ea typeface="Inter"/>
+                  <a:cs typeface="Inter"/>
+                  <a:sym typeface="Inter"/>
+                </a:rPr>
+                <a:t>reason</a:t>
+              </a:r>
+              <a:r>
+                <a:rPr lang="en-US" sz="1350" b="0">
+                  <a:solidFill>
+                    <a:srgbClr val="FFFFFF"/>
+                  </a:solidFill>
+                  <a:latin typeface="Inter"/>
+                  <a:ea typeface="Inter"/>
+                  <a:cs typeface="Inter"/>
+                  <a:sym typeface="Inter"/>
+                </a:rPr>
+                <a:t> and </a:t>
+              </a:r>
+              <a:r>
+                <a:rPr lang="en-US" sz="1350" b="1" u="sng">
+                  <a:solidFill>
+                    <a:srgbClr val="38BDF8"/>
+                  </a:solidFill>
+                  <a:latin typeface="Inter"/>
+                  <a:ea typeface="Inter"/>
+                  <a:cs typeface="Inter"/>
+                  <a:sym typeface="Inter"/>
+                </a:rPr>
+                <a:t>act</a:t>
+              </a:r>
+              <a:r>
+                <a:rPr lang="en-US" sz="1350" b="0">
+                  <a:solidFill>
+                    <a:srgbClr val="FFFFFF"/>
+                  </a:solidFill>
+                  <a:latin typeface="Inter"/>
+                  <a:ea typeface="Inter"/>
+                  <a:cs typeface="Inter"/>
+                  <a:sym typeface="Inter"/>
+                </a:rPr>
+                <a:t> through iterative feedback loops.</a:t>
+              </a:r>
+              <a:endParaRPr sz="1350">
+                <a:solidFill>
+                  <a:srgbClr val="FFFFFF"/>
+                </a:solidFill>
+                <a:latin typeface="Inter"/>
+                <a:ea typeface="Inter"/>
+                <a:cs typeface="Inter"/>
+                <a:sym typeface="Inter"/>
+              </a:endParaRPr>
+            </a:p>
+          </p:txBody>
+        </p:sp>
+      </p:grpSp>
+    </p:spTree>
+  </p:cSld>
+  <p:clrMapOvr>
+    <a:masterClrMapping/>
+  </p:clrMapOvr>
+</p:sld>
+</file>
+
+<file path=ppt/slides/slide20.xml><?xml version="1.0" encoding="utf-8"?>
 <p:sld xmlns:a="http://schemas.openxmlformats.org/drawingml/2006/main" xmlns:r="http://schemas.openxmlformats.org/officeDocument/2006/relationships" xmlns:p="http://schemas.openxmlformats.org/presentationml/2006/main">
   <p:cSld>
     <p:spTree>
@@ -26470,7 +28076,972 @@
 </p:sld>
 </file>
 
-<file path=ppt/slides/slide2.xml><?xml version="1.0" encoding="utf-8"?>
+<file path=ppt/slides/slide21.xml><?xml version="1.0" encoding="utf-8"?>
+<p:sld xmlns:a="http://schemas.openxmlformats.org/drawingml/2006/main" xmlns:r="http://schemas.openxmlformats.org/officeDocument/2006/relationships" xmlns:p="http://schemas.openxmlformats.org/presentationml/2006/main">
+  <p:cSld>
+    <p:bg>
+      <p:bgPr>
+        <a:solidFill>
+          <a:srgbClr val="FFFFFF"/>
+        </a:solidFill>
+        <a:effectLst/>
+      </p:bgPr>
+    </p:bg>
+    <p:spTree>
+      <p:nvGrpSpPr>
+        <p:cNvPr id="1" name="Shape 544"/>
+        <p:cNvGrpSpPr/>
+        <p:nvPr/>
+      </p:nvGrpSpPr>
+      <p:grpSpPr>
+        <a:xfrm>
+          <a:off x="0" y="0"/>
+          <a:ext cx="0" cy="0"/>
+          <a:chOff x="0" y="0"/>
+          <a:chExt cx="0" cy="0"/>
+        </a:xfrm>
+      </p:grpSpPr>
+      <p:pic>
+        <p:nvPicPr>
+          <p:cNvPr id="545" name="Google Shape;545;p32" descr="image.png"/>
+          <p:cNvPicPr preferRelativeResize="0"/>
+          <p:nvPr/>
+        </p:nvPicPr>
+        <p:blipFill rotWithShape="1">
+          <a:blip r:embed="rId3">
+            <a:alphaModFix/>
+          </a:blip>
+          <a:srcRect/>
+          <a:stretch/>
+        </p:blipFill>
+        <p:spPr>
+          <a:xfrm>
+            <a:off x="5448300" y="190500"/>
+            <a:ext cx="1295400" cy="342900"/>
+          </a:xfrm>
+          <a:prstGeom prst="rect">
+            <a:avLst/>
+          </a:prstGeom>
+          <a:noFill/>
+          <a:ln>
+            <a:noFill/>
+          </a:ln>
+        </p:spPr>
+      </p:pic>
+      <p:pic>
+        <p:nvPicPr>
+          <p:cNvPr id="546" name="Google Shape;546;p32" descr="image.png"/>
+          <p:cNvPicPr preferRelativeResize="0"/>
+          <p:nvPr/>
+        </p:nvPicPr>
+        <p:blipFill rotWithShape="1">
+          <a:blip r:embed="rId4">
+            <a:alphaModFix/>
+          </a:blip>
+          <a:srcRect/>
+          <a:stretch/>
+        </p:blipFill>
+        <p:spPr>
+          <a:xfrm>
+            <a:off x="381000" y="6434137"/>
+            <a:ext cx="1390650" cy="276225"/>
+          </a:xfrm>
+          <a:prstGeom prst="rect">
+            <a:avLst/>
+          </a:prstGeom>
+          <a:noFill/>
+          <a:ln>
+            <a:noFill/>
+          </a:ln>
+        </p:spPr>
+      </p:pic>
+      <p:sp>
+        <p:nvSpPr>
+          <p:cNvPr id="547" name="Google Shape;547;p32"/>
+          <p:cNvSpPr/>
+          <p:nvPr/>
+        </p:nvSpPr>
+        <p:spPr>
+          <a:xfrm>
+            <a:off x="0" y="6286500"/>
+            <a:ext cx="12192000" cy="571500"/>
+          </a:xfrm>
+          <a:prstGeom prst="rect">
+            <a:avLst/>
+          </a:prstGeom>
+          <a:solidFill>
+            <a:srgbClr val="0F172A"/>
+          </a:solidFill>
+          <a:ln>
+            <a:noFill/>
+          </a:ln>
+        </p:spPr>
+        <p:txBody>
+          <a:bodyPr spcFirstLastPara="1" wrap="square" lIns="91425" tIns="45700" rIns="91425" bIns="45700" anchor="ctr" anchorCtr="0">
+            <a:noAutofit/>
+          </a:bodyPr>
+          <a:lstStyle/>
+          <a:p>
+            <a:pPr marL="0" marR="0" lvl="0" indent="0" algn="ctr" rtl="0">
+              <a:spcBef>
+                <a:spcPts val="0"/>
+              </a:spcBef>
+              <a:spcAft>
+                <a:spcPts val="0"/>
+              </a:spcAft>
+              <a:buNone/>
+            </a:pPr>
+            <a:endParaRPr sz="1800" b="0" i="0" u="none" strike="noStrike" cap="none">
+              <a:solidFill>
+                <a:schemeClr val="dk1"/>
+              </a:solidFill>
+              <a:latin typeface="Calibri"/>
+              <a:ea typeface="Calibri"/>
+              <a:cs typeface="Calibri"/>
+              <a:sym typeface="Calibri"/>
+            </a:endParaRPr>
+          </a:p>
+        </p:txBody>
+      </p:sp>
+      <p:sp>
+        <p:nvSpPr>
+          <p:cNvPr id="548" name="Google Shape;548;p32"/>
+          <p:cNvSpPr txBox="1"/>
+          <p:nvPr/>
+        </p:nvSpPr>
+        <p:spPr>
+          <a:xfrm>
+            <a:off x="381000" y="6465367"/>
+            <a:ext cx="11430000" cy="184800"/>
+          </a:xfrm>
+          <a:prstGeom prst="rect">
+            <a:avLst/>
+          </a:prstGeom>
+          <a:noFill/>
+          <a:ln>
+            <a:noFill/>
+          </a:ln>
+        </p:spPr>
+        <p:txBody>
+          <a:bodyPr spcFirstLastPara="1" wrap="square" lIns="0" tIns="0" rIns="0" bIns="0" anchor="ctr" anchorCtr="0">
+            <a:spAutoFit/>
+          </a:bodyPr>
+          <a:lstStyle/>
+          <a:p>
+            <a:pPr marL="0" marR="0" lvl="0" indent="0" algn="l" rtl="0">
+              <a:spcBef>
+                <a:spcPts val="0"/>
+              </a:spcBef>
+              <a:spcAft>
+                <a:spcPts val="0"/>
+              </a:spcAft>
+              <a:buNone/>
+            </a:pPr>
+            <a:r>
+              <a:rPr lang="en-US" sz="1200" b="0" i="0" u="none" strike="noStrike" cap="none" dirty="0">
+                <a:solidFill>
+                  <a:srgbClr val="FFFFFF"/>
+                </a:solidFill>
+                <a:latin typeface="Inter"/>
+                <a:ea typeface="Inter"/>
+                <a:cs typeface="Inter"/>
+                <a:sym typeface="Inter"/>
+              </a:rPr>
+              <a:t>The industry is rapidly shifting from </a:t>
+            </a:r>
+            <a:r>
+              <a:rPr lang="en-US" sz="1200" b="1" i="0" u="none" strike="noStrike" cap="none" dirty="0">
+                <a:solidFill>
+                  <a:srgbClr val="FFFFFF"/>
+                </a:solidFill>
+                <a:latin typeface="Inter"/>
+                <a:ea typeface="Inter"/>
+                <a:cs typeface="Inter"/>
+                <a:sym typeface="Inter"/>
+              </a:rPr>
+              <a:t>Prompting</a:t>
+            </a:r>
+            <a:r>
+              <a:rPr lang="en-US" sz="1200" b="0" i="0" u="none" strike="noStrike" cap="none" dirty="0">
+                <a:solidFill>
+                  <a:srgbClr val="FFFFFF"/>
+                </a:solidFill>
+                <a:latin typeface="Inter"/>
+                <a:ea typeface="Inter"/>
+                <a:cs typeface="Inter"/>
+                <a:sym typeface="Inter"/>
+              </a:rPr>
+              <a:t> to </a:t>
+            </a:r>
+            <a:r>
+              <a:rPr lang="en-US" sz="1200" b="1" i="0" u="none" strike="noStrike" cap="none" dirty="0">
+                <a:solidFill>
+                  <a:srgbClr val="FFFFFF"/>
+                </a:solidFill>
+                <a:latin typeface="Inter"/>
+                <a:ea typeface="Inter"/>
+                <a:cs typeface="Inter"/>
+                <a:sym typeface="Inter"/>
+              </a:rPr>
+              <a:t>Architecting Agents</a:t>
+            </a:r>
+            <a:r>
+              <a:rPr lang="en-US" sz="1200" b="0" i="0" u="none" strike="noStrike" cap="none" dirty="0">
+                <a:solidFill>
+                  <a:srgbClr val="FFFFFF"/>
+                </a:solidFill>
+                <a:latin typeface="Inter"/>
+                <a:ea typeface="Inter"/>
+                <a:cs typeface="Inter"/>
+                <a:sym typeface="Inter"/>
+              </a:rPr>
+              <a:t>.</a:t>
+            </a:r>
+            <a:endParaRPr dirty="0"/>
+          </a:p>
+        </p:txBody>
+      </p:sp>
+      <p:sp>
+        <p:nvSpPr>
+          <p:cNvPr id="549" name="Google Shape;549;p32"/>
+          <p:cNvSpPr txBox="1"/>
+          <p:nvPr/>
+        </p:nvSpPr>
+        <p:spPr>
+          <a:xfrm>
+            <a:off x="8953500" y="266700"/>
+            <a:ext cx="2857500" cy="184800"/>
+          </a:xfrm>
+          <a:prstGeom prst="rect">
+            <a:avLst/>
+          </a:prstGeom>
+          <a:noFill/>
+          <a:ln>
+            <a:noFill/>
+          </a:ln>
+        </p:spPr>
+        <p:txBody>
+          <a:bodyPr spcFirstLastPara="1" wrap="square" lIns="0" tIns="0" rIns="0" bIns="0" anchor="t" anchorCtr="0">
+            <a:spAutoFit/>
+          </a:bodyPr>
+          <a:lstStyle/>
+          <a:p>
+            <a:pPr marL="0" marR="0" lvl="0" indent="0" algn="r" rtl="0">
+              <a:spcBef>
+                <a:spcPts val="0"/>
+              </a:spcBef>
+              <a:spcAft>
+                <a:spcPts val="0"/>
+              </a:spcAft>
+              <a:buNone/>
+            </a:pPr>
+            <a:r>
+              <a:rPr lang="en-US" sz="1200" b="0" i="0" u="none" strike="noStrike" cap="none">
+                <a:solidFill>
+                  <a:srgbClr val="94A3B8"/>
+                </a:solidFill>
+                <a:latin typeface="Inter Medium"/>
+                <a:ea typeface="Inter Medium"/>
+                <a:cs typeface="Inter Medium"/>
+                <a:sym typeface="Inter Medium"/>
+              </a:rPr>
+              <a:t>Slide 20</a:t>
+            </a:r>
+            <a:endParaRPr/>
+          </a:p>
+        </p:txBody>
+      </p:sp>
+      <p:sp>
+        <p:nvSpPr>
+          <p:cNvPr id="550" name="Google Shape;550;p32"/>
+          <p:cNvSpPr txBox="1"/>
+          <p:nvPr/>
+        </p:nvSpPr>
+        <p:spPr>
+          <a:xfrm>
+            <a:off x="762000" y="1104900"/>
+            <a:ext cx="11201400" cy="461700"/>
+          </a:xfrm>
+          <a:prstGeom prst="rect">
+            <a:avLst/>
+          </a:prstGeom>
+          <a:noFill/>
+          <a:ln>
+            <a:noFill/>
+          </a:ln>
+        </p:spPr>
+        <p:txBody>
+          <a:bodyPr spcFirstLastPara="1" wrap="square" lIns="0" tIns="0" rIns="0" bIns="0" anchor="t" anchorCtr="0">
+            <a:spAutoFit/>
+          </a:bodyPr>
+          <a:lstStyle/>
+          <a:p>
+            <a:pPr marL="0" marR="0" lvl="0" indent="0" algn="l" rtl="0">
+              <a:spcBef>
+                <a:spcPts val="0"/>
+              </a:spcBef>
+              <a:spcAft>
+                <a:spcPts val="0"/>
+              </a:spcAft>
+              <a:buNone/>
+            </a:pPr>
+            <a:r>
+              <a:rPr lang="en-US" sz="3000" b="1" i="0" u="none" strike="noStrike" cap="none">
+                <a:solidFill>
+                  <a:srgbClr val="0F172A"/>
+                </a:solidFill>
+                <a:latin typeface="DM Sans"/>
+                <a:ea typeface="DM Sans"/>
+                <a:cs typeface="DM Sans"/>
+                <a:sym typeface="DM Sans"/>
+              </a:rPr>
+              <a:t>Framework Adoption Trends</a:t>
+            </a:r>
+            <a:endParaRPr/>
+          </a:p>
+        </p:txBody>
+      </p:sp>
+      <p:sp>
+        <p:nvSpPr>
+          <p:cNvPr id="551" name="Google Shape;551;p32"/>
+          <p:cNvSpPr/>
+          <p:nvPr/>
+        </p:nvSpPr>
+        <p:spPr>
+          <a:xfrm>
+            <a:off x="381000" y="266700"/>
+            <a:ext cx="381000" cy="190500"/>
+          </a:xfrm>
+          <a:prstGeom prst="roundRect">
+            <a:avLst>
+              <a:gd name="adj" fmla="val 50000"/>
+            </a:avLst>
+          </a:prstGeom>
+          <a:noFill/>
+          <a:ln w="19050" cap="flat" cmpd="sng">
+            <a:solidFill>
+              <a:srgbClr val="0F172A"/>
+            </a:solidFill>
+            <a:prstDash val="solid"/>
+            <a:round/>
+            <a:headEnd type="none" w="sm" len="sm"/>
+            <a:tailEnd type="none" w="sm" len="sm"/>
+          </a:ln>
+        </p:spPr>
+        <p:txBody>
+          <a:bodyPr spcFirstLastPara="1" wrap="square" lIns="91425" tIns="45700" rIns="91425" bIns="45700" anchor="ctr" anchorCtr="0">
+            <a:noAutofit/>
+          </a:bodyPr>
+          <a:lstStyle/>
+          <a:p>
+            <a:pPr marL="0" marR="0" lvl="0" indent="0" algn="ctr" rtl="0">
+              <a:spcBef>
+                <a:spcPts val="0"/>
+              </a:spcBef>
+              <a:spcAft>
+                <a:spcPts val="0"/>
+              </a:spcAft>
+              <a:buNone/>
+            </a:pPr>
+            <a:endParaRPr sz="1800" b="0" i="0" u="none" strike="noStrike" cap="none">
+              <a:solidFill>
+                <a:schemeClr val="dk1"/>
+              </a:solidFill>
+              <a:latin typeface="Calibri"/>
+              <a:ea typeface="Calibri"/>
+              <a:cs typeface="Calibri"/>
+              <a:sym typeface="Calibri"/>
+            </a:endParaRPr>
+          </a:p>
+        </p:txBody>
+      </p:sp>
+      <p:sp>
+        <p:nvSpPr>
+          <p:cNvPr id="552" name="Google Shape;552;p32"/>
+          <p:cNvSpPr/>
+          <p:nvPr/>
+        </p:nvSpPr>
+        <p:spPr>
+          <a:xfrm>
+            <a:off x="6134100" y="1943100"/>
+            <a:ext cx="5334000" cy="3810000"/>
+          </a:xfrm>
+          <a:prstGeom prst="roundRect">
+            <a:avLst>
+              <a:gd name="adj" fmla="val 4000"/>
+            </a:avLst>
+          </a:prstGeom>
+          <a:solidFill>
+            <a:srgbClr val="0F172A">
+              <a:alpha val="3999"/>
+            </a:srgbClr>
+          </a:solidFill>
+          <a:ln>
+            <a:noFill/>
+          </a:ln>
+        </p:spPr>
+        <p:txBody>
+          <a:bodyPr spcFirstLastPara="1" wrap="square" lIns="0" tIns="0" rIns="0" bIns="0" anchor="ctr" anchorCtr="0">
+            <a:noAutofit/>
+          </a:bodyPr>
+          <a:lstStyle/>
+          <a:p>
+            <a:pPr marL="0" lvl="0" indent="0" algn="l" rtl="0">
+              <a:spcBef>
+                <a:spcPts val="0"/>
+              </a:spcBef>
+              <a:spcAft>
+                <a:spcPts val="0"/>
+              </a:spcAft>
+              <a:buNone/>
+            </a:pPr>
+            <a:endParaRPr/>
+          </a:p>
+        </p:txBody>
+      </p:sp>
+      <p:sp>
+        <p:nvSpPr>
+          <p:cNvPr id="553" name="Google Shape;553;p32"/>
+          <p:cNvSpPr/>
+          <p:nvPr/>
+        </p:nvSpPr>
+        <p:spPr>
+          <a:xfrm>
+            <a:off x="6096000" y="1905000"/>
+            <a:ext cx="5334000" cy="3810000"/>
+          </a:xfrm>
+          <a:prstGeom prst="roundRect">
+            <a:avLst>
+              <a:gd name="adj" fmla="val 4000"/>
+            </a:avLst>
+          </a:prstGeom>
+          <a:solidFill>
+            <a:srgbClr val="FFFFFF"/>
+          </a:solidFill>
+          <a:ln w="14300" cap="flat" cmpd="sng">
+            <a:solidFill>
+              <a:srgbClr val="E2E8F0"/>
+            </a:solidFill>
+            <a:prstDash val="solid"/>
+            <a:round/>
+            <a:headEnd type="none" w="sm" len="sm"/>
+            <a:tailEnd type="none" w="sm" len="sm"/>
+          </a:ln>
+        </p:spPr>
+        <p:txBody>
+          <a:bodyPr spcFirstLastPara="1" wrap="square" lIns="0" tIns="0" rIns="0" bIns="0" anchor="ctr" anchorCtr="0">
+            <a:noAutofit/>
+          </a:bodyPr>
+          <a:lstStyle/>
+          <a:p>
+            <a:pPr marL="0" lvl="0" indent="0" algn="l" rtl="0">
+              <a:spcBef>
+                <a:spcPts val="0"/>
+              </a:spcBef>
+              <a:spcAft>
+                <a:spcPts val="0"/>
+              </a:spcAft>
+              <a:buNone/>
+            </a:pPr>
+            <a:endParaRPr/>
+          </a:p>
+        </p:txBody>
+      </p:sp>
+      <p:sp>
+        <p:nvSpPr>
+          <p:cNvPr id="554" name="Google Shape;554;p32"/>
+          <p:cNvSpPr txBox="1"/>
+          <p:nvPr/>
+        </p:nvSpPr>
+        <p:spPr>
+          <a:xfrm>
+            <a:off x="6381750" y="2143125"/>
+            <a:ext cx="4762500" cy="762000"/>
+          </a:xfrm>
+          <a:prstGeom prst="rect">
+            <a:avLst/>
+          </a:prstGeom>
+          <a:noFill/>
+          <a:ln>
+            <a:noFill/>
+          </a:ln>
+        </p:spPr>
+        <p:txBody>
+          <a:bodyPr spcFirstLastPara="1" wrap="square" lIns="0" tIns="0" rIns="0" bIns="0" anchor="ctr" anchorCtr="0">
+            <a:noAutofit/>
+          </a:bodyPr>
+          <a:lstStyle/>
+          <a:p>
+            <a:pPr marL="0" lvl="0" indent="0" algn="l" rtl="0">
+              <a:spcBef>
+                <a:spcPts val="0"/>
+              </a:spcBef>
+              <a:spcAft>
+                <a:spcPts val="0"/>
+              </a:spcAft>
+              <a:buNone/>
+            </a:pPr>
+            <a:r>
+              <a:rPr lang="en-US" sz="1600" b="1">
+                <a:solidFill>
+                  <a:srgbClr val="0F172A"/>
+                </a:solidFill>
+                <a:latin typeface="DM Sans"/>
+                <a:ea typeface="DM Sans"/>
+                <a:cs typeface="DM Sans"/>
+                <a:sym typeface="DM Sans"/>
+              </a:rPr>
+              <a:t>Production Adoption Curve</a:t>
+            </a:r>
+            <a:endParaRPr sz="1600" b="1">
+              <a:solidFill>
+                <a:srgbClr val="0F172A"/>
+              </a:solidFill>
+              <a:latin typeface="DM Sans"/>
+              <a:ea typeface="DM Sans"/>
+              <a:cs typeface="DM Sans"/>
+              <a:sym typeface="DM Sans"/>
+            </a:endParaRPr>
+          </a:p>
+          <a:p>
+            <a:pPr marL="0" lvl="0" indent="0" algn="l" rtl="0">
+              <a:spcBef>
+                <a:spcPts val="300"/>
+              </a:spcBef>
+              <a:spcAft>
+                <a:spcPts val="0"/>
+              </a:spcAft>
+              <a:buNone/>
+            </a:pPr>
+            <a:r>
+              <a:rPr lang="en-US" sz="1100" b="0">
+                <a:solidFill>
+                  <a:srgbClr val="64748B"/>
+                </a:solidFill>
+                <a:latin typeface="DM Sans"/>
+                <a:ea typeface="DM Sans"/>
+                <a:cs typeface="DM Sans"/>
+                <a:sym typeface="DM Sans"/>
+              </a:rPr>
+              <a:t>Standardized deployment of specialized agent frameworks (2022 - 2024)</a:t>
+            </a:r>
+            <a:endParaRPr sz="1100" b="0">
+              <a:solidFill>
+                <a:srgbClr val="64748B"/>
+              </a:solidFill>
+              <a:latin typeface="DM Sans"/>
+              <a:ea typeface="DM Sans"/>
+              <a:cs typeface="DM Sans"/>
+              <a:sym typeface="DM Sans"/>
+            </a:endParaRPr>
+          </a:p>
+        </p:txBody>
+      </p:sp>
+      <p:pic>
+        <p:nvPicPr>
+          <p:cNvPr id="555" name="Google Shape;555;p32" descr="image.png"/>
+          <p:cNvPicPr preferRelativeResize="0"/>
+          <p:nvPr/>
+        </p:nvPicPr>
+        <p:blipFill rotWithShape="1">
+          <a:blip r:embed="rId5">
+            <a:alphaModFix/>
+          </a:blip>
+          <a:srcRect t="80" b="70"/>
+          <a:stretch/>
+        </p:blipFill>
+        <p:spPr>
+          <a:xfrm>
+            <a:off x="6238875" y="3083992"/>
+            <a:ext cx="5048400" cy="2169308"/>
+          </a:xfrm>
+          <a:prstGeom prst="rect">
+            <a:avLst/>
+          </a:prstGeom>
+          <a:noFill/>
+          <a:ln>
+            <a:noFill/>
+          </a:ln>
+        </p:spPr>
+      </p:pic>
+      <p:sp>
+        <p:nvSpPr>
+          <p:cNvPr id="556" name="Google Shape;556;p32"/>
+          <p:cNvSpPr txBox="1"/>
+          <p:nvPr/>
+        </p:nvSpPr>
+        <p:spPr>
+          <a:xfrm>
+            <a:off x="762000" y="1905000"/>
+            <a:ext cx="4953000" cy="3810000"/>
+          </a:xfrm>
+          <a:prstGeom prst="rect">
+            <a:avLst/>
+          </a:prstGeom>
+          <a:noFill/>
+          <a:ln>
+            <a:noFill/>
+          </a:ln>
+        </p:spPr>
+        <p:txBody>
+          <a:bodyPr spcFirstLastPara="1" wrap="square" lIns="0" tIns="0" rIns="0" bIns="0" anchor="ctr" anchorCtr="0">
+            <a:noAutofit/>
+          </a:bodyPr>
+          <a:lstStyle/>
+          <a:p>
+            <a:pPr marL="0" lvl="0" indent="0" algn="l" rtl="0">
+              <a:spcBef>
+                <a:spcPts val="0"/>
+              </a:spcBef>
+              <a:spcAft>
+                <a:spcPts val="0"/>
+              </a:spcAft>
+              <a:buNone/>
+            </a:pPr>
+            <a:r>
+              <a:rPr lang="en-US" sz="1800" b="1">
+                <a:solidFill>
+                  <a:srgbClr val="0F172A"/>
+                </a:solidFill>
+                <a:latin typeface="DM Sans"/>
+                <a:ea typeface="DM Sans"/>
+                <a:cs typeface="DM Sans"/>
+                <a:sym typeface="DM Sans"/>
+              </a:rPr>
+              <a:t>The Shift to Agentic Ecosystems</a:t>
+            </a:r>
+            <a:endParaRPr sz="1800" b="1">
+              <a:solidFill>
+                <a:srgbClr val="0F172A"/>
+              </a:solidFill>
+              <a:latin typeface="DM Sans"/>
+              <a:ea typeface="DM Sans"/>
+              <a:cs typeface="DM Sans"/>
+              <a:sym typeface="DM Sans"/>
+            </a:endParaRPr>
+          </a:p>
+          <a:p>
+            <a:pPr marL="0" lvl="0" indent="0" algn="l" rtl="0">
+              <a:spcBef>
+                <a:spcPts val="450"/>
+              </a:spcBef>
+              <a:spcAft>
+                <a:spcPts val="0"/>
+              </a:spcAft>
+              <a:buNone/>
+            </a:pPr>
+            <a:r>
+              <a:rPr lang="en-US" sz="1100" b="0">
+                <a:solidFill>
+                  <a:srgbClr val="475569"/>
+                </a:solidFill>
+                <a:latin typeface="Inter"/>
+                <a:ea typeface="Inter"/>
+                <a:cs typeface="Inter"/>
+                <a:sym typeface="Inter"/>
+              </a:rPr>
+              <a:t>Organizations are moving past simple prompting into production-grade architectures powered by specialized frameworks.</a:t>
+            </a:r>
+            <a:endParaRPr sz="1100" b="0">
+              <a:solidFill>
+                <a:srgbClr val="475569"/>
+              </a:solidFill>
+              <a:latin typeface="Inter"/>
+              <a:ea typeface="Inter"/>
+              <a:cs typeface="Inter"/>
+              <a:sym typeface="Inter"/>
+            </a:endParaRPr>
+          </a:p>
+          <a:p>
+            <a:pPr marL="0" lvl="0" indent="0" algn="l" rtl="0">
+              <a:spcBef>
+                <a:spcPts val="1125"/>
+              </a:spcBef>
+              <a:spcAft>
+                <a:spcPts val="0"/>
+              </a:spcAft>
+              <a:buNone/>
+            </a:pPr>
+            <a:r>
+              <a:rPr lang="en-US" sz="1800">
+                <a:solidFill>
+                  <a:srgbClr val="3B82F6"/>
+                </a:solidFill>
+                <a:latin typeface="Material Icons"/>
+                <a:ea typeface="Material Icons"/>
+                <a:cs typeface="Material Icons"/>
+                <a:sym typeface="Material Icons"/>
+              </a:rPr>
+              <a:t>hub</a:t>
+            </a:r>
+            <a:endParaRPr>
+              <a:latin typeface="Inter"/>
+              <a:ea typeface="Inter"/>
+              <a:cs typeface="Inter"/>
+              <a:sym typeface="Inter"/>
+            </a:endParaRPr>
+          </a:p>
+          <a:p>
+            <a:pPr marL="0" lvl="0" indent="0" algn="l" rtl="0">
+              <a:spcBef>
+                <a:spcPts val="0"/>
+              </a:spcBef>
+              <a:spcAft>
+                <a:spcPts val="0"/>
+              </a:spcAft>
+              <a:buNone/>
+            </a:pPr>
+            <a:r>
+              <a:rPr lang="en-US" sz="1300" b="1">
+                <a:solidFill>
+                  <a:srgbClr val="1E293B"/>
+                </a:solidFill>
+                <a:latin typeface="Inter"/>
+                <a:ea typeface="Inter"/>
+                <a:cs typeface="Inter"/>
+                <a:sym typeface="Inter"/>
+              </a:rPr>
+              <a:t>LangChain Orchestration</a:t>
+            </a:r>
+            <a:endParaRPr sz="1300" b="1">
+              <a:solidFill>
+                <a:srgbClr val="1E293B"/>
+              </a:solidFill>
+              <a:latin typeface="Inter"/>
+              <a:ea typeface="Inter"/>
+              <a:cs typeface="Inter"/>
+              <a:sym typeface="Inter"/>
+            </a:endParaRPr>
+          </a:p>
+          <a:p>
+            <a:pPr marL="0" lvl="0" indent="0" algn="l" rtl="0">
+              <a:spcBef>
+                <a:spcPts val="150"/>
+              </a:spcBef>
+              <a:spcAft>
+                <a:spcPts val="0"/>
+              </a:spcAft>
+              <a:buNone/>
+            </a:pPr>
+            <a:r>
+              <a:rPr lang="en-US" sz="1100" b="0">
+                <a:solidFill>
+                  <a:srgbClr val="64748B"/>
+                </a:solidFill>
+                <a:latin typeface="Inter"/>
+                <a:ea typeface="Inter"/>
+                <a:cs typeface="Inter"/>
+                <a:sym typeface="Inter"/>
+              </a:rPr>
+              <a:t>The standard library for chaining LLM cognitive steps with memory and APIs.</a:t>
+            </a:r>
+            <a:endParaRPr sz="1100" b="0">
+              <a:solidFill>
+                <a:srgbClr val="64748B"/>
+              </a:solidFill>
+              <a:latin typeface="Inter"/>
+              <a:ea typeface="Inter"/>
+              <a:cs typeface="Inter"/>
+              <a:sym typeface="Inter"/>
+            </a:endParaRPr>
+          </a:p>
+          <a:p>
+            <a:pPr marL="0" lvl="0" indent="0" algn="l" rtl="0">
+              <a:spcBef>
+                <a:spcPts val="1200"/>
+              </a:spcBef>
+              <a:spcAft>
+                <a:spcPts val="0"/>
+              </a:spcAft>
+              <a:buNone/>
+            </a:pPr>
+            <a:r>
+              <a:rPr lang="en-US" sz="1800">
+                <a:solidFill>
+                  <a:srgbClr val="10B981"/>
+                </a:solidFill>
+                <a:latin typeface="Material Icons"/>
+                <a:ea typeface="Material Icons"/>
+                <a:cs typeface="Material Icons"/>
+                <a:sym typeface="Material Icons"/>
+              </a:rPr>
+              <a:t>groups</a:t>
+            </a:r>
+            <a:endParaRPr>
+              <a:latin typeface="Inter"/>
+              <a:ea typeface="Inter"/>
+              <a:cs typeface="Inter"/>
+              <a:sym typeface="Inter"/>
+            </a:endParaRPr>
+          </a:p>
+          <a:p>
+            <a:pPr marL="0" lvl="0" indent="0" algn="l" rtl="0">
+              <a:spcBef>
+                <a:spcPts val="0"/>
+              </a:spcBef>
+              <a:spcAft>
+                <a:spcPts val="0"/>
+              </a:spcAft>
+              <a:buNone/>
+            </a:pPr>
+            <a:r>
+              <a:rPr lang="en-US" sz="1300" b="1">
+                <a:solidFill>
+                  <a:srgbClr val="1E293B"/>
+                </a:solidFill>
+                <a:latin typeface="Inter"/>
+                <a:ea typeface="Inter"/>
+                <a:cs typeface="Inter"/>
+                <a:sym typeface="Inter"/>
+              </a:rPr>
+              <a:t>CrewAI Collaborative Teams</a:t>
+            </a:r>
+            <a:endParaRPr sz="1300" b="1">
+              <a:solidFill>
+                <a:srgbClr val="1E293B"/>
+              </a:solidFill>
+              <a:latin typeface="Inter"/>
+              <a:ea typeface="Inter"/>
+              <a:cs typeface="Inter"/>
+              <a:sym typeface="Inter"/>
+            </a:endParaRPr>
+          </a:p>
+          <a:p>
+            <a:pPr marL="0" lvl="0" indent="0" algn="l" rtl="0">
+              <a:spcBef>
+                <a:spcPts val="150"/>
+              </a:spcBef>
+              <a:spcAft>
+                <a:spcPts val="0"/>
+              </a:spcAft>
+              <a:buNone/>
+            </a:pPr>
+            <a:r>
+              <a:rPr lang="en-US" sz="1100" b="0">
+                <a:solidFill>
+                  <a:srgbClr val="64748B"/>
+                </a:solidFill>
+                <a:latin typeface="Inter"/>
+                <a:ea typeface="Inter"/>
+                <a:cs typeface="Inter"/>
+                <a:sym typeface="Inter"/>
+              </a:rPr>
+              <a:t>Enables multi-agent role-playing, goals, and collaborative execution.</a:t>
+            </a:r>
+            <a:endParaRPr sz="1100" b="0">
+              <a:solidFill>
+                <a:srgbClr val="64748B"/>
+              </a:solidFill>
+              <a:latin typeface="Inter"/>
+              <a:ea typeface="Inter"/>
+              <a:cs typeface="Inter"/>
+              <a:sym typeface="Inter"/>
+            </a:endParaRPr>
+          </a:p>
+          <a:p>
+            <a:pPr marL="0" lvl="0" indent="0" algn="l" rtl="0">
+              <a:spcBef>
+                <a:spcPts val="1200"/>
+              </a:spcBef>
+              <a:spcAft>
+                <a:spcPts val="0"/>
+              </a:spcAft>
+              <a:buNone/>
+            </a:pPr>
+            <a:r>
+              <a:rPr lang="en-US" sz="1800">
+                <a:solidFill>
+                  <a:srgbClr val="8B5CF6"/>
+                </a:solidFill>
+                <a:latin typeface="Material Icons"/>
+                <a:ea typeface="Material Icons"/>
+                <a:cs typeface="Material Icons"/>
+                <a:sym typeface="Material Icons"/>
+              </a:rPr>
+              <a:t>sync</a:t>
+            </a:r>
+            <a:endParaRPr>
+              <a:latin typeface="Inter"/>
+              <a:ea typeface="Inter"/>
+              <a:cs typeface="Inter"/>
+              <a:sym typeface="Inter"/>
+            </a:endParaRPr>
+          </a:p>
+          <a:p>
+            <a:pPr marL="0" lvl="0" indent="0" algn="l" rtl="0">
+              <a:spcBef>
+                <a:spcPts val="0"/>
+              </a:spcBef>
+              <a:spcAft>
+                <a:spcPts val="0"/>
+              </a:spcAft>
+              <a:buNone/>
+            </a:pPr>
+            <a:r>
+              <a:rPr lang="en-US" sz="1300" b="1">
+                <a:solidFill>
+                  <a:srgbClr val="1E293B"/>
+                </a:solidFill>
+                <a:latin typeface="Inter"/>
+                <a:ea typeface="Inter"/>
+                <a:cs typeface="Inter"/>
+                <a:sym typeface="Inter"/>
+              </a:rPr>
+              <a:t>AutoGPT Autonomy</a:t>
+            </a:r>
+            <a:endParaRPr sz="1300" b="1">
+              <a:solidFill>
+                <a:srgbClr val="1E293B"/>
+              </a:solidFill>
+              <a:latin typeface="Inter"/>
+              <a:ea typeface="Inter"/>
+              <a:cs typeface="Inter"/>
+              <a:sym typeface="Inter"/>
+            </a:endParaRPr>
+          </a:p>
+          <a:p>
+            <a:pPr marL="0" lvl="0" indent="0" algn="l" rtl="0">
+              <a:spcBef>
+                <a:spcPts val="150"/>
+              </a:spcBef>
+              <a:spcAft>
+                <a:spcPts val="0"/>
+              </a:spcAft>
+              <a:buNone/>
+            </a:pPr>
+            <a:r>
+              <a:rPr lang="en-US" sz="1100" b="0">
+                <a:solidFill>
+                  <a:srgbClr val="64748B"/>
+                </a:solidFill>
+                <a:latin typeface="Inter"/>
+                <a:ea typeface="Inter"/>
+                <a:cs typeface="Inter"/>
+                <a:sym typeface="Inter"/>
+              </a:rPr>
+              <a:t>Pioneering self-directed loops that continuously refine tasks until goals are met.</a:t>
+            </a:r>
+            <a:endParaRPr sz="1100" b="0">
+              <a:solidFill>
+                <a:srgbClr val="64748B"/>
+              </a:solidFill>
+              <a:latin typeface="Inter"/>
+              <a:ea typeface="Inter"/>
+              <a:cs typeface="Inter"/>
+              <a:sym typeface="Inter"/>
+            </a:endParaRPr>
+          </a:p>
+        </p:txBody>
+      </p:sp>
+    </p:spTree>
+  </p:cSld>
+  <p:clrMapOvr>
+    <a:masterClrMapping/>
+  </p:clrMapOvr>
+</p:sld>
+</file>
+
+<file path=ppt/slides/slide3.xml><?xml version="1.0" encoding="utf-8"?>
 <p:sld xmlns:a="http://schemas.openxmlformats.org/drawingml/2006/main" xmlns:r="http://schemas.openxmlformats.org/officeDocument/2006/relationships" xmlns:p="http://schemas.openxmlformats.org/presentationml/2006/main">
   <p:cSld>
     <p:bg>
@@ -29341,972 +31912,7 @@
 </p:sld>
 </file>
 
-<file path=ppt/slides/slide20.xml><?xml version="1.0" encoding="utf-8"?>
-<p:sld xmlns:a="http://schemas.openxmlformats.org/drawingml/2006/main" xmlns:r="http://schemas.openxmlformats.org/officeDocument/2006/relationships" xmlns:p="http://schemas.openxmlformats.org/presentationml/2006/main">
-  <p:cSld>
-    <p:bg>
-      <p:bgPr>
-        <a:solidFill>
-          <a:srgbClr val="FFFFFF"/>
-        </a:solidFill>
-        <a:effectLst/>
-      </p:bgPr>
-    </p:bg>
-    <p:spTree>
-      <p:nvGrpSpPr>
-        <p:cNvPr id="1" name="Shape 544"/>
-        <p:cNvGrpSpPr/>
-        <p:nvPr/>
-      </p:nvGrpSpPr>
-      <p:grpSpPr>
-        <a:xfrm>
-          <a:off x="0" y="0"/>
-          <a:ext cx="0" cy="0"/>
-          <a:chOff x="0" y="0"/>
-          <a:chExt cx="0" cy="0"/>
-        </a:xfrm>
-      </p:grpSpPr>
-      <p:pic>
-        <p:nvPicPr>
-          <p:cNvPr id="545" name="Google Shape;545;p32" descr="image.png"/>
-          <p:cNvPicPr preferRelativeResize="0"/>
-          <p:nvPr/>
-        </p:nvPicPr>
-        <p:blipFill rotWithShape="1">
-          <a:blip r:embed="rId3">
-            <a:alphaModFix/>
-          </a:blip>
-          <a:srcRect/>
-          <a:stretch/>
-        </p:blipFill>
-        <p:spPr>
-          <a:xfrm>
-            <a:off x="5448300" y="190500"/>
-            <a:ext cx="1295400" cy="342900"/>
-          </a:xfrm>
-          <a:prstGeom prst="rect">
-            <a:avLst/>
-          </a:prstGeom>
-          <a:noFill/>
-          <a:ln>
-            <a:noFill/>
-          </a:ln>
-        </p:spPr>
-      </p:pic>
-      <p:pic>
-        <p:nvPicPr>
-          <p:cNvPr id="546" name="Google Shape;546;p32" descr="image.png"/>
-          <p:cNvPicPr preferRelativeResize="0"/>
-          <p:nvPr/>
-        </p:nvPicPr>
-        <p:blipFill rotWithShape="1">
-          <a:blip r:embed="rId4">
-            <a:alphaModFix/>
-          </a:blip>
-          <a:srcRect/>
-          <a:stretch/>
-        </p:blipFill>
-        <p:spPr>
-          <a:xfrm>
-            <a:off x="381000" y="6434137"/>
-            <a:ext cx="1390650" cy="276225"/>
-          </a:xfrm>
-          <a:prstGeom prst="rect">
-            <a:avLst/>
-          </a:prstGeom>
-          <a:noFill/>
-          <a:ln>
-            <a:noFill/>
-          </a:ln>
-        </p:spPr>
-      </p:pic>
-      <p:sp>
-        <p:nvSpPr>
-          <p:cNvPr id="547" name="Google Shape;547;p32"/>
-          <p:cNvSpPr/>
-          <p:nvPr/>
-        </p:nvSpPr>
-        <p:spPr>
-          <a:xfrm>
-            <a:off x="0" y="6286500"/>
-            <a:ext cx="12192000" cy="571500"/>
-          </a:xfrm>
-          <a:prstGeom prst="rect">
-            <a:avLst/>
-          </a:prstGeom>
-          <a:solidFill>
-            <a:srgbClr val="0F172A"/>
-          </a:solidFill>
-          <a:ln>
-            <a:noFill/>
-          </a:ln>
-        </p:spPr>
-        <p:txBody>
-          <a:bodyPr spcFirstLastPara="1" wrap="square" lIns="91425" tIns="45700" rIns="91425" bIns="45700" anchor="ctr" anchorCtr="0">
-            <a:noAutofit/>
-          </a:bodyPr>
-          <a:lstStyle/>
-          <a:p>
-            <a:pPr marL="0" marR="0" lvl="0" indent="0" algn="ctr" rtl="0">
-              <a:spcBef>
-                <a:spcPts val="0"/>
-              </a:spcBef>
-              <a:spcAft>
-                <a:spcPts val="0"/>
-              </a:spcAft>
-              <a:buNone/>
-            </a:pPr>
-            <a:endParaRPr sz="1800" b="0" i="0" u="none" strike="noStrike" cap="none">
-              <a:solidFill>
-                <a:schemeClr val="dk1"/>
-              </a:solidFill>
-              <a:latin typeface="Calibri"/>
-              <a:ea typeface="Calibri"/>
-              <a:cs typeface="Calibri"/>
-              <a:sym typeface="Calibri"/>
-            </a:endParaRPr>
-          </a:p>
-        </p:txBody>
-      </p:sp>
-      <p:sp>
-        <p:nvSpPr>
-          <p:cNvPr id="548" name="Google Shape;548;p32"/>
-          <p:cNvSpPr txBox="1"/>
-          <p:nvPr/>
-        </p:nvSpPr>
-        <p:spPr>
-          <a:xfrm>
-            <a:off x="381000" y="6465367"/>
-            <a:ext cx="11430000" cy="184800"/>
-          </a:xfrm>
-          <a:prstGeom prst="rect">
-            <a:avLst/>
-          </a:prstGeom>
-          <a:noFill/>
-          <a:ln>
-            <a:noFill/>
-          </a:ln>
-        </p:spPr>
-        <p:txBody>
-          <a:bodyPr spcFirstLastPara="1" wrap="square" lIns="0" tIns="0" rIns="0" bIns="0" anchor="ctr" anchorCtr="0">
-            <a:spAutoFit/>
-          </a:bodyPr>
-          <a:lstStyle/>
-          <a:p>
-            <a:pPr marL="0" marR="0" lvl="0" indent="0" algn="l" rtl="0">
-              <a:spcBef>
-                <a:spcPts val="0"/>
-              </a:spcBef>
-              <a:spcAft>
-                <a:spcPts val="0"/>
-              </a:spcAft>
-              <a:buNone/>
-            </a:pPr>
-            <a:r>
-              <a:rPr lang="en-US" sz="1200" b="0" i="0" u="none" strike="noStrike" cap="none" dirty="0">
-                <a:solidFill>
-                  <a:srgbClr val="FFFFFF"/>
-                </a:solidFill>
-                <a:latin typeface="Inter"/>
-                <a:ea typeface="Inter"/>
-                <a:cs typeface="Inter"/>
-                <a:sym typeface="Inter"/>
-              </a:rPr>
-              <a:t>The industry is rapidly shifting from </a:t>
-            </a:r>
-            <a:r>
-              <a:rPr lang="en-US" sz="1200" b="1" i="0" u="none" strike="noStrike" cap="none" dirty="0">
-                <a:solidFill>
-                  <a:srgbClr val="FFFFFF"/>
-                </a:solidFill>
-                <a:latin typeface="Inter"/>
-                <a:ea typeface="Inter"/>
-                <a:cs typeface="Inter"/>
-                <a:sym typeface="Inter"/>
-              </a:rPr>
-              <a:t>Prompting</a:t>
-            </a:r>
-            <a:r>
-              <a:rPr lang="en-US" sz="1200" b="0" i="0" u="none" strike="noStrike" cap="none" dirty="0">
-                <a:solidFill>
-                  <a:srgbClr val="FFFFFF"/>
-                </a:solidFill>
-                <a:latin typeface="Inter"/>
-                <a:ea typeface="Inter"/>
-                <a:cs typeface="Inter"/>
-                <a:sym typeface="Inter"/>
-              </a:rPr>
-              <a:t> to </a:t>
-            </a:r>
-            <a:r>
-              <a:rPr lang="en-US" sz="1200" b="1" i="0" u="none" strike="noStrike" cap="none" dirty="0">
-                <a:solidFill>
-                  <a:srgbClr val="FFFFFF"/>
-                </a:solidFill>
-                <a:latin typeface="Inter"/>
-                <a:ea typeface="Inter"/>
-                <a:cs typeface="Inter"/>
-                <a:sym typeface="Inter"/>
-              </a:rPr>
-              <a:t>Architecting Agents</a:t>
-            </a:r>
-            <a:r>
-              <a:rPr lang="en-US" sz="1200" b="0" i="0" u="none" strike="noStrike" cap="none" dirty="0">
-                <a:solidFill>
-                  <a:srgbClr val="FFFFFF"/>
-                </a:solidFill>
-                <a:latin typeface="Inter"/>
-                <a:ea typeface="Inter"/>
-                <a:cs typeface="Inter"/>
-                <a:sym typeface="Inter"/>
-              </a:rPr>
-              <a:t>.</a:t>
-            </a:r>
-            <a:endParaRPr dirty="0"/>
-          </a:p>
-        </p:txBody>
-      </p:sp>
-      <p:sp>
-        <p:nvSpPr>
-          <p:cNvPr id="549" name="Google Shape;549;p32"/>
-          <p:cNvSpPr txBox="1"/>
-          <p:nvPr/>
-        </p:nvSpPr>
-        <p:spPr>
-          <a:xfrm>
-            <a:off x="8953500" y="266700"/>
-            <a:ext cx="2857500" cy="184800"/>
-          </a:xfrm>
-          <a:prstGeom prst="rect">
-            <a:avLst/>
-          </a:prstGeom>
-          <a:noFill/>
-          <a:ln>
-            <a:noFill/>
-          </a:ln>
-        </p:spPr>
-        <p:txBody>
-          <a:bodyPr spcFirstLastPara="1" wrap="square" lIns="0" tIns="0" rIns="0" bIns="0" anchor="t" anchorCtr="0">
-            <a:spAutoFit/>
-          </a:bodyPr>
-          <a:lstStyle/>
-          <a:p>
-            <a:pPr marL="0" marR="0" lvl="0" indent="0" algn="r" rtl="0">
-              <a:spcBef>
-                <a:spcPts val="0"/>
-              </a:spcBef>
-              <a:spcAft>
-                <a:spcPts val="0"/>
-              </a:spcAft>
-              <a:buNone/>
-            </a:pPr>
-            <a:r>
-              <a:rPr lang="en-US" sz="1200" b="0" i="0" u="none" strike="noStrike" cap="none">
-                <a:solidFill>
-                  <a:srgbClr val="94A3B8"/>
-                </a:solidFill>
-                <a:latin typeface="Inter Medium"/>
-                <a:ea typeface="Inter Medium"/>
-                <a:cs typeface="Inter Medium"/>
-                <a:sym typeface="Inter Medium"/>
-              </a:rPr>
-              <a:t>Slide 20</a:t>
-            </a:r>
-            <a:endParaRPr/>
-          </a:p>
-        </p:txBody>
-      </p:sp>
-      <p:sp>
-        <p:nvSpPr>
-          <p:cNvPr id="550" name="Google Shape;550;p32"/>
-          <p:cNvSpPr txBox="1"/>
-          <p:nvPr/>
-        </p:nvSpPr>
-        <p:spPr>
-          <a:xfrm>
-            <a:off x="762000" y="1104900"/>
-            <a:ext cx="11201400" cy="461700"/>
-          </a:xfrm>
-          <a:prstGeom prst="rect">
-            <a:avLst/>
-          </a:prstGeom>
-          <a:noFill/>
-          <a:ln>
-            <a:noFill/>
-          </a:ln>
-        </p:spPr>
-        <p:txBody>
-          <a:bodyPr spcFirstLastPara="1" wrap="square" lIns="0" tIns="0" rIns="0" bIns="0" anchor="t" anchorCtr="0">
-            <a:spAutoFit/>
-          </a:bodyPr>
-          <a:lstStyle/>
-          <a:p>
-            <a:pPr marL="0" marR="0" lvl="0" indent="0" algn="l" rtl="0">
-              <a:spcBef>
-                <a:spcPts val="0"/>
-              </a:spcBef>
-              <a:spcAft>
-                <a:spcPts val="0"/>
-              </a:spcAft>
-              <a:buNone/>
-            </a:pPr>
-            <a:r>
-              <a:rPr lang="en-US" sz="3000" b="1" i="0" u="none" strike="noStrike" cap="none">
-                <a:solidFill>
-                  <a:srgbClr val="0F172A"/>
-                </a:solidFill>
-                <a:latin typeface="DM Sans"/>
-                <a:ea typeface="DM Sans"/>
-                <a:cs typeface="DM Sans"/>
-                <a:sym typeface="DM Sans"/>
-              </a:rPr>
-              <a:t>Framework Adoption Trends</a:t>
-            </a:r>
-            <a:endParaRPr/>
-          </a:p>
-        </p:txBody>
-      </p:sp>
-      <p:sp>
-        <p:nvSpPr>
-          <p:cNvPr id="551" name="Google Shape;551;p32"/>
-          <p:cNvSpPr/>
-          <p:nvPr/>
-        </p:nvSpPr>
-        <p:spPr>
-          <a:xfrm>
-            <a:off x="381000" y="266700"/>
-            <a:ext cx="381000" cy="190500"/>
-          </a:xfrm>
-          <a:prstGeom prst="roundRect">
-            <a:avLst>
-              <a:gd name="adj" fmla="val 50000"/>
-            </a:avLst>
-          </a:prstGeom>
-          <a:noFill/>
-          <a:ln w="19050" cap="flat" cmpd="sng">
-            <a:solidFill>
-              <a:srgbClr val="0F172A"/>
-            </a:solidFill>
-            <a:prstDash val="solid"/>
-            <a:round/>
-            <a:headEnd type="none" w="sm" len="sm"/>
-            <a:tailEnd type="none" w="sm" len="sm"/>
-          </a:ln>
-        </p:spPr>
-        <p:txBody>
-          <a:bodyPr spcFirstLastPara="1" wrap="square" lIns="91425" tIns="45700" rIns="91425" bIns="45700" anchor="ctr" anchorCtr="0">
-            <a:noAutofit/>
-          </a:bodyPr>
-          <a:lstStyle/>
-          <a:p>
-            <a:pPr marL="0" marR="0" lvl="0" indent="0" algn="ctr" rtl="0">
-              <a:spcBef>
-                <a:spcPts val="0"/>
-              </a:spcBef>
-              <a:spcAft>
-                <a:spcPts val="0"/>
-              </a:spcAft>
-              <a:buNone/>
-            </a:pPr>
-            <a:endParaRPr sz="1800" b="0" i="0" u="none" strike="noStrike" cap="none">
-              <a:solidFill>
-                <a:schemeClr val="dk1"/>
-              </a:solidFill>
-              <a:latin typeface="Calibri"/>
-              <a:ea typeface="Calibri"/>
-              <a:cs typeface="Calibri"/>
-              <a:sym typeface="Calibri"/>
-            </a:endParaRPr>
-          </a:p>
-        </p:txBody>
-      </p:sp>
-      <p:sp>
-        <p:nvSpPr>
-          <p:cNvPr id="552" name="Google Shape;552;p32"/>
-          <p:cNvSpPr/>
-          <p:nvPr/>
-        </p:nvSpPr>
-        <p:spPr>
-          <a:xfrm>
-            <a:off x="6134100" y="1943100"/>
-            <a:ext cx="5334000" cy="3810000"/>
-          </a:xfrm>
-          <a:prstGeom prst="roundRect">
-            <a:avLst>
-              <a:gd name="adj" fmla="val 4000"/>
-            </a:avLst>
-          </a:prstGeom>
-          <a:solidFill>
-            <a:srgbClr val="0F172A">
-              <a:alpha val="3999"/>
-            </a:srgbClr>
-          </a:solidFill>
-          <a:ln>
-            <a:noFill/>
-          </a:ln>
-        </p:spPr>
-        <p:txBody>
-          <a:bodyPr spcFirstLastPara="1" wrap="square" lIns="0" tIns="0" rIns="0" bIns="0" anchor="ctr" anchorCtr="0">
-            <a:noAutofit/>
-          </a:bodyPr>
-          <a:lstStyle/>
-          <a:p>
-            <a:pPr marL="0" lvl="0" indent="0" algn="l" rtl="0">
-              <a:spcBef>
-                <a:spcPts val="0"/>
-              </a:spcBef>
-              <a:spcAft>
-                <a:spcPts val="0"/>
-              </a:spcAft>
-              <a:buNone/>
-            </a:pPr>
-            <a:endParaRPr/>
-          </a:p>
-        </p:txBody>
-      </p:sp>
-      <p:sp>
-        <p:nvSpPr>
-          <p:cNvPr id="553" name="Google Shape;553;p32"/>
-          <p:cNvSpPr/>
-          <p:nvPr/>
-        </p:nvSpPr>
-        <p:spPr>
-          <a:xfrm>
-            <a:off x="6096000" y="1905000"/>
-            <a:ext cx="5334000" cy="3810000"/>
-          </a:xfrm>
-          <a:prstGeom prst="roundRect">
-            <a:avLst>
-              <a:gd name="adj" fmla="val 4000"/>
-            </a:avLst>
-          </a:prstGeom>
-          <a:solidFill>
-            <a:srgbClr val="FFFFFF"/>
-          </a:solidFill>
-          <a:ln w="14300" cap="flat" cmpd="sng">
-            <a:solidFill>
-              <a:srgbClr val="E2E8F0"/>
-            </a:solidFill>
-            <a:prstDash val="solid"/>
-            <a:round/>
-            <a:headEnd type="none" w="sm" len="sm"/>
-            <a:tailEnd type="none" w="sm" len="sm"/>
-          </a:ln>
-        </p:spPr>
-        <p:txBody>
-          <a:bodyPr spcFirstLastPara="1" wrap="square" lIns="0" tIns="0" rIns="0" bIns="0" anchor="ctr" anchorCtr="0">
-            <a:noAutofit/>
-          </a:bodyPr>
-          <a:lstStyle/>
-          <a:p>
-            <a:pPr marL="0" lvl="0" indent="0" algn="l" rtl="0">
-              <a:spcBef>
-                <a:spcPts val="0"/>
-              </a:spcBef>
-              <a:spcAft>
-                <a:spcPts val="0"/>
-              </a:spcAft>
-              <a:buNone/>
-            </a:pPr>
-            <a:endParaRPr/>
-          </a:p>
-        </p:txBody>
-      </p:sp>
-      <p:sp>
-        <p:nvSpPr>
-          <p:cNvPr id="554" name="Google Shape;554;p32"/>
-          <p:cNvSpPr txBox="1"/>
-          <p:nvPr/>
-        </p:nvSpPr>
-        <p:spPr>
-          <a:xfrm>
-            <a:off x="6381750" y="2143125"/>
-            <a:ext cx="4762500" cy="762000"/>
-          </a:xfrm>
-          <a:prstGeom prst="rect">
-            <a:avLst/>
-          </a:prstGeom>
-          <a:noFill/>
-          <a:ln>
-            <a:noFill/>
-          </a:ln>
-        </p:spPr>
-        <p:txBody>
-          <a:bodyPr spcFirstLastPara="1" wrap="square" lIns="0" tIns="0" rIns="0" bIns="0" anchor="ctr" anchorCtr="0">
-            <a:noAutofit/>
-          </a:bodyPr>
-          <a:lstStyle/>
-          <a:p>
-            <a:pPr marL="0" lvl="0" indent="0" algn="l" rtl="0">
-              <a:spcBef>
-                <a:spcPts val="0"/>
-              </a:spcBef>
-              <a:spcAft>
-                <a:spcPts val="0"/>
-              </a:spcAft>
-              <a:buNone/>
-            </a:pPr>
-            <a:r>
-              <a:rPr lang="en-US" sz="1600" b="1">
-                <a:solidFill>
-                  <a:srgbClr val="0F172A"/>
-                </a:solidFill>
-                <a:latin typeface="DM Sans"/>
-                <a:ea typeface="DM Sans"/>
-                <a:cs typeface="DM Sans"/>
-                <a:sym typeface="DM Sans"/>
-              </a:rPr>
-              <a:t>Production Adoption Curve</a:t>
-            </a:r>
-            <a:endParaRPr sz="1600" b="1">
-              <a:solidFill>
-                <a:srgbClr val="0F172A"/>
-              </a:solidFill>
-              <a:latin typeface="DM Sans"/>
-              <a:ea typeface="DM Sans"/>
-              <a:cs typeface="DM Sans"/>
-              <a:sym typeface="DM Sans"/>
-            </a:endParaRPr>
-          </a:p>
-          <a:p>
-            <a:pPr marL="0" lvl="0" indent="0" algn="l" rtl="0">
-              <a:spcBef>
-                <a:spcPts val="300"/>
-              </a:spcBef>
-              <a:spcAft>
-                <a:spcPts val="0"/>
-              </a:spcAft>
-              <a:buNone/>
-            </a:pPr>
-            <a:r>
-              <a:rPr lang="en-US" sz="1100" b="0">
-                <a:solidFill>
-                  <a:srgbClr val="64748B"/>
-                </a:solidFill>
-                <a:latin typeface="DM Sans"/>
-                <a:ea typeface="DM Sans"/>
-                <a:cs typeface="DM Sans"/>
-                <a:sym typeface="DM Sans"/>
-              </a:rPr>
-              <a:t>Standardized deployment of specialized agent frameworks (2022 - 2024)</a:t>
-            </a:r>
-            <a:endParaRPr sz="1100" b="0">
-              <a:solidFill>
-                <a:srgbClr val="64748B"/>
-              </a:solidFill>
-              <a:latin typeface="DM Sans"/>
-              <a:ea typeface="DM Sans"/>
-              <a:cs typeface="DM Sans"/>
-              <a:sym typeface="DM Sans"/>
-            </a:endParaRPr>
-          </a:p>
-        </p:txBody>
-      </p:sp>
-      <p:pic>
-        <p:nvPicPr>
-          <p:cNvPr id="555" name="Google Shape;555;p32" descr="image.png"/>
-          <p:cNvPicPr preferRelativeResize="0"/>
-          <p:nvPr/>
-        </p:nvPicPr>
-        <p:blipFill rotWithShape="1">
-          <a:blip r:embed="rId5">
-            <a:alphaModFix/>
-          </a:blip>
-          <a:srcRect t="80" b="70"/>
-          <a:stretch/>
-        </p:blipFill>
-        <p:spPr>
-          <a:xfrm>
-            <a:off x="6238875" y="3083992"/>
-            <a:ext cx="5048400" cy="2169308"/>
-          </a:xfrm>
-          <a:prstGeom prst="rect">
-            <a:avLst/>
-          </a:prstGeom>
-          <a:noFill/>
-          <a:ln>
-            <a:noFill/>
-          </a:ln>
-        </p:spPr>
-      </p:pic>
-      <p:sp>
-        <p:nvSpPr>
-          <p:cNvPr id="556" name="Google Shape;556;p32"/>
-          <p:cNvSpPr txBox="1"/>
-          <p:nvPr/>
-        </p:nvSpPr>
-        <p:spPr>
-          <a:xfrm>
-            <a:off x="762000" y="1905000"/>
-            <a:ext cx="4953000" cy="3810000"/>
-          </a:xfrm>
-          <a:prstGeom prst="rect">
-            <a:avLst/>
-          </a:prstGeom>
-          <a:noFill/>
-          <a:ln>
-            <a:noFill/>
-          </a:ln>
-        </p:spPr>
-        <p:txBody>
-          <a:bodyPr spcFirstLastPara="1" wrap="square" lIns="0" tIns="0" rIns="0" bIns="0" anchor="ctr" anchorCtr="0">
-            <a:noAutofit/>
-          </a:bodyPr>
-          <a:lstStyle/>
-          <a:p>
-            <a:pPr marL="0" lvl="0" indent="0" algn="l" rtl="0">
-              <a:spcBef>
-                <a:spcPts val="0"/>
-              </a:spcBef>
-              <a:spcAft>
-                <a:spcPts val="0"/>
-              </a:spcAft>
-              <a:buNone/>
-            </a:pPr>
-            <a:r>
-              <a:rPr lang="en-US" sz="1800" b="1">
-                <a:solidFill>
-                  <a:srgbClr val="0F172A"/>
-                </a:solidFill>
-                <a:latin typeface="DM Sans"/>
-                <a:ea typeface="DM Sans"/>
-                <a:cs typeface="DM Sans"/>
-                <a:sym typeface="DM Sans"/>
-              </a:rPr>
-              <a:t>The Shift to Agentic Ecosystems</a:t>
-            </a:r>
-            <a:endParaRPr sz="1800" b="1">
-              <a:solidFill>
-                <a:srgbClr val="0F172A"/>
-              </a:solidFill>
-              <a:latin typeface="DM Sans"/>
-              <a:ea typeface="DM Sans"/>
-              <a:cs typeface="DM Sans"/>
-              <a:sym typeface="DM Sans"/>
-            </a:endParaRPr>
-          </a:p>
-          <a:p>
-            <a:pPr marL="0" lvl="0" indent="0" algn="l" rtl="0">
-              <a:spcBef>
-                <a:spcPts val="450"/>
-              </a:spcBef>
-              <a:spcAft>
-                <a:spcPts val="0"/>
-              </a:spcAft>
-              <a:buNone/>
-            </a:pPr>
-            <a:r>
-              <a:rPr lang="en-US" sz="1100" b="0">
-                <a:solidFill>
-                  <a:srgbClr val="475569"/>
-                </a:solidFill>
-                <a:latin typeface="Inter"/>
-                <a:ea typeface="Inter"/>
-                <a:cs typeface="Inter"/>
-                <a:sym typeface="Inter"/>
-              </a:rPr>
-              <a:t>Organizations are moving past simple prompting into production-grade architectures powered by specialized frameworks.</a:t>
-            </a:r>
-            <a:endParaRPr sz="1100" b="0">
-              <a:solidFill>
-                <a:srgbClr val="475569"/>
-              </a:solidFill>
-              <a:latin typeface="Inter"/>
-              <a:ea typeface="Inter"/>
-              <a:cs typeface="Inter"/>
-              <a:sym typeface="Inter"/>
-            </a:endParaRPr>
-          </a:p>
-          <a:p>
-            <a:pPr marL="0" lvl="0" indent="0" algn="l" rtl="0">
-              <a:spcBef>
-                <a:spcPts val="1125"/>
-              </a:spcBef>
-              <a:spcAft>
-                <a:spcPts val="0"/>
-              </a:spcAft>
-              <a:buNone/>
-            </a:pPr>
-            <a:r>
-              <a:rPr lang="en-US" sz="1800">
-                <a:solidFill>
-                  <a:srgbClr val="3B82F6"/>
-                </a:solidFill>
-                <a:latin typeface="Material Icons"/>
-                <a:ea typeface="Material Icons"/>
-                <a:cs typeface="Material Icons"/>
-                <a:sym typeface="Material Icons"/>
-              </a:rPr>
-              <a:t>hub</a:t>
-            </a:r>
-            <a:endParaRPr>
-              <a:latin typeface="Inter"/>
-              <a:ea typeface="Inter"/>
-              <a:cs typeface="Inter"/>
-              <a:sym typeface="Inter"/>
-            </a:endParaRPr>
-          </a:p>
-          <a:p>
-            <a:pPr marL="0" lvl="0" indent="0" algn="l" rtl="0">
-              <a:spcBef>
-                <a:spcPts val="0"/>
-              </a:spcBef>
-              <a:spcAft>
-                <a:spcPts val="0"/>
-              </a:spcAft>
-              <a:buNone/>
-            </a:pPr>
-            <a:r>
-              <a:rPr lang="en-US" sz="1300" b="1">
-                <a:solidFill>
-                  <a:srgbClr val="1E293B"/>
-                </a:solidFill>
-                <a:latin typeface="Inter"/>
-                <a:ea typeface="Inter"/>
-                <a:cs typeface="Inter"/>
-                <a:sym typeface="Inter"/>
-              </a:rPr>
-              <a:t>LangChain Orchestration</a:t>
-            </a:r>
-            <a:endParaRPr sz="1300" b="1">
-              <a:solidFill>
-                <a:srgbClr val="1E293B"/>
-              </a:solidFill>
-              <a:latin typeface="Inter"/>
-              <a:ea typeface="Inter"/>
-              <a:cs typeface="Inter"/>
-              <a:sym typeface="Inter"/>
-            </a:endParaRPr>
-          </a:p>
-          <a:p>
-            <a:pPr marL="0" lvl="0" indent="0" algn="l" rtl="0">
-              <a:spcBef>
-                <a:spcPts val="150"/>
-              </a:spcBef>
-              <a:spcAft>
-                <a:spcPts val="0"/>
-              </a:spcAft>
-              <a:buNone/>
-            </a:pPr>
-            <a:r>
-              <a:rPr lang="en-US" sz="1100" b="0">
-                <a:solidFill>
-                  <a:srgbClr val="64748B"/>
-                </a:solidFill>
-                <a:latin typeface="Inter"/>
-                <a:ea typeface="Inter"/>
-                <a:cs typeface="Inter"/>
-                <a:sym typeface="Inter"/>
-              </a:rPr>
-              <a:t>The standard library for chaining LLM cognitive steps with memory and APIs.</a:t>
-            </a:r>
-            <a:endParaRPr sz="1100" b="0">
-              <a:solidFill>
-                <a:srgbClr val="64748B"/>
-              </a:solidFill>
-              <a:latin typeface="Inter"/>
-              <a:ea typeface="Inter"/>
-              <a:cs typeface="Inter"/>
-              <a:sym typeface="Inter"/>
-            </a:endParaRPr>
-          </a:p>
-          <a:p>
-            <a:pPr marL="0" lvl="0" indent="0" algn="l" rtl="0">
-              <a:spcBef>
-                <a:spcPts val="1200"/>
-              </a:spcBef>
-              <a:spcAft>
-                <a:spcPts val="0"/>
-              </a:spcAft>
-              <a:buNone/>
-            </a:pPr>
-            <a:r>
-              <a:rPr lang="en-US" sz="1800">
-                <a:solidFill>
-                  <a:srgbClr val="10B981"/>
-                </a:solidFill>
-                <a:latin typeface="Material Icons"/>
-                <a:ea typeface="Material Icons"/>
-                <a:cs typeface="Material Icons"/>
-                <a:sym typeface="Material Icons"/>
-              </a:rPr>
-              <a:t>groups</a:t>
-            </a:r>
-            <a:endParaRPr>
-              <a:latin typeface="Inter"/>
-              <a:ea typeface="Inter"/>
-              <a:cs typeface="Inter"/>
-              <a:sym typeface="Inter"/>
-            </a:endParaRPr>
-          </a:p>
-          <a:p>
-            <a:pPr marL="0" lvl="0" indent="0" algn="l" rtl="0">
-              <a:spcBef>
-                <a:spcPts val="0"/>
-              </a:spcBef>
-              <a:spcAft>
-                <a:spcPts val="0"/>
-              </a:spcAft>
-              <a:buNone/>
-            </a:pPr>
-            <a:r>
-              <a:rPr lang="en-US" sz="1300" b="1">
-                <a:solidFill>
-                  <a:srgbClr val="1E293B"/>
-                </a:solidFill>
-                <a:latin typeface="Inter"/>
-                <a:ea typeface="Inter"/>
-                <a:cs typeface="Inter"/>
-                <a:sym typeface="Inter"/>
-              </a:rPr>
-              <a:t>CrewAI Collaborative Teams</a:t>
-            </a:r>
-            <a:endParaRPr sz="1300" b="1">
-              <a:solidFill>
-                <a:srgbClr val="1E293B"/>
-              </a:solidFill>
-              <a:latin typeface="Inter"/>
-              <a:ea typeface="Inter"/>
-              <a:cs typeface="Inter"/>
-              <a:sym typeface="Inter"/>
-            </a:endParaRPr>
-          </a:p>
-          <a:p>
-            <a:pPr marL="0" lvl="0" indent="0" algn="l" rtl="0">
-              <a:spcBef>
-                <a:spcPts val="150"/>
-              </a:spcBef>
-              <a:spcAft>
-                <a:spcPts val="0"/>
-              </a:spcAft>
-              <a:buNone/>
-            </a:pPr>
-            <a:r>
-              <a:rPr lang="en-US" sz="1100" b="0">
-                <a:solidFill>
-                  <a:srgbClr val="64748B"/>
-                </a:solidFill>
-                <a:latin typeface="Inter"/>
-                <a:ea typeface="Inter"/>
-                <a:cs typeface="Inter"/>
-                <a:sym typeface="Inter"/>
-              </a:rPr>
-              <a:t>Enables multi-agent role-playing, goals, and collaborative execution.</a:t>
-            </a:r>
-            <a:endParaRPr sz="1100" b="0">
-              <a:solidFill>
-                <a:srgbClr val="64748B"/>
-              </a:solidFill>
-              <a:latin typeface="Inter"/>
-              <a:ea typeface="Inter"/>
-              <a:cs typeface="Inter"/>
-              <a:sym typeface="Inter"/>
-            </a:endParaRPr>
-          </a:p>
-          <a:p>
-            <a:pPr marL="0" lvl="0" indent="0" algn="l" rtl="0">
-              <a:spcBef>
-                <a:spcPts val="1200"/>
-              </a:spcBef>
-              <a:spcAft>
-                <a:spcPts val="0"/>
-              </a:spcAft>
-              <a:buNone/>
-            </a:pPr>
-            <a:r>
-              <a:rPr lang="en-US" sz="1800">
-                <a:solidFill>
-                  <a:srgbClr val="8B5CF6"/>
-                </a:solidFill>
-                <a:latin typeface="Material Icons"/>
-                <a:ea typeface="Material Icons"/>
-                <a:cs typeface="Material Icons"/>
-                <a:sym typeface="Material Icons"/>
-              </a:rPr>
-              <a:t>sync</a:t>
-            </a:r>
-            <a:endParaRPr>
-              <a:latin typeface="Inter"/>
-              <a:ea typeface="Inter"/>
-              <a:cs typeface="Inter"/>
-              <a:sym typeface="Inter"/>
-            </a:endParaRPr>
-          </a:p>
-          <a:p>
-            <a:pPr marL="0" lvl="0" indent="0" algn="l" rtl="0">
-              <a:spcBef>
-                <a:spcPts val="0"/>
-              </a:spcBef>
-              <a:spcAft>
-                <a:spcPts val="0"/>
-              </a:spcAft>
-              <a:buNone/>
-            </a:pPr>
-            <a:r>
-              <a:rPr lang="en-US" sz="1300" b="1">
-                <a:solidFill>
-                  <a:srgbClr val="1E293B"/>
-                </a:solidFill>
-                <a:latin typeface="Inter"/>
-                <a:ea typeface="Inter"/>
-                <a:cs typeface="Inter"/>
-                <a:sym typeface="Inter"/>
-              </a:rPr>
-              <a:t>AutoGPT Autonomy</a:t>
-            </a:r>
-            <a:endParaRPr sz="1300" b="1">
-              <a:solidFill>
-                <a:srgbClr val="1E293B"/>
-              </a:solidFill>
-              <a:latin typeface="Inter"/>
-              <a:ea typeface="Inter"/>
-              <a:cs typeface="Inter"/>
-              <a:sym typeface="Inter"/>
-            </a:endParaRPr>
-          </a:p>
-          <a:p>
-            <a:pPr marL="0" lvl="0" indent="0" algn="l" rtl="0">
-              <a:spcBef>
-                <a:spcPts val="150"/>
-              </a:spcBef>
-              <a:spcAft>
-                <a:spcPts val="0"/>
-              </a:spcAft>
-              <a:buNone/>
-            </a:pPr>
-            <a:r>
-              <a:rPr lang="en-US" sz="1100" b="0">
-                <a:solidFill>
-                  <a:srgbClr val="64748B"/>
-                </a:solidFill>
-                <a:latin typeface="Inter"/>
-                <a:ea typeface="Inter"/>
-                <a:cs typeface="Inter"/>
-                <a:sym typeface="Inter"/>
-              </a:rPr>
-              <a:t>Pioneering self-directed loops that continuously refine tasks until goals are met.</a:t>
-            </a:r>
-            <a:endParaRPr sz="1100" b="0">
-              <a:solidFill>
-                <a:srgbClr val="64748B"/>
-              </a:solidFill>
-              <a:latin typeface="Inter"/>
-              <a:ea typeface="Inter"/>
-              <a:cs typeface="Inter"/>
-              <a:sym typeface="Inter"/>
-            </a:endParaRPr>
-          </a:p>
-        </p:txBody>
-      </p:sp>
-    </p:spTree>
-  </p:cSld>
-  <p:clrMapOvr>
-    <a:masterClrMapping/>
-  </p:clrMapOvr>
-</p:sld>
-</file>
-
-<file path=ppt/slides/slide3.xml><?xml version="1.0" encoding="utf-8"?>
+<file path=ppt/slides/slide4.xml><?xml version="1.0" encoding="utf-8"?>
 <p:sld xmlns:a="http://schemas.openxmlformats.org/drawingml/2006/main" xmlns:r="http://schemas.openxmlformats.org/officeDocument/2006/relationships" xmlns:p="http://schemas.openxmlformats.org/presentationml/2006/main">
   <p:cSld>
     <p:bg>
@@ -32013,7 +33619,7 @@
 </p:sld>
 </file>
 
-<file path=ppt/slides/slide4.xml><?xml version="1.0" encoding="utf-8"?>
+<file path=ppt/slides/slide5.xml><?xml version="1.0" encoding="utf-8"?>
 <p:sld xmlns:a="http://schemas.openxmlformats.org/drawingml/2006/main" xmlns:r="http://schemas.openxmlformats.org/officeDocument/2006/relationships" xmlns:p="http://schemas.openxmlformats.org/presentationml/2006/main">
   <p:cSld>
     <p:bg>
@@ -33324,7 +34930,7 @@
 </p:sld>
 </file>
 
-<file path=ppt/slides/slide5.xml><?xml version="1.0" encoding="utf-8"?>
+<file path=ppt/slides/slide6.xml><?xml version="1.0" encoding="utf-8"?>
 <p:sld xmlns:a="http://schemas.openxmlformats.org/drawingml/2006/main" xmlns:r="http://schemas.openxmlformats.org/officeDocument/2006/relationships" xmlns:p="http://schemas.openxmlformats.org/presentationml/2006/main">
   <p:cSld>
     <p:bg>
@@ -34642,7 +36248,7 @@
 </p:sld>
 </file>
 
-<file path=ppt/slides/slide6.xml><?xml version="1.0" encoding="utf-8"?>
+<file path=ppt/slides/slide7.xml><?xml version="1.0" encoding="utf-8"?>
 <p:sld xmlns:a="http://schemas.openxmlformats.org/drawingml/2006/main" xmlns:r="http://schemas.openxmlformats.org/officeDocument/2006/relationships" xmlns:p="http://schemas.openxmlformats.org/presentationml/2006/main">
   <p:cSld>
     <p:bg>
@@ -35512,7 +37118,7 @@
 </p:sld>
 </file>
 
-<file path=ppt/slides/slide7.xml><?xml version="1.0" encoding="utf-8"?>
+<file path=ppt/slides/slide8.xml><?xml version="1.0" encoding="utf-8"?>
 <p:sld xmlns:a="http://schemas.openxmlformats.org/drawingml/2006/main" xmlns:r="http://schemas.openxmlformats.org/officeDocument/2006/relationships" xmlns:p="http://schemas.openxmlformats.org/presentationml/2006/main">
   <p:cSld>
     <p:bg>
@@ -35895,7 +37501,7 @@
 </p:sld>
 </file>
 
-<file path=ppt/slides/slide8.xml><?xml version="1.0" encoding="utf-8"?>
+<file path=ppt/slides/slide9.xml><?xml version="1.0" encoding="utf-8"?>
 <p:sld xmlns:a="http://schemas.openxmlformats.org/drawingml/2006/main" xmlns:r="http://schemas.openxmlformats.org/officeDocument/2006/relationships" xmlns:p="http://schemas.openxmlformats.org/presentationml/2006/main">
   <p:cSld>
     <p:bg>
@@ -36916,1193 +38522,6 @@
               <a:ea typeface="Inter"/>
               <a:cs typeface="Inter"/>
               <a:sym typeface="Inter"/>
-            </a:endParaRPr>
-          </a:p>
-        </p:txBody>
-      </p:sp>
-    </p:spTree>
-  </p:cSld>
-  <p:clrMapOvr>
-    <a:masterClrMapping/>
-  </p:clrMapOvr>
-</p:sld>
-</file>
-
-<file path=ppt/slides/slide9.xml><?xml version="1.0" encoding="utf-8"?>
-<p:sld xmlns:a="http://schemas.openxmlformats.org/drawingml/2006/main" xmlns:r="http://schemas.openxmlformats.org/officeDocument/2006/relationships" xmlns:p="http://schemas.openxmlformats.org/presentationml/2006/main">
-  <p:cSld>
-    <p:bg>
-      <p:bgPr>
-        <a:solidFill>
-          <a:srgbClr val="FFFFFF"/>
-        </a:solidFill>
-        <a:effectLst/>
-      </p:bgPr>
-    </p:bg>
-    <p:spTree>
-      <p:nvGrpSpPr>
-        <p:cNvPr id="1" name="Shape 281"/>
-        <p:cNvGrpSpPr/>
-        <p:nvPr/>
-      </p:nvGrpSpPr>
-      <p:grpSpPr>
-        <a:xfrm>
-          <a:off x="0" y="0"/>
-          <a:ext cx="0" cy="0"/>
-          <a:chOff x="0" y="0"/>
-          <a:chExt cx="0" cy="0"/>
-        </a:xfrm>
-      </p:grpSpPr>
-      <p:pic>
-        <p:nvPicPr>
-          <p:cNvPr id="282" name="Google Shape;282;p21" descr="image.png"/>
-          <p:cNvPicPr preferRelativeResize="0"/>
-          <p:nvPr/>
-        </p:nvPicPr>
-        <p:blipFill rotWithShape="1">
-          <a:blip r:embed="rId3">
-            <a:alphaModFix/>
-          </a:blip>
-          <a:srcRect/>
-          <a:stretch/>
-        </p:blipFill>
-        <p:spPr>
-          <a:xfrm>
-            <a:off x="5448300" y="190500"/>
-            <a:ext cx="1295400" cy="342900"/>
-          </a:xfrm>
-          <a:prstGeom prst="rect">
-            <a:avLst/>
-          </a:prstGeom>
-          <a:noFill/>
-          <a:ln>
-            <a:noFill/>
-          </a:ln>
-        </p:spPr>
-      </p:pic>
-      <p:pic>
-        <p:nvPicPr>
-          <p:cNvPr id="283" name="Google Shape;283;p21" descr="image.png"/>
-          <p:cNvPicPr preferRelativeResize="0"/>
-          <p:nvPr/>
-        </p:nvPicPr>
-        <p:blipFill rotWithShape="1">
-          <a:blip r:embed="rId4">
-            <a:alphaModFix/>
-          </a:blip>
-          <a:srcRect/>
-          <a:stretch/>
-        </p:blipFill>
-        <p:spPr>
-          <a:xfrm>
-            <a:off x="381000" y="6434137"/>
-            <a:ext cx="1390650" cy="276225"/>
-          </a:xfrm>
-          <a:prstGeom prst="rect">
-            <a:avLst/>
-          </a:prstGeom>
-          <a:noFill/>
-          <a:ln>
-            <a:noFill/>
-          </a:ln>
-        </p:spPr>
-      </p:pic>
-      <p:grpSp>
-        <p:nvGrpSpPr>
-          <p:cNvPr id="284" name="Google Shape;284;p21"/>
-          <p:cNvGrpSpPr/>
-          <p:nvPr/>
-        </p:nvGrpSpPr>
-        <p:grpSpPr>
-          <a:xfrm>
-            <a:off x="6000750" y="1809750"/>
-            <a:ext cx="5429400" cy="4000500"/>
-            <a:chOff x="6000750" y="1809750"/>
-            <a:chExt cx="5429400" cy="4000500"/>
-          </a:xfrm>
-        </p:grpSpPr>
-        <p:sp>
-          <p:nvSpPr>
-            <p:cNvPr id="285" name="Google Shape;285;p21"/>
-            <p:cNvSpPr/>
-            <p:nvPr/>
-          </p:nvSpPr>
-          <p:spPr>
-            <a:xfrm>
-              <a:off x="6000750" y="1809750"/>
-              <a:ext cx="5429400" cy="4000500"/>
-            </a:xfrm>
-            <a:prstGeom prst="roundRect">
-              <a:avLst>
-                <a:gd name="adj" fmla="val 2857"/>
-              </a:avLst>
-            </a:prstGeom>
-            <a:solidFill>
-              <a:srgbClr val="F8FAFC"/>
-            </a:solidFill>
-            <a:ln w="14300" cap="flat" cmpd="sng">
-              <a:solidFill>
-                <a:srgbClr val="E2E8F0"/>
-              </a:solidFill>
-              <a:prstDash val="solid"/>
-              <a:round/>
-              <a:headEnd type="none" w="sm" len="sm"/>
-              <a:tailEnd type="none" w="sm" len="sm"/>
-            </a:ln>
-          </p:spPr>
-          <p:txBody>
-            <a:bodyPr spcFirstLastPara="1" wrap="square" lIns="0" tIns="0" rIns="0" bIns="0" anchor="ctr" anchorCtr="0">
-              <a:noAutofit/>
-            </a:bodyPr>
-            <a:lstStyle/>
-            <a:p>
-              <a:pPr marL="0" lvl="0" indent="0" algn="l" rtl="0">
-                <a:spcBef>
-                  <a:spcPts val="0"/>
-                </a:spcBef>
-                <a:spcAft>
-                  <a:spcPts val="0"/>
-                </a:spcAft>
-                <a:buNone/>
-              </a:pPr>
-              <a:endParaRPr/>
-            </a:p>
-          </p:txBody>
-        </p:sp>
-        <p:pic>
-          <p:nvPicPr>
-            <p:cNvPr id="286" name="Google Shape;286;p21"/>
-            <p:cNvPicPr preferRelativeResize="0"/>
-            <p:nvPr/>
-          </p:nvPicPr>
-          <p:blipFill rotWithShape="1">
-            <a:blip r:embed="rId5">
-              <a:alphaModFix/>
-            </a:blip>
-            <a:srcRect t="787" b="797"/>
-            <a:stretch/>
-          </p:blipFill>
-          <p:spPr>
-            <a:xfrm>
-              <a:off x="6191250" y="1952625"/>
-              <a:ext cx="5048400" cy="3714900"/>
-            </a:xfrm>
-            <a:prstGeom prst="rect">
-              <a:avLst/>
-            </a:prstGeom>
-            <a:noFill/>
-            <a:ln>
-              <a:noFill/>
-            </a:ln>
-          </p:spPr>
-        </p:pic>
-      </p:grpSp>
-      <p:grpSp>
-        <p:nvGrpSpPr>
-          <p:cNvPr id="287" name="Google Shape;287;p21"/>
-          <p:cNvGrpSpPr/>
-          <p:nvPr/>
-        </p:nvGrpSpPr>
-        <p:grpSpPr>
-          <a:xfrm>
-            <a:off x="762000" y="2381250"/>
-            <a:ext cx="4762500" cy="809700"/>
-            <a:chOff x="0" y="0"/>
-            <a:chExt cx="4762500" cy="809700"/>
-          </a:xfrm>
-        </p:grpSpPr>
-        <p:sp>
-          <p:nvSpPr>
-            <p:cNvPr id="288" name="Google Shape;288;p21"/>
-            <p:cNvSpPr/>
-            <p:nvPr/>
-          </p:nvSpPr>
-          <p:spPr>
-            <a:xfrm>
-              <a:off x="0" y="0"/>
-              <a:ext cx="4762500" cy="809700"/>
-            </a:xfrm>
-            <a:prstGeom prst="roundRect">
-              <a:avLst>
-                <a:gd name="adj" fmla="val 9411"/>
-              </a:avLst>
-            </a:prstGeom>
-            <a:solidFill>
-              <a:srgbClr val="EFF6FF"/>
-            </a:solidFill>
-            <a:ln w="9525" cap="flat" cmpd="sng">
-              <a:solidFill>
-                <a:srgbClr val="DBEAFE"/>
-              </a:solidFill>
-              <a:prstDash val="solid"/>
-              <a:round/>
-              <a:headEnd type="none" w="sm" len="sm"/>
-              <a:tailEnd type="none" w="sm" len="sm"/>
-            </a:ln>
-          </p:spPr>
-          <p:txBody>
-            <a:bodyPr spcFirstLastPara="1" wrap="square" lIns="0" tIns="0" rIns="0" bIns="0" anchor="ctr" anchorCtr="0">
-              <a:noAutofit/>
-            </a:bodyPr>
-            <a:lstStyle/>
-            <a:p>
-              <a:pPr marL="0" lvl="0" indent="0" algn="l" rtl="0">
-                <a:spcBef>
-                  <a:spcPts val="0"/>
-                </a:spcBef>
-                <a:spcAft>
-                  <a:spcPts val="0"/>
-                </a:spcAft>
-                <a:buNone/>
-              </a:pPr>
-              <a:endParaRPr/>
-            </a:p>
-          </p:txBody>
-        </p:sp>
-        <p:sp>
-          <p:nvSpPr>
-            <p:cNvPr id="289" name="Google Shape;289;p21"/>
-            <p:cNvSpPr/>
-            <p:nvPr/>
-          </p:nvSpPr>
-          <p:spPr>
-            <a:xfrm>
-              <a:off x="0" y="0"/>
-              <a:ext cx="76200" cy="809700"/>
-            </a:xfrm>
-            <a:custGeom>
-              <a:avLst/>
-              <a:gdLst/>
-              <a:ahLst/>
-              <a:cxnLst/>
-              <a:rect l="l" t="t" r="r" b="b"/>
-              <a:pathLst>
-                <a:path w="120000" h="120000" extrusionOk="0">
-                  <a:moveTo>
-                    <a:pt x="0" y="11294"/>
-                  </a:moveTo>
-                  <a:quadBezTo>
-                    <a:pt x="0" y="0"/>
-                    <a:pt x="120000" y="0"/>
-                  </a:quadBezTo>
-                  <a:lnTo>
-                    <a:pt x="120000" y="120000"/>
-                  </a:lnTo>
-                  <a:quadBezTo>
-                    <a:pt x="0" y="120000"/>
-                    <a:pt x="0" y="108706"/>
-                  </a:quadBezTo>
-                  <a:close/>
-                </a:path>
-              </a:pathLst>
-            </a:custGeom>
-            <a:solidFill>
-              <a:srgbClr val="3B82F6"/>
-            </a:solidFill>
-            <a:ln>
-              <a:noFill/>
-            </a:ln>
-          </p:spPr>
-          <p:txBody>
-            <a:bodyPr spcFirstLastPara="1" wrap="square" lIns="0" tIns="0" rIns="0" bIns="0" anchor="ctr" anchorCtr="0">
-              <a:noAutofit/>
-            </a:bodyPr>
-            <a:lstStyle/>
-            <a:p>
-              <a:pPr marL="0" lvl="0" indent="0" algn="l" rtl="0">
-                <a:spcBef>
-                  <a:spcPts val="0"/>
-                </a:spcBef>
-                <a:spcAft>
-                  <a:spcPts val="0"/>
-                </a:spcAft>
-                <a:buNone/>
-              </a:pPr>
-              <a:endParaRPr/>
-            </a:p>
-          </p:txBody>
-        </p:sp>
-        <p:sp>
-          <p:nvSpPr>
-            <p:cNvPr id="290" name="Google Shape;290;p21"/>
-            <p:cNvSpPr txBox="1"/>
-            <p:nvPr/>
-          </p:nvSpPr>
-          <p:spPr>
-            <a:xfrm>
-              <a:off x="228600" y="0"/>
-              <a:ext cx="4343400" cy="809700"/>
-            </a:xfrm>
-            <a:prstGeom prst="rect">
-              <a:avLst/>
-            </a:prstGeom>
-            <a:noFill/>
-            <a:ln>
-              <a:noFill/>
-            </a:ln>
-          </p:spPr>
-          <p:txBody>
-            <a:bodyPr spcFirstLastPara="1" wrap="square" lIns="0" tIns="0" rIns="0" bIns="0" anchor="ctr" anchorCtr="0">
-              <a:noAutofit/>
-            </a:bodyPr>
-            <a:lstStyle/>
-            <a:p>
-              <a:pPr marL="0" lvl="0" indent="0" algn="l" rtl="0">
-                <a:spcBef>
-                  <a:spcPts val="0"/>
-                </a:spcBef>
-                <a:spcAft>
-                  <a:spcPts val="0"/>
-                </a:spcAft>
-                <a:buNone/>
-              </a:pPr>
-              <a:r>
-                <a:rPr lang="en-US" sz="1400" b="1">
-                  <a:solidFill>
-                    <a:srgbClr val="1E3A8A"/>
-                  </a:solidFill>
-                  <a:latin typeface="Inter"/>
-                  <a:ea typeface="Inter"/>
-                  <a:cs typeface="Inter"/>
-                  <a:sym typeface="Inter"/>
-                </a:rPr>
-                <a:t>1. The Scout</a:t>
-              </a:r>
-              <a:endParaRPr sz="1400" b="1">
-                <a:solidFill>
-                  <a:srgbClr val="1E3A8A"/>
-                </a:solidFill>
-                <a:latin typeface="Inter"/>
-                <a:ea typeface="Inter"/>
-                <a:cs typeface="Inter"/>
-                <a:sym typeface="Inter"/>
-              </a:endParaRPr>
-            </a:p>
-            <a:p>
-              <a:pPr marL="0" lvl="0" indent="0" algn="l" rtl="0">
-                <a:spcBef>
-                  <a:spcPts val="300"/>
-                </a:spcBef>
-                <a:spcAft>
-                  <a:spcPts val="0"/>
-                </a:spcAft>
-                <a:buNone/>
-              </a:pPr>
-              <a:r>
-                <a:rPr lang="en-US" sz="1100" b="0">
-                  <a:solidFill>
-                    <a:srgbClr val="1E40AF"/>
-                  </a:solidFill>
-                  <a:latin typeface="Inter"/>
-                  <a:ea typeface="Inter"/>
-                  <a:cs typeface="Inter"/>
-                  <a:sym typeface="Inter"/>
-                </a:rPr>
-                <a:t>Searches the web and structured databases for raw information.</a:t>
-              </a:r>
-              <a:endParaRPr sz="1100" b="0">
-                <a:solidFill>
-                  <a:srgbClr val="1E40AF"/>
-                </a:solidFill>
-                <a:latin typeface="Inter"/>
-                <a:ea typeface="Inter"/>
-                <a:cs typeface="Inter"/>
-                <a:sym typeface="Inter"/>
-              </a:endParaRPr>
-            </a:p>
-          </p:txBody>
-        </p:sp>
-      </p:grpSp>
-      <p:grpSp>
-        <p:nvGrpSpPr>
-          <p:cNvPr id="291" name="Google Shape;291;p21"/>
-          <p:cNvGrpSpPr/>
-          <p:nvPr/>
-        </p:nvGrpSpPr>
-        <p:grpSpPr>
-          <a:xfrm>
-            <a:off x="762000" y="3333750"/>
-            <a:ext cx="4762500" cy="809700"/>
-            <a:chOff x="0" y="0"/>
-            <a:chExt cx="4762500" cy="809700"/>
-          </a:xfrm>
-        </p:grpSpPr>
-        <p:sp>
-          <p:nvSpPr>
-            <p:cNvPr id="292" name="Google Shape;292;p21"/>
-            <p:cNvSpPr/>
-            <p:nvPr/>
-          </p:nvSpPr>
-          <p:spPr>
-            <a:xfrm>
-              <a:off x="0" y="0"/>
-              <a:ext cx="4762500" cy="809700"/>
-            </a:xfrm>
-            <a:prstGeom prst="roundRect">
-              <a:avLst>
-                <a:gd name="adj" fmla="val 9411"/>
-              </a:avLst>
-            </a:prstGeom>
-            <a:solidFill>
-              <a:srgbClr val="F0FDF4"/>
-            </a:solidFill>
-            <a:ln w="9525" cap="flat" cmpd="sng">
-              <a:solidFill>
-                <a:srgbClr val="DCFCE7"/>
-              </a:solidFill>
-              <a:prstDash val="solid"/>
-              <a:round/>
-              <a:headEnd type="none" w="sm" len="sm"/>
-              <a:tailEnd type="none" w="sm" len="sm"/>
-            </a:ln>
-          </p:spPr>
-          <p:txBody>
-            <a:bodyPr spcFirstLastPara="1" wrap="square" lIns="0" tIns="0" rIns="0" bIns="0" anchor="ctr" anchorCtr="0">
-              <a:noAutofit/>
-            </a:bodyPr>
-            <a:lstStyle/>
-            <a:p>
-              <a:pPr marL="0" lvl="0" indent="0" algn="l" rtl="0">
-                <a:spcBef>
-                  <a:spcPts val="0"/>
-                </a:spcBef>
-                <a:spcAft>
-                  <a:spcPts val="0"/>
-                </a:spcAft>
-                <a:buNone/>
-              </a:pPr>
-              <a:endParaRPr/>
-            </a:p>
-          </p:txBody>
-        </p:sp>
-        <p:sp>
-          <p:nvSpPr>
-            <p:cNvPr id="293" name="Google Shape;293;p21"/>
-            <p:cNvSpPr/>
-            <p:nvPr/>
-          </p:nvSpPr>
-          <p:spPr>
-            <a:xfrm>
-              <a:off x="0" y="0"/>
-              <a:ext cx="76200" cy="809700"/>
-            </a:xfrm>
-            <a:custGeom>
-              <a:avLst/>
-              <a:gdLst/>
-              <a:ahLst/>
-              <a:cxnLst/>
-              <a:rect l="l" t="t" r="r" b="b"/>
-              <a:pathLst>
-                <a:path w="120000" h="120000" extrusionOk="0">
-                  <a:moveTo>
-                    <a:pt x="0" y="11294"/>
-                  </a:moveTo>
-                  <a:quadBezTo>
-                    <a:pt x="0" y="0"/>
-                    <a:pt x="120000" y="0"/>
-                  </a:quadBezTo>
-                  <a:lnTo>
-                    <a:pt x="120000" y="120000"/>
-                  </a:lnTo>
-                  <a:quadBezTo>
-                    <a:pt x="0" y="120000"/>
-                    <a:pt x="0" y="108706"/>
-                  </a:quadBezTo>
-                  <a:close/>
-                </a:path>
-              </a:pathLst>
-            </a:custGeom>
-            <a:solidFill>
-              <a:srgbClr val="22C55E"/>
-            </a:solidFill>
-            <a:ln>
-              <a:noFill/>
-            </a:ln>
-          </p:spPr>
-          <p:txBody>
-            <a:bodyPr spcFirstLastPara="1" wrap="square" lIns="0" tIns="0" rIns="0" bIns="0" anchor="ctr" anchorCtr="0">
-              <a:noAutofit/>
-            </a:bodyPr>
-            <a:lstStyle/>
-            <a:p>
-              <a:pPr marL="0" lvl="0" indent="0" algn="l" rtl="0">
-                <a:spcBef>
-                  <a:spcPts val="0"/>
-                </a:spcBef>
-                <a:spcAft>
-                  <a:spcPts val="0"/>
-                </a:spcAft>
-                <a:buNone/>
-              </a:pPr>
-              <a:endParaRPr/>
-            </a:p>
-          </p:txBody>
-        </p:sp>
-        <p:sp>
-          <p:nvSpPr>
-            <p:cNvPr id="294" name="Google Shape;294;p21"/>
-            <p:cNvSpPr txBox="1"/>
-            <p:nvPr/>
-          </p:nvSpPr>
-          <p:spPr>
-            <a:xfrm>
-              <a:off x="228600" y="0"/>
-              <a:ext cx="4343400" cy="809700"/>
-            </a:xfrm>
-            <a:prstGeom prst="rect">
-              <a:avLst/>
-            </a:prstGeom>
-            <a:noFill/>
-            <a:ln>
-              <a:noFill/>
-            </a:ln>
-          </p:spPr>
-          <p:txBody>
-            <a:bodyPr spcFirstLastPara="1" wrap="square" lIns="0" tIns="0" rIns="0" bIns="0" anchor="ctr" anchorCtr="0">
-              <a:noAutofit/>
-            </a:bodyPr>
-            <a:lstStyle/>
-            <a:p>
-              <a:pPr marL="0" lvl="0" indent="0" algn="l" rtl="0">
-                <a:spcBef>
-                  <a:spcPts val="0"/>
-                </a:spcBef>
-                <a:spcAft>
-                  <a:spcPts val="0"/>
-                </a:spcAft>
-                <a:buNone/>
-              </a:pPr>
-              <a:r>
-                <a:rPr lang="en-US" sz="1400" b="1">
-                  <a:solidFill>
-                    <a:srgbClr val="14532D"/>
-                  </a:solidFill>
-                  <a:latin typeface="Inter"/>
-                  <a:ea typeface="Inter"/>
-                  <a:cs typeface="Inter"/>
-                  <a:sym typeface="Inter"/>
-                </a:rPr>
-                <a:t>2. The Analyst</a:t>
-              </a:r>
-              <a:endParaRPr sz="1400" b="1">
-                <a:solidFill>
-                  <a:srgbClr val="14532D"/>
-                </a:solidFill>
-                <a:latin typeface="Inter"/>
-                <a:ea typeface="Inter"/>
-                <a:cs typeface="Inter"/>
-                <a:sym typeface="Inter"/>
-              </a:endParaRPr>
-            </a:p>
-            <a:p>
-              <a:pPr marL="0" lvl="0" indent="0" algn="l" rtl="0">
-                <a:spcBef>
-                  <a:spcPts val="300"/>
-                </a:spcBef>
-                <a:spcAft>
-                  <a:spcPts val="0"/>
-                </a:spcAft>
-                <a:buNone/>
-              </a:pPr>
-              <a:r>
-                <a:rPr lang="en-US" sz="1100" b="0">
-                  <a:solidFill>
-                    <a:srgbClr val="166534"/>
-                  </a:solidFill>
-                  <a:latin typeface="Inter"/>
-                  <a:ea typeface="Inter"/>
-                  <a:cs typeface="Inter"/>
-                  <a:sym typeface="Inter"/>
-                </a:rPr>
-                <a:t>Reads content thoroughly, extracts insights, and fact-checks data.</a:t>
-              </a:r>
-              <a:endParaRPr sz="1100" b="0">
-                <a:solidFill>
-                  <a:srgbClr val="166534"/>
-                </a:solidFill>
-                <a:latin typeface="Inter"/>
-                <a:ea typeface="Inter"/>
-                <a:cs typeface="Inter"/>
-                <a:sym typeface="Inter"/>
-              </a:endParaRPr>
-            </a:p>
-          </p:txBody>
-        </p:sp>
-      </p:grpSp>
-      <p:grpSp>
-        <p:nvGrpSpPr>
-          <p:cNvPr id="295" name="Google Shape;295;p21"/>
-          <p:cNvGrpSpPr/>
-          <p:nvPr/>
-        </p:nvGrpSpPr>
-        <p:grpSpPr>
-          <a:xfrm>
-            <a:off x="762000" y="4286250"/>
-            <a:ext cx="4762500" cy="809700"/>
-            <a:chOff x="0" y="0"/>
-            <a:chExt cx="4762500" cy="809700"/>
-          </a:xfrm>
-        </p:grpSpPr>
-        <p:sp>
-          <p:nvSpPr>
-            <p:cNvPr id="296" name="Google Shape;296;p21"/>
-            <p:cNvSpPr/>
-            <p:nvPr/>
-          </p:nvSpPr>
-          <p:spPr>
-            <a:xfrm>
-              <a:off x="0" y="0"/>
-              <a:ext cx="4762500" cy="809700"/>
-            </a:xfrm>
-            <a:prstGeom prst="roundRect">
-              <a:avLst>
-                <a:gd name="adj" fmla="val 9411"/>
-              </a:avLst>
-            </a:prstGeom>
-            <a:solidFill>
-              <a:srgbClr val="FEF9C3"/>
-            </a:solidFill>
-            <a:ln w="9525" cap="flat" cmpd="sng">
-              <a:solidFill>
-                <a:srgbClr val="FEF08A"/>
-              </a:solidFill>
-              <a:prstDash val="solid"/>
-              <a:round/>
-              <a:headEnd type="none" w="sm" len="sm"/>
-              <a:tailEnd type="none" w="sm" len="sm"/>
-            </a:ln>
-          </p:spPr>
-          <p:txBody>
-            <a:bodyPr spcFirstLastPara="1" wrap="square" lIns="0" tIns="0" rIns="0" bIns="0" anchor="ctr" anchorCtr="0">
-              <a:noAutofit/>
-            </a:bodyPr>
-            <a:lstStyle/>
-            <a:p>
-              <a:pPr marL="0" lvl="0" indent="0" algn="l" rtl="0">
-                <a:spcBef>
-                  <a:spcPts val="0"/>
-                </a:spcBef>
-                <a:spcAft>
-                  <a:spcPts val="0"/>
-                </a:spcAft>
-                <a:buNone/>
-              </a:pPr>
-              <a:endParaRPr/>
-            </a:p>
-          </p:txBody>
-        </p:sp>
-        <p:sp>
-          <p:nvSpPr>
-            <p:cNvPr id="297" name="Google Shape;297;p21"/>
-            <p:cNvSpPr/>
-            <p:nvPr/>
-          </p:nvSpPr>
-          <p:spPr>
-            <a:xfrm>
-              <a:off x="0" y="0"/>
-              <a:ext cx="76200" cy="809700"/>
-            </a:xfrm>
-            <a:custGeom>
-              <a:avLst/>
-              <a:gdLst/>
-              <a:ahLst/>
-              <a:cxnLst/>
-              <a:rect l="l" t="t" r="r" b="b"/>
-              <a:pathLst>
-                <a:path w="120000" h="120000" extrusionOk="0">
-                  <a:moveTo>
-                    <a:pt x="0" y="11294"/>
-                  </a:moveTo>
-                  <a:quadBezTo>
-                    <a:pt x="0" y="0"/>
-                    <a:pt x="120000" y="0"/>
-                  </a:quadBezTo>
-                  <a:lnTo>
-                    <a:pt x="120000" y="120000"/>
-                  </a:lnTo>
-                  <a:quadBezTo>
-                    <a:pt x="0" y="120000"/>
-                    <a:pt x="0" y="108706"/>
-                  </a:quadBezTo>
-                  <a:close/>
-                </a:path>
-              </a:pathLst>
-            </a:custGeom>
-            <a:solidFill>
-              <a:srgbClr val="EAB308"/>
-            </a:solidFill>
-            <a:ln>
-              <a:noFill/>
-            </a:ln>
-          </p:spPr>
-          <p:txBody>
-            <a:bodyPr spcFirstLastPara="1" wrap="square" lIns="0" tIns="0" rIns="0" bIns="0" anchor="ctr" anchorCtr="0">
-              <a:noAutofit/>
-            </a:bodyPr>
-            <a:lstStyle/>
-            <a:p>
-              <a:pPr marL="0" lvl="0" indent="0" algn="l" rtl="0">
-                <a:spcBef>
-                  <a:spcPts val="0"/>
-                </a:spcBef>
-                <a:spcAft>
-                  <a:spcPts val="0"/>
-                </a:spcAft>
-                <a:buNone/>
-              </a:pPr>
-              <a:endParaRPr/>
-            </a:p>
-          </p:txBody>
-        </p:sp>
-        <p:sp>
-          <p:nvSpPr>
-            <p:cNvPr id="298" name="Google Shape;298;p21"/>
-            <p:cNvSpPr txBox="1"/>
-            <p:nvPr/>
-          </p:nvSpPr>
-          <p:spPr>
-            <a:xfrm>
-              <a:off x="228600" y="0"/>
-              <a:ext cx="4343400" cy="809700"/>
-            </a:xfrm>
-            <a:prstGeom prst="rect">
-              <a:avLst/>
-            </a:prstGeom>
-            <a:noFill/>
-            <a:ln>
-              <a:noFill/>
-            </a:ln>
-          </p:spPr>
-          <p:txBody>
-            <a:bodyPr spcFirstLastPara="1" wrap="square" lIns="0" tIns="0" rIns="0" bIns="0" anchor="ctr" anchorCtr="0">
-              <a:noAutofit/>
-            </a:bodyPr>
-            <a:lstStyle/>
-            <a:p>
-              <a:pPr marL="0" lvl="0" indent="0" algn="l" rtl="0">
-                <a:spcBef>
-                  <a:spcPts val="0"/>
-                </a:spcBef>
-                <a:spcAft>
-                  <a:spcPts val="0"/>
-                </a:spcAft>
-                <a:buNone/>
-              </a:pPr>
-              <a:r>
-                <a:rPr lang="en-US" sz="1400" b="1">
-                  <a:solidFill>
-                    <a:srgbClr val="713F12"/>
-                  </a:solidFill>
-                  <a:latin typeface="Inter"/>
-                  <a:ea typeface="Inter"/>
-                  <a:cs typeface="Inter"/>
-                  <a:sym typeface="Inter"/>
-                </a:rPr>
-                <a:t>3. The Editor</a:t>
-              </a:r>
-              <a:endParaRPr sz="1400" b="1">
-                <a:solidFill>
-                  <a:srgbClr val="713F12"/>
-                </a:solidFill>
-                <a:latin typeface="Inter"/>
-                <a:ea typeface="Inter"/>
-                <a:cs typeface="Inter"/>
-                <a:sym typeface="Inter"/>
-              </a:endParaRPr>
-            </a:p>
-            <a:p>
-              <a:pPr marL="0" lvl="0" indent="0" algn="l" rtl="0">
-                <a:spcBef>
-                  <a:spcPts val="300"/>
-                </a:spcBef>
-                <a:spcAft>
-                  <a:spcPts val="0"/>
-                </a:spcAft>
-                <a:buNone/>
-              </a:pPr>
-              <a:r>
-                <a:rPr lang="en-US" sz="1100" b="0">
-                  <a:solidFill>
-                    <a:srgbClr val="854D0E"/>
-                  </a:solidFill>
-                  <a:latin typeface="Inter"/>
-                  <a:ea typeface="Inter"/>
-                  <a:cs typeface="Inter"/>
-                  <a:sym typeface="Inter"/>
-                </a:rPr>
-                <a:t>Synthesizes perspectives and drafts the finalized comprehensive report.</a:t>
-              </a:r>
-              <a:endParaRPr sz="1100" b="0">
-                <a:solidFill>
-                  <a:srgbClr val="854D0E"/>
-                </a:solidFill>
-                <a:latin typeface="Inter"/>
-                <a:ea typeface="Inter"/>
-                <a:cs typeface="Inter"/>
-                <a:sym typeface="Inter"/>
-              </a:endParaRPr>
-            </a:p>
-          </p:txBody>
-        </p:sp>
-      </p:grpSp>
-      <p:sp>
-        <p:nvSpPr>
-          <p:cNvPr id="299" name="Google Shape;299;p21"/>
-          <p:cNvSpPr/>
-          <p:nvPr/>
-        </p:nvSpPr>
-        <p:spPr>
-          <a:xfrm>
-            <a:off x="0" y="6286500"/>
-            <a:ext cx="12192000" cy="571500"/>
-          </a:xfrm>
-          <a:prstGeom prst="rect">
-            <a:avLst/>
-          </a:prstGeom>
-          <a:solidFill>
-            <a:srgbClr val="0F172A"/>
-          </a:solidFill>
-          <a:ln>
-            <a:noFill/>
-          </a:ln>
-        </p:spPr>
-        <p:txBody>
-          <a:bodyPr spcFirstLastPara="1" wrap="square" lIns="91425" tIns="45700" rIns="91425" bIns="45700" anchor="ctr" anchorCtr="0">
-            <a:noAutofit/>
-          </a:bodyPr>
-          <a:lstStyle/>
-          <a:p>
-            <a:pPr marL="0" marR="0" lvl="0" indent="0" algn="ctr" rtl="0">
-              <a:spcBef>
-                <a:spcPts val="0"/>
-              </a:spcBef>
-              <a:spcAft>
-                <a:spcPts val="0"/>
-              </a:spcAft>
-              <a:buNone/>
-            </a:pPr>
-            <a:endParaRPr sz="1800" b="0" i="0" u="none" strike="noStrike" cap="none">
-              <a:solidFill>
-                <a:schemeClr val="dk1"/>
-              </a:solidFill>
-              <a:latin typeface="Calibri"/>
-              <a:ea typeface="Calibri"/>
-              <a:cs typeface="Calibri"/>
-              <a:sym typeface="Calibri"/>
-            </a:endParaRPr>
-          </a:p>
-        </p:txBody>
-      </p:sp>
-      <p:sp>
-        <p:nvSpPr>
-          <p:cNvPr id="300" name="Google Shape;300;p21"/>
-          <p:cNvSpPr txBox="1"/>
-          <p:nvPr/>
-        </p:nvSpPr>
-        <p:spPr>
-          <a:xfrm>
-            <a:off x="381000" y="6286500"/>
-            <a:ext cx="11430000" cy="184800"/>
-          </a:xfrm>
-          <a:prstGeom prst="rect">
-            <a:avLst/>
-          </a:prstGeom>
-          <a:noFill/>
-          <a:ln>
-            <a:noFill/>
-          </a:ln>
-        </p:spPr>
-        <p:txBody>
-          <a:bodyPr spcFirstLastPara="1" wrap="square" lIns="0" tIns="0" rIns="0" bIns="0" anchor="ctr" anchorCtr="0">
-            <a:spAutoFit/>
-          </a:bodyPr>
-          <a:lstStyle/>
-          <a:p>
-            <a:pPr marL="0" marR="0" lvl="0" indent="0" algn="l" rtl="0">
-              <a:spcBef>
-                <a:spcPts val="0"/>
-              </a:spcBef>
-              <a:spcAft>
-                <a:spcPts val="0"/>
-              </a:spcAft>
-              <a:buNone/>
-            </a:pPr>
-            <a:r>
-              <a:rPr lang="en-US" sz="1200" b="0" i="0" u="none" strike="noStrike" cap="none">
-                <a:solidFill>
-                  <a:srgbClr val="FFFFFF"/>
-                </a:solidFill>
-                <a:latin typeface="Inter"/>
-                <a:ea typeface="Inter"/>
-                <a:cs typeface="Inter"/>
-                <a:sym typeface="Inter"/>
-              </a:rPr>
-              <a:t>Complexity is managed by </a:t>
-            </a:r>
-            <a:r>
-              <a:rPr lang="en-US" sz="1200" b="1" i="0" u="none" strike="noStrike" cap="none">
-                <a:solidFill>
-                  <a:srgbClr val="FFFFFF"/>
-                </a:solidFill>
-                <a:latin typeface="Inter"/>
-                <a:ea typeface="Inter"/>
-                <a:cs typeface="Inter"/>
-                <a:sym typeface="Inter"/>
-              </a:rPr>
-              <a:t>Delegation</a:t>
-            </a:r>
-            <a:r>
-              <a:rPr lang="en-US" sz="1200" b="0" i="0" u="none" strike="noStrike" cap="none">
-                <a:solidFill>
-                  <a:srgbClr val="FFFFFF"/>
-                </a:solidFill>
-                <a:latin typeface="Inter"/>
-                <a:ea typeface="Inter"/>
-                <a:cs typeface="Inter"/>
-                <a:sym typeface="Inter"/>
-              </a:rPr>
-              <a:t> between specialized agents.</a:t>
-            </a:r>
-            <a:endParaRPr/>
-          </a:p>
-        </p:txBody>
-      </p:sp>
-      <p:sp>
-        <p:nvSpPr>
-          <p:cNvPr id="301" name="Google Shape;301;p21"/>
-          <p:cNvSpPr txBox="1"/>
-          <p:nvPr/>
-        </p:nvSpPr>
-        <p:spPr>
-          <a:xfrm>
-            <a:off x="8953500" y="266700"/>
-            <a:ext cx="2857500" cy="184800"/>
-          </a:xfrm>
-          <a:prstGeom prst="rect">
-            <a:avLst/>
-          </a:prstGeom>
-          <a:noFill/>
-          <a:ln>
-            <a:noFill/>
-          </a:ln>
-        </p:spPr>
-        <p:txBody>
-          <a:bodyPr spcFirstLastPara="1" wrap="square" lIns="0" tIns="0" rIns="0" bIns="0" anchor="t" anchorCtr="0">
-            <a:spAutoFit/>
-          </a:bodyPr>
-          <a:lstStyle/>
-          <a:p>
-            <a:pPr marL="0" marR="0" lvl="0" indent="0" algn="r" rtl="0">
-              <a:spcBef>
-                <a:spcPts val="0"/>
-              </a:spcBef>
-              <a:spcAft>
-                <a:spcPts val="0"/>
-              </a:spcAft>
-              <a:buNone/>
-            </a:pPr>
-            <a:r>
-              <a:rPr lang="en-US" sz="1200" b="0" i="0" u="none" strike="noStrike" cap="none">
-                <a:solidFill>
-                  <a:srgbClr val="94A3B8"/>
-                </a:solidFill>
-                <a:latin typeface="Inter Medium"/>
-                <a:ea typeface="Inter Medium"/>
-                <a:cs typeface="Inter Medium"/>
-                <a:sym typeface="Inter Medium"/>
-              </a:rPr>
-              <a:t>Slide 09</a:t>
-            </a:r>
-            <a:endParaRPr/>
-          </a:p>
-        </p:txBody>
-      </p:sp>
-      <p:sp>
-        <p:nvSpPr>
-          <p:cNvPr id="302" name="Google Shape;302;p21"/>
-          <p:cNvSpPr txBox="1"/>
-          <p:nvPr/>
-        </p:nvSpPr>
-        <p:spPr>
-          <a:xfrm>
-            <a:off x="762000" y="1104900"/>
-            <a:ext cx="11201400" cy="461700"/>
-          </a:xfrm>
-          <a:prstGeom prst="rect">
-            <a:avLst/>
-          </a:prstGeom>
-          <a:noFill/>
-          <a:ln>
-            <a:noFill/>
-          </a:ln>
-        </p:spPr>
-        <p:txBody>
-          <a:bodyPr spcFirstLastPara="1" wrap="square" lIns="0" tIns="0" rIns="0" bIns="0" anchor="t" anchorCtr="0">
-            <a:spAutoFit/>
-          </a:bodyPr>
-          <a:lstStyle/>
-          <a:p>
-            <a:pPr marL="0" marR="0" lvl="0" indent="0" algn="l" rtl="0">
-              <a:spcBef>
-                <a:spcPts val="0"/>
-              </a:spcBef>
-              <a:spcAft>
-                <a:spcPts val="0"/>
-              </a:spcAft>
-              <a:buNone/>
-            </a:pPr>
-            <a:r>
-              <a:rPr lang="en-US" sz="3000" b="1" i="0" u="none" strike="noStrike" cap="none">
-                <a:solidFill>
-                  <a:srgbClr val="0F172A"/>
-                </a:solidFill>
-                <a:latin typeface="DM Sans"/>
-                <a:ea typeface="DM Sans"/>
-                <a:cs typeface="DM Sans"/>
-                <a:sym typeface="DM Sans"/>
-              </a:rPr>
-              <a:t>Agent Workflow Architecture</a:t>
-            </a:r>
-            <a:endParaRPr/>
-          </a:p>
-        </p:txBody>
-      </p:sp>
-      <p:sp>
-        <p:nvSpPr>
-          <p:cNvPr id="303" name="Google Shape;303;p21"/>
-          <p:cNvSpPr/>
-          <p:nvPr/>
-        </p:nvSpPr>
-        <p:spPr>
-          <a:xfrm>
-            <a:off x="381000" y="266700"/>
-            <a:ext cx="381000" cy="190500"/>
-          </a:xfrm>
-          <a:prstGeom prst="roundRect">
-            <a:avLst>
-              <a:gd name="adj" fmla="val 50000"/>
-            </a:avLst>
-          </a:prstGeom>
-          <a:noFill/>
-          <a:ln w="19050" cap="flat" cmpd="sng">
-            <a:solidFill>
-              <a:srgbClr val="0F172A"/>
-            </a:solidFill>
-            <a:prstDash val="solid"/>
-            <a:round/>
-            <a:headEnd type="none" w="sm" len="sm"/>
-            <a:tailEnd type="none" w="sm" len="sm"/>
-          </a:ln>
-        </p:spPr>
-        <p:txBody>
-          <a:bodyPr spcFirstLastPara="1" wrap="square" lIns="91425" tIns="45700" rIns="91425" bIns="45700" anchor="ctr" anchorCtr="0">
-            <a:noAutofit/>
-          </a:bodyPr>
-          <a:lstStyle/>
-          <a:p>
-            <a:pPr marL="0" marR="0" lvl="0" indent="0" algn="ctr" rtl="0">
-              <a:spcBef>
-                <a:spcPts val="0"/>
-              </a:spcBef>
-              <a:spcAft>
-                <a:spcPts val="0"/>
-              </a:spcAft>
-              <a:buNone/>
-            </a:pPr>
-            <a:endParaRPr sz="1800" b="0" i="0" u="none" strike="noStrike" cap="none">
-              <a:solidFill>
-                <a:schemeClr val="dk1"/>
-              </a:solidFill>
-              <a:latin typeface="Calibri"/>
-              <a:ea typeface="Calibri"/>
-              <a:cs typeface="Calibri"/>
-              <a:sym typeface="Calibri"/>
-            </a:endParaRPr>
-          </a:p>
-        </p:txBody>
-      </p:sp>
-      <p:sp>
-        <p:nvSpPr>
-          <p:cNvPr id="304" name="Google Shape;304;p21"/>
-          <p:cNvSpPr txBox="1"/>
-          <p:nvPr/>
-        </p:nvSpPr>
-        <p:spPr>
-          <a:xfrm>
-            <a:off x="762000" y="1809750"/>
-            <a:ext cx="4762500" cy="461700"/>
-          </a:xfrm>
-          <a:prstGeom prst="rect">
-            <a:avLst/>
-          </a:prstGeom>
-          <a:solidFill>
-            <a:srgbClr val="000000">
-              <a:alpha val="0"/>
-            </a:srgbClr>
-          </a:solidFill>
-          <a:ln>
-            <a:noFill/>
-          </a:ln>
-        </p:spPr>
-        <p:txBody>
-          <a:bodyPr spcFirstLastPara="1" wrap="square" lIns="0" tIns="0" rIns="0" bIns="0" anchor="ctr" anchorCtr="0">
-            <a:spAutoFit/>
-          </a:bodyPr>
-          <a:lstStyle/>
-          <a:p>
-            <a:pPr marL="0" lvl="0" indent="0" algn="l" rtl="0">
-              <a:spcBef>
-                <a:spcPts val="0"/>
-              </a:spcBef>
-              <a:spcAft>
-                <a:spcPts val="0"/>
-              </a:spcAft>
-              <a:buNone/>
-            </a:pPr>
-            <a:r>
-              <a:rPr lang="en-US" sz="1500" b="0">
-                <a:solidFill>
-                  <a:srgbClr val="334155"/>
-                </a:solidFill>
-                <a:latin typeface="Inter Medium"/>
-                <a:ea typeface="Inter Medium"/>
-                <a:cs typeface="Inter Medium"/>
-                <a:sym typeface="Inter Medium"/>
-              </a:rPr>
-              <a:t>The Research Assistant operates as a </a:t>
-            </a:r>
-            <a:r>
-              <a:rPr lang="en-US" sz="1500" b="1">
-                <a:solidFill>
-                  <a:srgbClr val="0F172A"/>
-                </a:solidFill>
-                <a:latin typeface="Inter"/>
-                <a:ea typeface="Inter"/>
-                <a:cs typeface="Inter"/>
-                <a:sym typeface="Inter"/>
-              </a:rPr>
-              <a:t>Multi-Agent Team</a:t>
-            </a:r>
-            <a:r>
-              <a:rPr lang="en-US" sz="1500" b="0">
-                <a:solidFill>
-                  <a:srgbClr val="334155"/>
-                </a:solidFill>
-                <a:latin typeface="Inter Medium"/>
-                <a:ea typeface="Inter Medium"/>
-                <a:cs typeface="Inter Medium"/>
-                <a:sym typeface="Inter Medium"/>
-              </a:rPr>
-              <a:t>:</a:t>
-            </a:r>
-            <a:endParaRPr sz="1500" b="0">
-              <a:solidFill>
-                <a:srgbClr val="334155"/>
-              </a:solidFill>
-              <a:latin typeface="Inter Medium"/>
-              <a:ea typeface="Inter Medium"/>
-              <a:cs typeface="Inter Medium"/>
-              <a:sym typeface="Inter Medium"/>
             </a:endParaRPr>
           </a:p>
         </p:txBody>

--- a/Week_05/Lecture 09 - Introduction to Agentic AI.pptx
+++ b/Week_05/Lecture 09 - Introduction to Agentic AI.pptx
@@ -27442,7 +27442,7 @@
                 <a:buNone/>
               </a:pPr>
               <a:r>
-                <a:rPr lang="en-US" sz="1000" b="1">
+                <a:rPr lang="en-US" sz="1000" b="1" dirty="0">
                   <a:solidFill>
                     <a:srgbClr val="94A3B8"/>
                   </a:solidFill>
@@ -27454,7 +27454,7 @@
                 <a:t>🖥️ LIVE DEMO SCENARIO: AI Research Assistant</a:t>
               </a:r>
               <a:r>
-                <a:rPr lang="en-US" sz="900" b="1">
+                <a:rPr lang="en-US" sz="900" b="1" dirty="0">
                   <a:solidFill>
                     <a:srgbClr val="22C55E"/>
                   </a:solidFill>
@@ -27465,7 +27465,7 @@
                 </a:rPr>
                 <a:t>● ACTIVE LOOP</a:t>
               </a:r>
-              <a:endParaRPr>
+              <a:endParaRPr dirty="0">
                 <a:latin typeface="Courier New"/>
                 <a:ea typeface="Courier New"/>
                 <a:cs typeface="Courier New"/>
@@ -27483,7 +27483,7 @@
                 <a:buNone/>
               </a:pPr>
               <a:r>
-                <a:rPr lang="en-US" sz="900" b="1">
+                <a:rPr lang="en-US" sz="900" b="1" dirty="0" err="1">
                   <a:solidFill>
                     <a:srgbClr val="0F172A"/>
                   </a:solidFill>
@@ -27498,7 +27498,7 @@
                 <a:t>INPUT</a:t>
               </a:r>
               <a:r>
-                <a:rPr lang="en-US" sz="1100" b="0">
+                <a:rPr lang="en-US" sz="1100" b="0" dirty="0" err="1">
                   <a:solidFill>
                     <a:srgbClr val="F1F5F9"/>
                   </a:solidFill>
@@ -27507,10 +27507,34 @@
                   <a:cs typeface="Inter SemiBold"/>
                   <a:sym typeface="Inter SemiBold"/>
                 </a:rPr>
-                <a:t>"Find and summarize recent 6G wireless research papers."</a:t>
+                <a:t>"Find</a:t>
               </a:r>
               <a:r>
-                <a:rPr lang="en-US">
+                <a:rPr lang="en-US" sz="1100" b="0" dirty="0">
+                  <a:solidFill>
+                    <a:srgbClr val="F1F5F9"/>
+                  </a:solidFill>
+                  <a:latin typeface="Inter SemiBold"/>
+                  <a:ea typeface="Inter SemiBold"/>
+                  <a:cs typeface="Inter SemiBold"/>
+                  <a:sym typeface="Inter SemiBold"/>
+                </a:rPr>
+                <a:t> and summarize recent 6G wireless research </a:t>
+              </a:r>
+              <a:r>
+                <a:rPr lang="en-US" sz="1100" b="0" dirty="0" err="1">
+                  <a:solidFill>
+                    <a:srgbClr val="F1F5F9"/>
+                  </a:solidFill>
+                  <a:latin typeface="Inter SemiBold"/>
+                  <a:ea typeface="Inter SemiBold"/>
+                  <a:cs typeface="Inter SemiBold"/>
+                  <a:sym typeface="Inter SemiBold"/>
+                </a:rPr>
+                <a:t>papers."</a:t>
+              </a:r>
+              <a:r>
+                <a:rPr lang="en-US" dirty="0" err="1">
                   <a:solidFill>
                     <a:srgbClr val="64748B"/>
                   </a:solidFill>
@@ -27522,7 +27546,7 @@
                 <a:t>➔</a:t>
               </a:r>
               <a:r>
-                <a:rPr lang="en-US" sz="900" b="1">
+                <a:rPr lang="en-US" sz="900" b="1" dirty="0" err="1">
                   <a:solidFill>
                     <a:srgbClr val="0F172A"/>
                   </a:solidFill>
@@ -27534,10 +27558,40 @@
                   <a:cs typeface="Inter"/>
                   <a:sym typeface="Inter"/>
                 </a:rPr>
-                <a:t>AGENT ACTION</a:t>
+                <a:t>AGENT</a:t>
               </a:r>
               <a:r>
-                <a:rPr lang="en-US" sz="1100">
+                <a:rPr lang="en-US" sz="900" b="1" dirty="0">
+                  <a:solidFill>
+                    <a:srgbClr val="0F172A"/>
+                  </a:solidFill>
+                  <a:highlight>
+                    <a:srgbClr val="F59E0B"/>
+                  </a:highlight>
+                  <a:latin typeface="Inter"/>
+                  <a:ea typeface="Inter"/>
+                  <a:cs typeface="Inter"/>
+                  <a:sym typeface="Inter"/>
+                </a:rPr>
+                <a:t> </a:t>
+              </a:r>
+              <a:r>
+                <a:rPr lang="en-US" sz="900" b="1" dirty="0" err="1">
+                  <a:solidFill>
+                    <a:srgbClr val="0F172A"/>
+                  </a:solidFill>
+                  <a:highlight>
+                    <a:srgbClr val="F59E0B"/>
+                  </a:highlight>
+                  <a:latin typeface="Inter"/>
+                  <a:ea typeface="Inter"/>
+                  <a:cs typeface="Inter"/>
+                  <a:sym typeface="Inter"/>
+                </a:rPr>
+                <a:t>ACTION</a:t>
+              </a:r>
+              <a:r>
+                <a:rPr lang="en-US" sz="1100" dirty="0" err="1">
                   <a:solidFill>
                     <a:srgbClr val="FCD34D"/>
                   </a:solidFill>
@@ -27546,9 +27600,45 @@
                   <a:cs typeface="Inter"/>
                   <a:sym typeface="Inter"/>
                 </a:rPr>
-                <a:t>Searching ArXiv... Found 12 results... Summarizing...</a:t>
+                <a:t>Searching</a:t>
               </a:r>
-              <a:endParaRPr>
+              <a:r>
+                <a:rPr lang="en-US" sz="1100" dirty="0">
+                  <a:solidFill>
+                    <a:srgbClr val="FCD34D"/>
+                  </a:solidFill>
+                  <a:latin typeface="Inter"/>
+                  <a:ea typeface="Inter"/>
+                  <a:cs typeface="Inter"/>
+                  <a:sym typeface="Inter"/>
+                </a:rPr>
+                <a:t> </a:t>
+              </a:r>
+              <a:r>
+                <a:rPr lang="en-US" sz="1100" dirty="0" err="1">
+                  <a:solidFill>
+                    <a:srgbClr val="FCD34D"/>
+                  </a:solidFill>
+                  <a:latin typeface="Inter"/>
+                  <a:ea typeface="Inter"/>
+                  <a:cs typeface="Inter"/>
+                  <a:sym typeface="Inter"/>
+                </a:rPr>
+                <a:t>ArXiv</a:t>
+              </a:r>
+              <a:r>
+                <a:rPr lang="en-US" sz="1100" dirty="0">
+                  <a:solidFill>
+                    <a:srgbClr val="FCD34D"/>
+                  </a:solidFill>
+                  <a:latin typeface="Inter"/>
+                  <a:ea typeface="Inter"/>
+                  <a:cs typeface="Inter"/>
+                  <a:sym typeface="Inter"/>
+                </a:rPr>
+                <a:t>... Found 12 results... Summarizing...</a:t>
+              </a:r>
+              <a:endParaRPr dirty="0">
                 <a:latin typeface="Courier New"/>
                 <a:ea typeface="Courier New"/>
                 <a:cs typeface="Courier New"/>
